--- a/semaine_02/420905_semaine2.pptx
+++ b/semaine_02/420905_semaine2.pptx
@@ -32,22 +32,23 @@
     <p:sldId id="281" r:id="rId26"/>
     <p:sldId id="282" r:id="rId27"/>
     <p:sldId id="283" r:id="rId28"/>
-    <p:sldId id="284" r:id="rId29"/>
-    <p:sldId id="285" r:id="rId30"/>
-    <p:sldId id="323" r:id="rId31"/>
-    <p:sldId id="291" r:id="rId32"/>
-    <p:sldId id="290" r:id="rId33"/>
-    <p:sldId id="292" r:id="rId34"/>
-    <p:sldId id="325" r:id="rId35"/>
-    <p:sldId id="324" r:id="rId36"/>
-    <p:sldId id="326" r:id="rId37"/>
-    <p:sldId id="302" r:id="rId38"/>
-    <p:sldId id="327" r:id="rId39"/>
-    <p:sldId id="328" r:id="rId40"/>
-    <p:sldId id="329" r:id="rId41"/>
-    <p:sldId id="330" r:id="rId42"/>
-    <p:sldId id="331" r:id="rId43"/>
-    <p:sldId id="332" r:id="rId44"/>
+    <p:sldId id="337" r:id="rId29"/>
+    <p:sldId id="284" r:id="rId30"/>
+    <p:sldId id="285" r:id="rId31"/>
+    <p:sldId id="323" r:id="rId32"/>
+    <p:sldId id="291" r:id="rId33"/>
+    <p:sldId id="290" r:id="rId34"/>
+    <p:sldId id="292" r:id="rId35"/>
+    <p:sldId id="325" r:id="rId36"/>
+    <p:sldId id="324" r:id="rId37"/>
+    <p:sldId id="326" r:id="rId38"/>
+    <p:sldId id="302" r:id="rId39"/>
+    <p:sldId id="327" r:id="rId40"/>
+    <p:sldId id="328" r:id="rId41"/>
+    <p:sldId id="329" r:id="rId42"/>
+    <p:sldId id="330" r:id="rId43"/>
+    <p:sldId id="331" r:id="rId44"/>
+    <p:sldId id="332" r:id="rId45"/>
   </p:sldIdLst>
   <p:sldSz cx="12192000" cy="6858000"/>
   <p:notesSz cx="6858000" cy="9144000"/>
@@ -1855,7 +1856,7 @@
           <a:p>
             <a:fld id="{CFA36C02-C10D-4F70-ADA5-0F3523AD6F2E}" type="datetimeFigureOut">
               <a:rPr lang="fr-CA" smtClean="0"/>
-              <a:t>2022-08-14</a:t>
+              <a:t>2022-08-31</a:t>
             </a:fld>
             <a:endParaRPr lang="fr-CA" dirty="0"/>
           </a:p>
@@ -7508,14 +7509,51 @@
                   <a:srgbClr val="73B3D1"/>
                 </a:solidFill>
               </a:rPr>
-              <a:t>Visual Studio code</a:t>
-            </a:r>
+              <a:t>Visual </a:t>
+            </a:r>
+            <a:r>
+              <a:rPr lang="fr-CA" b="1">
+                <a:solidFill>
+                  <a:srgbClr val="73B3D1"/>
+                </a:solidFill>
+              </a:rPr>
+              <a:t>Studio code </a:t>
+            </a:r>
+            <a:r>
+              <a:rPr lang="fr-CA">
+                <a:solidFill>
+                  <a:srgbClr val="797CDE"/>
+                </a:solidFill>
+              </a:rPr>
+              <a:t>et</a:t>
+            </a:r>
+            <a:r>
+              <a:rPr lang="fr-CA" b="1">
+                <a:solidFill>
+                  <a:srgbClr val="73B3D1"/>
+                </a:solidFill>
+              </a:rPr>
+              <a:t> WebStorm</a:t>
+            </a:r>
+            <a:endParaRPr lang="fr-CA" b="1" dirty="0">
+              <a:solidFill>
+                <a:srgbClr val="73B3D1"/>
+              </a:solidFill>
+            </a:endParaRPr>
           </a:p>
           <a:p>
             <a:pPr lvl="1"/>
             <a:r>
               <a:rPr lang="fr-CA" dirty="0"/>
-              <a:t> « Éditeur de code » pour plein de langages, dont HTML / </a:t>
+              <a:t> </a:t>
+            </a:r>
+            <a:r>
+              <a:rPr lang="fr-CA"/>
+              <a:t>« Éditeurs </a:t>
+            </a:r>
+            <a:r>
+              <a:rPr lang="fr-CA" dirty="0"/>
+              <a:t>de code » pour plein de langages, dont HTML / </a:t>
             </a:r>
             <a:r>
               <a:rPr lang="fr-CA"/>
@@ -7529,8 +7567,20 @@
           <a:p>
             <a:pPr lvl="2"/>
             <a:r>
-              <a:rPr lang="fr-CA" dirty="0"/>
-              <a:t> Outil qui nous aidera à créer des projets Web avec </a:t>
+              <a:rPr lang="fr-CA"/>
+              <a:t> Outils </a:t>
+            </a:r>
+            <a:r>
+              <a:rPr lang="fr-CA" dirty="0"/>
+              <a:t>qui </a:t>
+            </a:r>
+            <a:r>
+              <a:rPr lang="fr-CA"/>
+              <a:t>nous aideront </a:t>
+            </a:r>
+            <a:r>
+              <a:rPr lang="fr-CA" dirty="0"/>
+              <a:t>à créer des projets Web avec </a:t>
             </a:r>
             <a:r>
               <a:rPr lang="fr-CA" b="1" dirty="0"/>
@@ -7544,11 +7594,23 @@
           <a:p>
             <a:pPr lvl="1"/>
             <a:r>
-              <a:rPr lang="fr-CA" dirty="0"/>
-              <a:t> C’est un logiciel gratuit </a:t>
-            </a:r>
-            <a:r>
-              <a:rPr lang="en-CA" dirty="0"/>
+              <a:rPr lang="fr-CA"/>
+              <a:t> </a:t>
+            </a:r>
+            <a:r>
+              <a:rPr lang="fr-CA">
+                <a:solidFill>
+                  <a:srgbClr val="FA4098"/>
+                </a:solidFill>
+              </a:rPr>
+              <a:t>Visual Studio Code</a:t>
+            </a:r>
+            <a:r>
+              <a:rPr lang="fr-CA"/>
+              <a:t> est gratuit </a:t>
+            </a:r>
+            <a:r>
+              <a:rPr lang="en-CA"/>
               <a:t>🤩</a:t>
             </a:r>
             <a:endParaRPr lang="fr-CA" dirty="0"/>
@@ -7581,16 +7643,27 @@
           <a:p>
             <a:pPr lvl="1"/>
             <a:r>
-              <a:rPr lang="fr-CA" dirty="0"/>
-              <a:t> Visual Studio Code nous proposera plusieurs outils pour faciliter la rédaction de code</a:t>
-            </a:r>
-            <a:r>
-              <a:rPr lang="fr-CA"/>
-              <a:t>. </a:t>
-            </a:r>
-            <a:r>
               <a:rPr lang="en-CA"/>
-              <a:t>🧰🔧</a:t>
+              <a:t> </a:t>
+            </a:r>
+            <a:r>
+              <a:rPr lang="en-CA">
+                <a:solidFill>
+                  <a:srgbClr val="FA4098"/>
+                </a:solidFill>
+              </a:rPr>
+              <a:t>WebStorm</a:t>
+            </a:r>
+            <a:r>
+              <a:rPr lang="en-CA"/>
+              <a:t> est payant 😳, mais il est disponible sur les ordinateurs du cégep</a:t>
+            </a:r>
+          </a:p>
+          <a:p>
+            <a:pPr lvl="2"/>
+            <a:r>
+              <a:rPr lang="en-CA"/>
+              <a:t> À la maison, il est préférable d’utiliser Visual Studio Code. En classe, nous utiliserons Webstorm et / ou Visual Studio Code.</a:t>
             </a:r>
             <a:endParaRPr lang="fr-CA" dirty="0"/>
           </a:p>
@@ -7618,9 +7691,10 @@
           <a:lstStyle/>
           <a:p>
             <a:r>
-              <a:rPr lang="fr-CA" dirty="0"/>
-              <a:t>Visual Studio Code</a:t>
-            </a:r>
+              <a:rPr lang="fr-CA"/>
+              <a:t>Éditeurs de code</a:t>
+            </a:r>
+            <a:endParaRPr lang="fr-CA" dirty="0"/>
           </a:p>
         </p:txBody>
       </p:sp>
@@ -7654,6 +7728,42 @@
           <a:xfrm>
             <a:off x="11283696" y="908304"/>
             <a:ext cx="795528" cy="795528"/>
+          </a:xfrm>
+          <a:prstGeom prst="rect">
+            <a:avLst/>
+          </a:prstGeom>
+        </p:spPr>
+      </p:pic>
+      <p:pic>
+        <p:nvPicPr>
+          <p:cNvPr id="6" name="Image 5">
+            <a:extLst>
+              <a:ext uri="{FF2B5EF4-FFF2-40B4-BE49-F238E27FC236}">
+                <a16:creationId xmlns:a16="http://schemas.microsoft.com/office/drawing/2014/main" id="{A085B8A0-BF25-41D2-93A8-E14FF4885E26}"/>
+              </a:ext>
+            </a:extLst>
+          </p:cNvPr>
+          <p:cNvPicPr>
+            <a:picLocks noChangeAspect="1"/>
+          </p:cNvPicPr>
+          <p:nvPr/>
+        </p:nvPicPr>
+        <p:blipFill>
+          <a:blip r:embed="rId4">
+            <a:extLst>
+              <a:ext uri="{28A0092B-C50C-407E-A947-70E740481C1C}">
+                <a14:useLocalDpi xmlns:a14="http://schemas.microsoft.com/office/drawing/2010/main" val="0"/>
+              </a:ext>
+            </a:extLst>
+          </a:blip>
+          <a:stretch>
+            <a:fillRect/>
+          </a:stretch>
+        </p:blipFill>
+        <p:spPr>
+          <a:xfrm>
+            <a:off x="10385901" y="908304"/>
+            <a:ext cx="795529" cy="795529"/>
           </a:xfrm>
           <a:prstGeom prst="rect">
             <a:avLst/>
@@ -7755,9 +7865,10 @@
           <a:lstStyle/>
           <a:p>
             <a:r>
-              <a:rPr lang="fr-CA" dirty="0"/>
-              <a:t>Visual Studio Code</a:t>
-            </a:r>
+              <a:rPr lang="fr-CA"/>
+              <a:t>Projet Web</a:t>
+            </a:r>
+            <a:endParaRPr lang="fr-CA" dirty="0"/>
           </a:p>
         </p:txBody>
       </p:sp>
@@ -7811,8 +7922,8 @@
         </p:nvSpPr>
         <p:spPr>
           <a:xfrm>
-            <a:off x="5492496" y="2126015"/>
-            <a:ext cx="1207008" cy="307777"/>
+            <a:off x="4137368" y="2068496"/>
+            <a:ext cx="4233508" cy="307777"/>
           </a:xfrm>
           <a:prstGeom prst="rect">
             <a:avLst/>
@@ -7832,8 +7943,29 @@
                   <a:srgbClr val="797CDE"/>
                 </a:solidFill>
               </a:rPr>
-              <a:t>Nom_projet</a:t>
-            </a:r>
+              <a:t>Nom</a:t>
+            </a:r>
+            <a:r>
+              <a:rPr lang="fr-CA" sz="1400" b="1">
+                <a:solidFill>
+                  <a:srgbClr val="797CDE"/>
+                </a:solidFill>
+              </a:rPr>
+              <a:t>_projet </a:t>
+            </a:r>
+            <a:r>
+              <a:rPr lang="fr-CA" sz="1400">
+                <a:solidFill>
+                  <a:srgbClr val="797CDE"/>
+                </a:solidFill>
+              </a:rPr>
+              <a:t>(Dossier principal)</a:t>
+            </a:r>
+            <a:endParaRPr lang="fr-CA" sz="1400" dirty="0">
+              <a:solidFill>
+                <a:srgbClr val="797CDE"/>
+              </a:solidFill>
+            </a:endParaRPr>
           </a:p>
         </p:txBody>
       </p:sp>
@@ -9833,8 +9965,13 @@
             </a:r>
             <a:r>
               <a:rPr lang="fr-CA" dirty="0"/>
-              <a:t> un projet</a:t>
-            </a:r>
+              <a:t> </a:t>
+            </a:r>
+            <a:r>
+              <a:rPr lang="fr-CA"/>
+              <a:t>un projet avec VS Code</a:t>
+            </a:r>
+            <a:endParaRPr lang="fr-CA" dirty="0"/>
           </a:p>
           <a:p>
             <a:pPr lvl="1"/>
@@ -10512,57 +10649,45 @@
             <p:ph idx="1"/>
           </p:nvPr>
         </p:nvSpPr>
-        <p:spPr/>
+        <p:spPr>
+          <a:xfrm>
+            <a:off x="838200" y="1144476"/>
+            <a:ext cx="10512000" cy="5026393"/>
+          </a:xfrm>
+        </p:spPr>
         <p:txBody>
           <a:bodyPr/>
           <a:lstStyle/>
           <a:p>
             <a:r>
               <a:rPr lang="fr-CA" dirty="0"/>
-              <a:t> Introduction aux </a:t>
-            </a:r>
-            <a:r>
-              <a:rPr lang="fr-CA" b="1" dirty="0">
-                <a:solidFill>
-                  <a:srgbClr val="FA4098"/>
-                </a:solidFill>
-              </a:rPr>
-              <a:t>fonctions</a:t>
+              <a:t> </a:t>
+            </a:r>
+            <a:r>
+              <a:rPr lang="fr-CA" b="1" dirty="0"/>
+              <a:t>Ouvrir</a:t>
+            </a:r>
+            <a:r>
+              <a:rPr lang="fr-CA" dirty="0"/>
+              <a:t> </a:t>
+            </a:r>
+            <a:r>
+              <a:rPr lang="fr-CA"/>
+              <a:t>un projet avec WebStorm</a:t>
             </a:r>
             <a:endParaRPr lang="fr-CA" dirty="0"/>
           </a:p>
           <a:p>
             <a:pPr lvl="1"/>
             <a:r>
-              <a:rPr lang="fr-CA" dirty="0"/>
-              <a:t> Qu’est-ce qu’une </a:t>
-            </a:r>
-            <a:r>
-              <a:rPr lang="fr-CA" b="1" dirty="0">
-                <a:solidFill>
-                  <a:srgbClr val="73B3D1"/>
-                </a:solidFill>
-              </a:rPr>
-              <a:t>fonction</a:t>
-            </a:r>
-            <a:r>
-              <a:rPr lang="fr-CA" dirty="0"/>
-              <a:t>, grossièrement ?</a:t>
-            </a:r>
-          </a:p>
-          <a:p>
-            <a:pPr lvl="1"/>
-            <a:r>
-              <a:rPr lang="fr-CA" dirty="0"/>
-              <a:t> Où déclarer une fonction ?</a:t>
-            </a:r>
-          </a:p>
-          <a:p>
-            <a:pPr lvl="1"/>
-            <a:r>
-              <a:rPr lang="fr-CA" dirty="0"/>
-              <a:t> Créer une fonction</a:t>
-            </a:r>
+              <a:rPr lang="fr-CA"/>
+              <a:t> Une fois le répertoire du projet créé, on peut ouvrir le dossier avec WebStorm.</a:t>
+            </a:r>
+            <a:endParaRPr lang="fr-CA" b="1" dirty="0">
+              <a:solidFill>
+                <a:srgbClr val="FA4098"/>
+              </a:solidFill>
+            </a:endParaRPr>
           </a:p>
         </p:txBody>
       </p:sp>
@@ -10588,16 +10713,713 @@
           <a:lstStyle/>
           <a:p>
             <a:r>
-              <a:rPr lang="fr-CA" dirty="0"/>
-              <a:t>Intro aux fonctions</a:t>
-            </a:r>
+              <a:rPr lang="fr-CA"/>
+              <a:t>Webstorm</a:t>
+            </a:r>
+            <a:endParaRPr lang="fr-CA" dirty="0"/>
           </a:p>
         </p:txBody>
       </p:sp>
+      <p:sp>
+        <p:nvSpPr>
+          <p:cNvPr id="17" name="ZoneTexte 16">
+            <a:extLst>
+              <a:ext uri="{FF2B5EF4-FFF2-40B4-BE49-F238E27FC236}">
+                <a16:creationId xmlns:a16="http://schemas.microsoft.com/office/drawing/2014/main" id="{1CAFE4AF-4183-4F9D-B63C-6AFA42AAE70D}"/>
+              </a:ext>
+            </a:extLst>
+          </p:cNvPr>
+          <p:cNvSpPr txBox="1"/>
+          <p:nvPr/>
+        </p:nvSpPr>
+        <p:spPr>
+          <a:xfrm>
+            <a:off x="1936984" y="5299842"/>
+            <a:ext cx="3675399" cy="923330"/>
+          </a:xfrm>
+          <a:prstGeom prst="rect">
+            <a:avLst/>
+          </a:prstGeom>
+          <a:noFill/>
+        </p:spPr>
+        <p:txBody>
+          <a:bodyPr wrap="square" rtlCol="0">
+            <a:spAutoFit/>
+          </a:bodyPr>
+          <a:lstStyle/>
+          <a:p>
+            <a:r>
+              <a:rPr lang="fr-CA" dirty="0">
+                <a:solidFill>
+                  <a:srgbClr val="797CDE"/>
+                </a:solidFill>
+              </a:rPr>
+              <a:t>On a facilement accès à tous les dossiers / fichiers du projet </a:t>
+            </a:r>
+            <a:r>
+              <a:rPr lang="fr-CA">
+                <a:solidFill>
+                  <a:srgbClr val="797CDE"/>
+                </a:solidFill>
+              </a:rPr>
+              <a:t>dans </a:t>
+            </a:r>
+            <a:r>
+              <a:rPr lang="fr-CA" b="1">
+                <a:solidFill>
+                  <a:srgbClr val="797CDE"/>
+                </a:solidFill>
+              </a:rPr>
+              <a:t>WebStorm </a:t>
+            </a:r>
+            <a:r>
+              <a:rPr lang="fr-CA">
+                <a:solidFill>
+                  <a:srgbClr val="797CDE"/>
+                </a:solidFill>
+              </a:rPr>
+              <a:t>et </a:t>
+            </a:r>
+            <a:r>
+              <a:rPr lang="fr-CA" dirty="0">
+                <a:solidFill>
+                  <a:srgbClr val="797CDE"/>
+                </a:solidFill>
+              </a:rPr>
+              <a:t>on peut éditer le code.</a:t>
+            </a:r>
+          </a:p>
+        </p:txBody>
+      </p:sp>
+      <p:sp>
+        <p:nvSpPr>
+          <p:cNvPr id="18" name="ZoneTexte 17">
+            <a:extLst>
+              <a:ext uri="{FF2B5EF4-FFF2-40B4-BE49-F238E27FC236}">
+                <a16:creationId xmlns:a16="http://schemas.microsoft.com/office/drawing/2014/main" id="{384F1044-1F79-4565-BAB6-FF8F55C0A4D9}"/>
+              </a:ext>
+            </a:extLst>
+          </p:cNvPr>
+          <p:cNvSpPr txBox="1"/>
+          <p:nvPr/>
+        </p:nvSpPr>
+        <p:spPr>
+          <a:xfrm>
+            <a:off x="7106673" y="2606623"/>
+            <a:ext cx="1936810" cy="1200329"/>
+          </a:xfrm>
+          <a:prstGeom prst="rect">
+            <a:avLst/>
+          </a:prstGeom>
+          <a:noFill/>
+        </p:spPr>
+        <p:txBody>
+          <a:bodyPr wrap="square" rtlCol="0">
+            <a:spAutoFit/>
+          </a:bodyPr>
+          <a:lstStyle/>
+          <a:p>
+            <a:r>
+              <a:rPr lang="fr-CA">
+                <a:solidFill>
+                  <a:srgbClr val="797CDE"/>
+                </a:solidFill>
+              </a:rPr>
+              <a:t>Trouvez le dossier de votre projet, sélectionnez-le et appuyez sur OK.</a:t>
+            </a:r>
+            <a:endParaRPr lang="fr-CA" dirty="0">
+              <a:solidFill>
+                <a:srgbClr val="797CDE"/>
+              </a:solidFill>
+            </a:endParaRPr>
+          </a:p>
+        </p:txBody>
+      </p:sp>
+      <p:sp>
+        <p:nvSpPr>
+          <p:cNvPr id="19" name="ZoneTexte 18">
+            <a:extLst>
+              <a:ext uri="{FF2B5EF4-FFF2-40B4-BE49-F238E27FC236}">
+                <a16:creationId xmlns:a16="http://schemas.microsoft.com/office/drawing/2014/main" id="{57ACEEDF-5067-4AD8-9F53-4EE55DA2A378}"/>
+              </a:ext>
+            </a:extLst>
+          </p:cNvPr>
+          <p:cNvSpPr txBox="1"/>
+          <p:nvPr/>
+        </p:nvSpPr>
+        <p:spPr>
+          <a:xfrm>
+            <a:off x="285961" y="3610234"/>
+            <a:ext cx="3715948" cy="646331"/>
+          </a:xfrm>
+          <a:prstGeom prst="rect">
+            <a:avLst/>
+          </a:prstGeom>
+          <a:noFill/>
+        </p:spPr>
+        <p:txBody>
+          <a:bodyPr wrap="square" rtlCol="0">
+            <a:spAutoFit/>
+          </a:bodyPr>
+          <a:lstStyle/>
+          <a:p>
+            <a:r>
+              <a:rPr lang="fr-CA">
+                <a:solidFill>
+                  <a:srgbClr val="797CDE"/>
+                </a:solidFill>
+              </a:rPr>
+              <a:t>Une fois WebStorm ouvert, appuyez sur Ouvrir / Open</a:t>
+            </a:r>
+            <a:endParaRPr lang="fr-CA" dirty="0">
+              <a:solidFill>
+                <a:srgbClr val="797CDE"/>
+              </a:solidFill>
+            </a:endParaRPr>
+          </a:p>
+        </p:txBody>
+      </p:sp>
+      <p:pic>
+        <p:nvPicPr>
+          <p:cNvPr id="6" name="Image 5">
+            <a:extLst>
+              <a:ext uri="{FF2B5EF4-FFF2-40B4-BE49-F238E27FC236}">
+                <a16:creationId xmlns:a16="http://schemas.microsoft.com/office/drawing/2014/main" id="{B6B80582-9D02-43D0-8F64-E33ECD6CB0F5}"/>
+              </a:ext>
+            </a:extLst>
+          </p:cNvPr>
+          <p:cNvPicPr>
+            <a:picLocks noChangeAspect="1"/>
+          </p:cNvPicPr>
+          <p:nvPr/>
+        </p:nvPicPr>
+        <p:blipFill>
+          <a:blip r:embed="rId2"/>
+          <a:stretch>
+            <a:fillRect/>
+          </a:stretch>
+        </p:blipFill>
+        <p:spPr>
+          <a:xfrm>
+            <a:off x="381327" y="2641430"/>
+            <a:ext cx="5712873" cy="690886"/>
+          </a:xfrm>
+          <a:prstGeom prst="rect">
+            <a:avLst/>
+          </a:prstGeom>
+          <a:ln w="28575">
+            <a:solidFill>
+              <a:srgbClr val="797CDE"/>
+            </a:solidFill>
+          </a:ln>
+        </p:spPr>
+      </p:pic>
+      <p:pic>
+        <p:nvPicPr>
+          <p:cNvPr id="9" name="Image 8">
+            <a:extLst>
+              <a:ext uri="{FF2B5EF4-FFF2-40B4-BE49-F238E27FC236}">
+                <a16:creationId xmlns:a16="http://schemas.microsoft.com/office/drawing/2014/main" id="{6D6D2B05-C7AC-494F-9D28-9F578872C5D0}"/>
+              </a:ext>
+            </a:extLst>
+          </p:cNvPr>
+          <p:cNvPicPr>
+            <a:picLocks noChangeAspect="1"/>
+          </p:cNvPicPr>
+          <p:nvPr/>
+        </p:nvPicPr>
+        <p:blipFill>
+          <a:blip r:embed="rId3"/>
+          <a:stretch>
+            <a:fillRect/>
+          </a:stretch>
+        </p:blipFill>
+        <p:spPr>
+          <a:xfrm>
+            <a:off x="9044653" y="2195571"/>
+            <a:ext cx="3017070" cy="3439807"/>
+          </a:xfrm>
+          <a:prstGeom prst="rect">
+            <a:avLst/>
+          </a:prstGeom>
+          <a:ln w="28575">
+            <a:solidFill>
+              <a:srgbClr val="797CDE"/>
+            </a:solidFill>
+          </a:ln>
+        </p:spPr>
+      </p:pic>
+      <p:pic>
+        <p:nvPicPr>
+          <p:cNvPr id="11" name="Image 10">
+            <a:extLst>
+              <a:ext uri="{FF2B5EF4-FFF2-40B4-BE49-F238E27FC236}">
+                <a16:creationId xmlns:a16="http://schemas.microsoft.com/office/drawing/2014/main" id="{9D422732-9F7C-4159-B261-ABF7C3B40FC7}"/>
+              </a:ext>
+            </a:extLst>
+          </p:cNvPr>
+          <p:cNvPicPr>
+            <a:picLocks noChangeAspect="1"/>
+          </p:cNvPicPr>
+          <p:nvPr/>
+        </p:nvPicPr>
+        <p:blipFill>
+          <a:blip r:embed="rId4"/>
+          <a:stretch>
+            <a:fillRect/>
+          </a:stretch>
+        </p:blipFill>
+        <p:spPr>
+          <a:xfrm>
+            <a:off x="5701037" y="4534485"/>
+            <a:ext cx="2414625" cy="2201786"/>
+          </a:xfrm>
+          <a:prstGeom prst="rect">
+            <a:avLst/>
+          </a:prstGeom>
+          <a:ln w="28575">
+            <a:solidFill>
+              <a:srgbClr val="797CDE"/>
+            </a:solidFill>
+          </a:ln>
+        </p:spPr>
+      </p:pic>
+      <p:cxnSp>
+        <p:nvCxnSpPr>
+          <p:cNvPr id="21" name="Connecteur droit avec flèche 20">
+            <a:extLst>
+              <a:ext uri="{FF2B5EF4-FFF2-40B4-BE49-F238E27FC236}">
+                <a16:creationId xmlns:a16="http://schemas.microsoft.com/office/drawing/2014/main" id="{22F17A5B-55DB-419E-B70B-5FDA0925E2AF}"/>
+              </a:ext>
+            </a:extLst>
+          </p:cNvPr>
+          <p:cNvCxnSpPr>
+            <a:cxnSpLocks/>
+          </p:cNvCxnSpPr>
+          <p:nvPr/>
+        </p:nvCxnSpPr>
+        <p:spPr>
+          <a:xfrm>
+            <a:off x="4282083" y="2720697"/>
+            <a:ext cx="525132" cy="292321"/>
+          </a:xfrm>
+          <a:prstGeom prst="straightConnector1">
+            <a:avLst/>
+          </a:prstGeom>
+          <a:ln w="57150">
+            <a:solidFill>
+              <a:srgbClr val="797CDE"/>
+            </a:solidFill>
+            <a:tailEnd type="triangle"/>
+          </a:ln>
+        </p:spPr>
+        <p:style>
+          <a:lnRef idx="1">
+            <a:schemeClr val="accent1"/>
+          </a:lnRef>
+          <a:fillRef idx="0">
+            <a:schemeClr val="accent1"/>
+          </a:fillRef>
+          <a:effectRef idx="0">
+            <a:schemeClr val="accent1"/>
+          </a:effectRef>
+          <a:fontRef idx="minor">
+            <a:schemeClr val="tx1"/>
+          </a:fontRef>
+        </p:style>
+      </p:cxnSp>
+      <p:cxnSp>
+        <p:nvCxnSpPr>
+          <p:cNvPr id="25" name="Connecteur droit avec flèche 24">
+            <a:extLst>
+              <a:ext uri="{FF2B5EF4-FFF2-40B4-BE49-F238E27FC236}">
+                <a16:creationId xmlns:a16="http://schemas.microsoft.com/office/drawing/2014/main" id="{06C9B86B-866C-4225-B7EC-27C8564D11BD}"/>
+              </a:ext>
+            </a:extLst>
+          </p:cNvPr>
+          <p:cNvCxnSpPr>
+            <a:cxnSpLocks/>
+          </p:cNvCxnSpPr>
+          <p:nvPr/>
+        </p:nvCxnSpPr>
+        <p:spPr>
+          <a:xfrm>
+            <a:off x="10264400" y="5306796"/>
+            <a:ext cx="577576" cy="183211"/>
+          </a:xfrm>
+          <a:prstGeom prst="straightConnector1">
+            <a:avLst/>
+          </a:prstGeom>
+          <a:ln w="57150">
+            <a:solidFill>
+              <a:srgbClr val="797CDE"/>
+            </a:solidFill>
+            <a:tailEnd type="triangle"/>
+          </a:ln>
+        </p:spPr>
+        <p:style>
+          <a:lnRef idx="1">
+            <a:schemeClr val="accent1"/>
+          </a:lnRef>
+          <a:fillRef idx="0">
+            <a:schemeClr val="accent1"/>
+          </a:fillRef>
+          <a:effectRef idx="0">
+            <a:schemeClr val="accent1"/>
+          </a:effectRef>
+          <a:fontRef idx="minor">
+            <a:schemeClr val="tx1"/>
+          </a:fontRef>
+        </p:style>
+      </p:cxnSp>
+      <p:cxnSp>
+        <p:nvCxnSpPr>
+          <p:cNvPr id="31" name="Connecteur droit avec flèche 30">
+            <a:extLst>
+              <a:ext uri="{FF2B5EF4-FFF2-40B4-BE49-F238E27FC236}">
+                <a16:creationId xmlns:a16="http://schemas.microsoft.com/office/drawing/2014/main" id="{D18B8B3E-0313-4E56-BC6E-2683A8BA6463}"/>
+              </a:ext>
+            </a:extLst>
+          </p:cNvPr>
+          <p:cNvCxnSpPr>
+            <a:cxnSpLocks/>
+          </p:cNvCxnSpPr>
+          <p:nvPr/>
+        </p:nvCxnSpPr>
+        <p:spPr>
+          <a:xfrm flipH="1">
+            <a:off x="7106673" y="5588104"/>
+            <a:ext cx="553183" cy="346806"/>
+          </a:xfrm>
+          <a:prstGeom prst="straightConnector1">
+            <a:avLst/>
+          </a:prstGeom>
+          <a:ln w="57150">
+            <a:solidFill>
+              <a:srgbClr val="797CDE"/>
+            </a:solidFill>
+            <a:tailEnd type="triangle"/>
+          </a:ln>
+        </p:spPr>
+        <p:style>
+          <a:lnRef idx="1">
+            <a:schemeClr val="accent1"/>
+          </a:lnRef>
+          <a:fillRef idx="0">
+            <a:schemeClr val="accent1"/>
+          </a:fillRef>
+          <a:effectRef idx="0">
+            <a:schemeClr val="accent1"/>
+          </a:effectRef>
+          <a:fontRef idx="minor">
+            <a:schemeClr val="tx1"/>
+          </a:fontRef>
+        </p:style>
+      </p:cxnSp>
+      <p:cxnSp>
+        <p:nvCxnSpPr>
+          <p:cNvPr id="34" name="Connecteur droit avec flèche 33">
+            <a:extLst>
+              <a:ext uri="{FF2B5EF4-FFF2-40B4-BE49-F238E27FC236}">
+                <a16:creationId xmlns:a16="http://schemas.microsoft.com/office/drawing/2014/main" id="{50F010F8-6589-4946-A0B9-1C2E30294977}"/>
+              </a:ext>
+            </a:extLst>
+          </p:cNvPr>
+          <p:cNvCxnSpPr>
+            <a:cxnSpLocks/>
+          </p:cNvCxnSpPr>
+          <p:nvPr/>
+        </p:nvCxnSpPr>
+        <p:spPr>
+          <a:xfrm flipH="1">
+            <a:off x="10411464" y="4028951"/>
+            <a:ext cx="329688" cy="422748"/>
+          </a:xfrm>
+          <a:prstGeom prst="straightConnector1">
+            <a:avLst/>
+          </a:prstGeom>
+          <a:ln w="57150">
+            <a:solidFill>
+              <a:srgbClr val="797CDE"/>
+            </a:solidFill>
+            <a:tailEnd type="triangle"/>
+          </a:ln>
+        </p:spPr>
+        <p:style>
+          <a:lnRef idx="1">
+            <a:schemeClr val="accent1"/>
+          </a:lnRef>
+          <a:fillRef idx="0">
+            <a:schemeClr val="accent1"/>
+          </a:fillRef>
+          <a:effectRef idx="0">
+            <a:schemeClr val="accent1"/>
+          </a:effectRef>
+          <a:fontRef idx="minor">
+            <a:schemeClr val="tx1"/>
+          </a:fontRef>
+        </p:style>
+      </p:cxnSp>
+      <p:sp>
+        <p:nvSpPr>
+          <p:cNvPr id="14" name="Ellipse 13">
+            <a:extLst>
+              <a:ext uri="{FF2B5EF4-FFF2-40B4-BE49-F238E27FC236}">
+                <a16:creationId xmlns:a16="http://schemas.microsoft.com/office/drawing/2014/main" id="{DD23A62A-A4CC-40A6-805E-2683E53BD33E}"/>
+              </a:ext>
+            </a:extLst>
+          </p:cNvPr>
+          <p:cNvSpPr/>
+          <p:nvPr/>
+        </p:nvSpPr>
+        <p:spPr>
+          <a:xfrm>
+            <a:off x="169994" y="3175311"/>
+            <a:ext cx="377952" cy="377952"/>
+          </a:xfrm>
+          <a:prstGeom prst="ellipse">
+            <a:avLst/>
+          </a:prstGeom>
+          <a:solidFill>
+            <a:srgbClr val="797CDE"/>
+          </a:solidFill>
+          <a:ln>
+            <a:noFill/>
+          </a:ln>
+        </p:spPr>
+        <p:style>
+          <a:lnRef idx="2">
+            <a:schemeClr val="accent1">
+              <a:shade val="50000"/>
+            </a:schemeClr>
+          </a:lnRef>
+          <a:fillRef idx="1">
+            <a:schemeClr val="accent1"/>
+          </a:fillRef>
+          <a:effectRef idx="0">
+            <a:schemeClr val="accent1"/>
+          </a:effectRef>
+          <a:fontRef idx="minor">
+            <a:schemeClr val="lt1"/>
+          </a:fontRef>
+        </p:style>
+        <p:txBody>
+          <a:bodyPr rtlCol="0" anchor="ctr"/>
+          <a:lstStyle/>
+          <a:p>
+            <a:pPr algn="ctr"/>
+            <a:r>
+              <a:rPr lang="fr-CA" sz="2400" b="1" dirty="0">
+                <a:solidFill>
+                  <a:schemeClr val="bg1"/>
+                </a:solidFill>
+              </a:rPr>
+              <a:t>1</a:t>
+            </a:r>
+          </a:p>
+        </p:txBody>
+      </p:sp>
+      <p:sp>
+        <p:nvSpPr>
+          <p:cNvPr id="16" name="Ellipse 15">
+            <a:extLst>
+              <a:ext uri="{FF2B5EF4-FFF2-40B4-BE49-F238E27FC236}">
+                <a16:creationId xmlns:a16="http://schemas.microsoft.com/office/drawing/2014/main" id="{F2279049-97CA-4C93-94EC-F38689801346}"/>
+              </a:ext>
+            </a:extLst>
+          </p:cNvPr>
+          <p:cNvSpPr/>
+          <p:nvPr/>
+        </p:nvSpPr>
+        <p:spPr>
+          <a:xfrm>
+            <a:off x="8855092" y="2006595"/>
+            <a:ext cx="377952" cy="377952"/>
+          </a:xfrm>
+          <a:prstGeom prst="ellipse">
+            <a:avLst/>
+          </a:prstGeom>
+          <a:solidFill>
+            <a:srgbClr val="797CDE"/>
+          </a:solidFill>
+          <a:ln>
+            <a:noFill/>
+          </a:ln>
+        </p:spPr>
+        <p:style>
+          <a:lnRef idx="2">
+            <a:schemeClr val="accent1">
+              <a:shade val="50000"/>
+            </a:schemeClr>
+          </a:lnRef>
+          <a:fillRef idx="1">
+            <a:schemeClr val="accent1"/>
+          </a:fillRef>
+          <a:effectRef idx="0">
+            <a:schemeClr val="accent1"/>
+          </a:effectRef>
+          <a:fontRef idx="minor">
+            <a:schemeClr val="lt1"/>
+          </a:fontRef>
+        </p:style>
+        <p:txBody>
+          <a:bodyPr rtlCol="0" anchor="ctr"/>
+          <a:lstStyle/>
+          <a:p>
+            <a:pPr algn="ctr"/>
+            <a:r>
+              <a:rPr lang="fr-CA" sz="2400" b="1" dirty="0">
+                <a:solidFill>
+                  <a:schemeClr val="bg1"/>
+                </a:solidFill>
+              </a:rPr>
+              <a:t>2</a:t>
+            </a:r>
+          </a:p>
+        </p:txBody>
+      </p:sp>
+      <p:sp>
+        <p:nvSpPr>
+          <p:cNvPr id="15" name="Ellipse 14">
+            <a:extLst>
+              <a:ext uri="{FF2B5EF4-FFF2-40B4-BE49-F238E27FC236}">
+                <a16:creationId xmlns:a16="http://schemas.microsoft.com/office/drawing/2014/main" id="{F781439F-F284-451D-9038-7FBB64163CDD}"/>
+              </a:ext>
+            </a:extLst>
+          </p:cNvPr>
+          <p:cNvSpPr/>
+          <p:nvPr/>
+        </p:nvSpPr>
+        <p:spPr>
+          <a:xfrm>
+            <a:off x="5471797" y="4320806"/>
+            <a:ext cx="377952" cy="377952"/>
+          </a:xfrm>
+          <a:prstGeom prst="ellipse">
+            <a:avLst/>
+          </a:prstGeom>
+          <a:solidFill>
+            <a:srgbClr val="797CDE"/>
+          </a:solidFill>
+          <a:ln>
+            <a:noFill/>
+          </a:ln>
+        </p:spPr>
+        <p:style>
+          <a:lnRef idx="2">
+            <a:schemeClr val="accent1">
+              <a:shade val="50000"/>
+            </a:schemeClr>
+          </a:lnRef>
+          <a:fillRef idx="1">
+            <a:schemeClr val="accent1"/>
+          </a:fillRef>
+          <a:effectRef idx="0">
+            <a:schemeClr val="accent1"/>
+          </a:effectRef>
+          <a:fontRef idx="minor">
+            <a:schemeClr val="lt1"/>
+          </a:fontRef>
+        </p:style>
+        <p:txBody>
+          <a:bodyPr rtlCol="0" anchor="ctr"/>
+          <a:lstStyle/>
+          <a:p>
+            <a:pPr algn="ctr"/>
+            <a:r>
+              <a:rPr lang="fr-CA" sz="2400" b="1" dirty="0">
+                <a:solidFill>
+                  <a:schemeClr val="bg1"/>
+                </a:solidFill>
+              </a:rPr>
+              <a:t>3</a:t>
+            </a:r>
+          </a:p>
+        </p:txBody>
+      </p:sp>
+      <p:pic>
+        <p:nvPicPr>
+          <p:cNvPr id="49" name="Image 48">
+            <a:extLst>
+              <a:ext uri="{FF2B5EF4-FFF2-40B4-BE49-F238E27FC236}">
+                <a16:creationId xmlns:a16="http://schemas.microsoft.com/office/drawing/2014/main" id="{2BD846D8-37A0-415D-AF88-2BBC8DCE2866}"/>
+              </a:ext>
+            </a:extLst>
+          </p:cNvPr>
+          <p:cNvPicPr>
+            <a:picLocks noChangeAspect="1"/>
+          </p:cNvPicPr>
+          <p:nvPr/>
+        </p:nvPicPr>
+        <p:blipFill>
+          <a:blip r:embed="rId5"/>
+          <a:stretch>
+            <a:fillRect/>
+          </a:stretch>
+        </p:blipFill>
+        <p:spPr>
+          <a:xfrm>
+            <a:off x="4158272" y="3366793"/>
+            <a:ext cx="2392801" cy="646331"/>
+          </a:xfrm>
+          <a:prstGeom prst="rect">
+            <a:avLst/>
+          </a:prstGeom>
+          <a:ln w="28575">
+            <a:solidFill>
+              <a:srgbClr val="797CDE"/>
+            </a:solidFill>
+          </a:ln>
+        </p:spPr>
+      </p:pic>
+      <p:cxnSp>
+        <p:nvCxnSpPr>
+          <p:cNvPr id="46" name="Connecteur droit avec flèche 45">
+            <a:extLst>
+              <a:ext uri="{FF2B5EF4-FFF2-40B4-BE49-F238E27FC236}">
+                <a16:creationId xmlns:a16="http://schemas.microsoft.com/office/drawing/2014/main" id="{E14A567A-34DD-497D-8F66-45579751E223}"/>
+              </a:ext>
+            </a:extLst>
+          </p:cNvPr>
+          <p:cNvCxnSpPr>
+            <a:cxnSpLocks/>
+          </p:cNvCxnSpPr>
+          <p:nvPr/>
+        </p:nvCxnSpPr>
+        <p:spPr>
+          <a:xfrm flipH="1">
+            <a:off x="4956585" y="3689958"/>
+            <a:ext cx="448824" cy="203810"/>
+          </a:xfrm>
+          <a:prstGeom prst="straightConnector1">
+            <a:avLst/>
+          </a:prstGeom>
+          <a:ln w="57150">
+            <a:solidFill>
+              <a:srgbClr val="797CDE"/>
+            </a:solidFill>
+            <a:tailEnd type="triangle"/>
+          </a:ln>
+        </p:spPr>
+        <p:style>
+          <a:lnRef idx="1">
+            <a:schemeClr val="accent1"/>
+          </a:lnRef>
+          <a:fillRef idx="0">
+            <a:schemeClr val="accent1"/>
+          </a:fillRef>
+          <a:effectRef idx="0">
+            <a:schemeClr val="accent1"/>
+          </a:effectRef>
+          <a:fontRef idx="minor">
+            <a:schemeClr val="tx1"/>
+          </a:fontRef>
+        </p:style>
+      </p:cxnSp>
     </p:spTree>
     <p:extLst>
       <p:ext uri="{BB962C8B-B14F-4D97-AF65-F5344CB8AC3E}">
-        <p14:creationId xmlns:p14="http://schemas.microsoft.com/office/powerpoint/2010/main" val="4107956988"/>
+        <p14:creationId xmlns:p14="http://schemas.microsoft.com/office/powerpoint/2010/main" val="3513953322"/>
       </p:ext>
     </p:extLst>
   </p:cSld>
@@ -10640,18 +11462,29 @@
             <p:ph idx="1"/>
           </p:nvPr>
         </p:nvSpPr>
-        <p:spPr>
-          <a:xfrm>
-            <a:off x="838200" y="1150572"/>
-            <a:ext cx="10671048" cy="5427012"/>
-          </a:xfrm>
-        </p:spPr>
+        <p:spPr/>
         <p:txBody>
           <a:bodyPr/>
           <a:lstStyle/>
           <a:p>
             <a:r>
               <a:rPr lang="fr-CA" dirty="0"/>
+              <a:t> Introduction aux </a:t>
+            </a:r>
+            <a:r>
+              <a:rPr lang="fr-CA" b="1" dirty="0">
+                <a:solidFill>
+                  <a:srgbClr val="FA4098"/>
+                </a:solidFill>
+              </a:rPr>
+              <a:t>fonctions</a:t>
+            </a:r>
+            <a:endParaRPr lang="fr-CA" dirty="0"/>
+          </a:p>
+          <a:p>
+            <a:pPr lvl="1"/>
+            <a:r>
+              <a:rPr lang="fr-CA" dirty="0"/>
               <a:t> Qu’est-ce qu’une </a:t>
             </a:r>
             <a:r>
@@ -10664,112 +11497,21 @@
             </a:r>
             <a:r>
               <a:rPr lang="fr-CA" dirty="0"/>
-              <a:t>, grossièrement ? 🤔</a:t>
+              <a:t>, grossièrement ?</a:t>
             </a:r>
           </a:p>
           <a:p>
             <a:pPr lvl="1"/>
             <a:r>
               <a:rPr lang="fr-CA" dirty="0"/>
-              <a:t> Exemple</a:t>
-            </a:r>
-          </a:p>
-          <a:p>
-            <a:pPr lvl="2"/>
-            <a:r>
-              <a:rPr lang="fr-CA" dirty="0"/>
-              <a:t>Lorsqu’on écrit « </a:t>
-            </a:r>
-            <a:r>
-              <a:rPr lang="fr-CA" dirty="0">
-                <a:solidFill>
-                  <a:srgbClr val="FA4098"/>
-                </a:solidFill>
-              </a:rPr>
-              <a:t>changerTexte() </a:t>
-            </a:r>
-            <a:r>
-              <a:rPr lang="fr-CA" dirty="0"/>
-              <a:t>» dans la console, le texte du titre change ! </a:t>
-            </a:r>
-            <a:r>
-              <a:rPr lang="en-CA" dirty="0"/>
-              <a:t>😱</a:t>
-            </a:r>
-          </a:p>
-          <a:p>
-            <a:pPr lvl="2"/>
-            <a:endParaRPr lang="en-CA" dirty="0"/>
-          </a:p>
-          <a:p>
-            <a:pPr lvl="2"/>
-            <a:endParaRPr lang="en-CA" dirty="0"/>
-          </a:p>
-          <a:p>
-            <a:pPr lvl="2"/>
-            <a:endParaRPr lang="en-CA" dirty="0"/>
-          </a:p>
-          <a:p>
-            <a:pPr lvl="2"/>
-            <a:endParaRPr lang="en-CA" dirty="0"/>
-          </a:p>
-          <a:p>
-            <a:pPr lvl="2"/>
-            <a:endParaRPr lang="en-CA" dirty="0"/>
-          </a:p>
-          <a:p>
-            <a:pPr lvl="2"/>
-            <a:endParaRPr lang="en-CA" dirty="0"/>
-          </a:p>
-          <a:p>
-            <a:pPr lvl="2"/>
-            <a:endParaRPr lang="en-CA" dirty="0"/>
-          </a:p>
-          <a:p>
-            <a:pPr lvl="2"/>
-            <a:endParaRPr lang="en-CA" dirty="0"/>
-          </a:p>
-          <a:p>
-            <a:pPr lvl="2"/>
-            <a:endParaRPr lang="en-CA" dirty="0"/>
-          </a:p>
-          <a:p>
-            <a:pPr lvl="2"/>
-            <a:endParaRPr lang="en-CA" dirty="0"/>
-          </a:p>
-          <a:p>
-            <a:pPr lvl="2"/>
-            <a:endParaRPr lang="fr-CA" dirty="0"/>
-          </a:p>
-          <a:p>
-            <a:pPr lvl="2"/>
-            <a:r>
-              <a:rPr lang="fr-CA" dirty="0"/>
-              <a:t> Comment c’est possible ? Nous n’avons même pas utilisé </a:t>
-            </a:r>
-            <a:r>
-              <a:rPr lang="fr-CA" dirty="0">
-                <a:solidFill>
-                  <a:srgbClr val="FA4098"/>
-                </a:solidFill>
-              </a:rPr>
-              <a:t>.querySelector</a:t>
-            </a:r>
-            <a:r>
-              <a:rPr lang="fr-CA" dirty="0"/>
-              <a:t> ou </a:t>
-            </a:r>
-            <a:r>
-              <a:rPr lang="fr-CA" dirty="0">
-                <a:solidFill>
-                  <a:srgbClr val="FA4098"/>
-                </a:solidFill>
-              </a:rPr>
-              <a:t>.textContent</a:t>
-            </a:r>
-            <a:r>
-              <a:rPr lang="fr-CA" dirty="0"/>
-              <a:t> !</a:t>
+              <a:t> Où déclarer une fonction ?</a:t>
+            </a:r>
+          </a:p>
+          <a:p>
+            <a:pPr lvl="1"/>
+            <a:r>
+              <a:rPr lang="fr-CA" dirty="0"/>
+              <a:t> Créer une fonction</a:t>
             </a:r>
           </a:p>
         </p:txBody>
@@ -10802,251 +11544,10 @@
           </a:p>
         </p:txBody>
       </p:sp>
-      <p:pic>
-        <p:nvPicPr>
-          <p:cNvPr id="15" name="Image 14">
-            <a:extLst>
-              <a:ext uri="{FF2B5EF4-FFF2-40B4-BE49-F238E27FC236}">
-                <a16:creationId xmlns:a16="http://schemas.microsoft.com/office/drawing/2014/main" id="{B74E3008-FF9F-4A08-9186-CCD41FEAB4EB}"/>
-              </a:ext>
-            </a:extLst>
-          </p:cNvPr>
-          <p:cNvPicPr>
-            <a:picLocks noChangeAspect="1"/>
-          </p:cNvPicPr>
-          <p:nvPr/>
-        </p:nvPicPr>
-        <p:blipFill>
-          <a:blip r:embed="rId2"/>
-          <a:stretch>
-            <a:fillRect/>
-          </a:stretch>
-        </p:blipFill>
-        <p:spPr>
-          <a:xfrm>
-            <a:off x="2536473" y="3932715"/>
-            <a:ext cx="3024068" cy="1646694"/>
-          </a:xfrm>
-          <a:prstGeom prst="rect">
-            <a:avLst/>
-          </a:prstGeom>
-          <a:ln w="28575">
-            <a:solidFill>
-              <a:srgbClr val="797CDE"/>
-            </a:solidFill>
-          </a:ln>
-        </p:spPr>
-      </p:pic>
-      <p:pic>
-        <p:nvPicPr>
-          <p:cNvPr id="17" name="Image 16">
-            <a:extLst>
-              <a:ext uri="{FF2B5EF4-FFF2-40B4-BE49-F238E27FC236}">
-                <a16:creationId xmlns:a16="http://schemas.microsoft.com/office/drawing/2014/main" id="{1954C3DF-54B2-4241-A8D8-7AF8E85264F7}"/>
-              </a:ext>
-            </a:extLst>
-          </p:cNvPr>
-          <p:cNvPicPr>
-            <a:picLocks noChangeAspect="1"/>
-          </p:cNvPicPr>
-          <p:nvPr/>
-        </p:nvPicPr>
-        <p:blipFill>
-          <a:blip r:embed="rId3"/>
-          <a:stretch>
-            <a:fillRect/>
-          </a:stretch>
-        </p:blipFill>
-        <p:spPr>
-          <a:xfrm>
-            <a:off x="5006463" y="2440821"/>
-            <a:ext cx="2503809" cy="1213384"/>
-          </a:xfrm>
-          <a:prstGeom prst="rect">
-            <a:avLst/>
-          </a:prstGeom>
-          <a:ln w="28575">
-            <a:solidFill>
-              <a:srgbClr val="797CDE"/>
-            </a:solidFill>
-          </a:ln>
-        </p:spPr>
-      </p:pic>
-      <p:pic>
-        <p:nvPicPr>
-          <p:cNvPr id="19" name="Image 18">
-            <a:extLst>
-              <a:ext uri="{FF2B5EF4-FFF2-40B4-BE49-F238E27FC236}">
-                <a16:creationId xmlns:a16="http://schemas.microsoft.com/office/drawing/2014/main" id="{9291056B-C38F-4292-9F18-2AE9EB957655}"/>
-              </a:ext>
-            </a:extLst>
-          </p:cNvPr>
-          <p:cNvPicPr>
-            <a:picLocks noChangeAspect="1"/>
-          </p:cNvPicPr>
-          <p:nvPr/>
-        </p:nvPicPr>
-        <p:blipFill>
-          <a:blip r:embed="rId4"/>
-          <a:stretch>
-            <a:fillRect/>
-          </a:stretch>
-        </p:blipFill>
-        <p:spPr>
-          <a:xfrm>
-            <a:off x="6879835" y="3927498"/>
-            <a:ext cx="3024068" cy="1657128"/>
-          </a:xfrm>
-          <a:prstGeom prst="rect">
-            <a:avLst/>
-          </a:prstGeom>
-          <a:ln w="28575">
-            <a:solidFill>
-              <a:srgbClr val="797CDE"/>
-            </a:solidFill>
-          </a:ln>
-        </p:spPr>
-      </p:pic>
-      <p:sp>
-        <p:nvSpPr>
-          <p:cNvPr id="20" name="Flèche : droite 19">
-            <a:extLst>
-              <a:ext uri="{FF2B5EF4-FFF2-40B4-BE49-F238E27FC236}">
-                <a16:creationId xmlns:a16="http://schemas.microsoft.com/office/drawing/2014/main" id="{E46382E4-57D9-4962-B0C9-65D9EC3A48F3}"/>
-              </a:ext>
-            </a:extLst>
-          </p:cNvPr>
-          <p:cNvSpPr/>
-          <p:nvPr/>
-        </p:nvSpPr>
-        <p:spPr>
-          <a:xfrm>
-            <a:off x="5748528" y="4425696"/>
-            <a:ext cx="993648" cy="755904"/>
-          </a:xfrm>
-          <a:prstGeom prst="rightArrow">
-            <a:avLst/>
-          </a:prstGeom>
-          <a:solidFill>
-            <a:srgbClr val="797CDE"/>
-          </a:solidFill>
-          <a:ln>
-            <a:noFill/>
-          </a:ln>
-        </p:spPr>
-        <p:style>
-          <a:lnRef idx="2">
-            <a:schemeClr val="accent1">
-              <a:shade val="50000"/>
-            </a:schemeClr>
-          </a:lnRef>
-          <a:fillRef idx="1">
-            <a:schemeClr val="accent1"/>
-          </a:fillRef>
-          <a:effectRef idx="0">
-            <a:schemeClr val="accent1"/>
-          </a:effectRef>
-          <a:fontRef idx="minor">
-            <a:schemeClr val="lt1"/>
-          </a:fontRef>
-        </p:style>
-        <p:txBody>
-          <a:bodyPr rtlCol="0" anchor="ctr"/>
-          <a:lstStyle/>
-          <a:p>
-            <a:pPr algn="ctr"/>
-            <a:endParaRPr lang="fr-CA" dirty="0"/>
-          </a:p>
-        </p:txBody>
-      </p:sp>
-      <p:cxnSp>
-        <p:nvCxnSpPr>
-          <p:cNvPr id="22" name="Connecteur droit avec flèche 21">
-            <a:extLst>
-              <a:ext uri="{FF2B5EF4-FFF2-40B4-BE49-F238E27FC236}">
-                <a16:creationId xmlns:a16="http://schemas.microsoft.com/office/drawing/2014/main" id="{320BB0BA-B546-426F-BD5F-794E9947D122}"/>
-              </a:ext>
-            </a:extLst>
-          </p:cNvPr>
-          <p:cNvCxnSpPr/>
-          <p:nvPr/>
-        </p:nvCxnSpPr>
-        <p:spPr>
-          <a:xfrm flipH="1">
-            <a:off x="6455664" y="3060192"/>
-            <a:ext cx="424171" cy="225552"/>
-          </a:xfrm>
-          <a:prstGeom prst="straightConnector1">
-            <a:avLst/>
-          </a:prstGeom>
-          <a:ln w="38100">
-            <a:solidFill>
-              <a:srgbClr val="FA4098"/>
-            </a:solidFill>
-            <a:tailEnd type="triangle"/>
-          </a:ln>
-        </p:spPr>
-        <p:style>
-          <a:lnRef idx="1">
-            <a:schemeClr val="accent1"/>
-          </a:lnRef>
-          <a:fillRef idx="0">
-            <a:schemeClr val="accent1"/>
-          </a:fillRef>
-          <a:effectRef idx="0">
-            <a:schemeClr val="accent1"/>
-          </a:effectRef>
-          <a:fontRef idx="minor">
-            <a:schemeClr val="tx1"/>
-          </a:fontRef>
-        </p:style>
-      </p:cxnSp>
-      <p:cxnSp>
-        <p:nvCxnSpPr>
-          <p:cNvPr id="31" name="Connecteur droit avec flèche 30">
-            <a:extLst>
-              <a:ext uri="{FF2B5EF4-FFF2-40B4-BE49-F238E27FC236}">
-                <a16:creationId xmlns:a16="http://schemas.microsoft.com/office/drawing/2014/main" id="{2165BF1A-A336-4DA3-A577-30AEAB41BE76}"/>
-              </a:ext>
-            </a:extLst>
-          </p:cNvPr>
-          <p:cNvCxnSpPr/>
-          <p:nvPr/>
-        </p:nvCxnSpPr>
-        <p:spPr>
-          <a:xfrm flipH="1">
-            <a:off x="7778496" y="3870960"/>
-            <a:ext cx="424171" cy="225552"/>
-          </a:xfrm>
-          <a:prstGeom prst="straightConnector1">
-            <a:avLst/>
-          </a:prstGeom>
-          <a:ln w="38100">
-            <a:solidFill>
-              <a:srgbClr val="FA4098"/>
-            </a:solidFill>
-            <a:tailEnd type="triangle"/>
-          </a:ln>
-        </p:spPr>
-        <p:style>
-          <a:lnRef idx="1">
-            <a:schemeClr val="accent1"/>
-          </a:lnRef>
-          <a:fillRef idx="0">
-            <a:schemeClr val="accent1"/>
-          </a:fillRef>
-          <a:effectRef idx="0">
-            <a:schemeClr val="accent1"/>
-          </a:effectRef>
-          <a:fontRef idx="minor">
-            <a:schemeClr val="tx1"/>
-          </a:fontRef>
-        </p:style>
-      </p:cxnSp>
     </p:spTree>
     <p:extLst>
       <p:ext uri="{BB962C8B-B14F-4D97-AF65-F5344CB8AC3E}">
-        <p14:creationId xmlns:p14="http://schemas.microsoft.com/office/powerpoint/2010/main" val="3821458347"/>
+        <p14:creationId xmlns:p14="http://schemas.microsoft.com/office/powerpoint/2010/main" val="4107956988"/>
       </p:ext>
     </p:extLst>
   </p:cSld>
@@ -11595,7 +12096,12 @@
             <p:ph idx="1"/>
           </p:nvPr>
         </p:nvSpPr>
-        <p:spPr/>
+        <p:spPr>
+          <a:xfrm>
+            <a:off x="838200" y="1150572"/>
+            <a:ext cx="10671048" cy="5427012"/>
+          </a:xfrm>
+        </p:spPr>
         <p:txBody>
           <a:bodyPr/>
           <a:lstStyle/>
@@ -11621,7 +12127,14 @@
             <a:pPr lvl="1"/>
             <a:r>
               <a:rPr lang="fr-CA" dirty="0"/>
-              <a:t> </a:t>
+              <a:t> Exemple</a:t>
+            </a:r>
+          </a:p>
+          <a:p>
+            <a:pPr lvl="2"/>
+            <a:r>
+              <a:rPr lang="fr-CA" dirty="0"/>
+              <a:t>Lorsqu’on écrit « </a:t>
             </a:r>
             <a:r>
               <a:rPr lang="fr-CA" dirty="0">
@@ -11629,59 +12142,56 @@
                   <a:srgbClr val="FA4098"/>
                 </a:solidFill>
               </a:rPr>
-              <a:t>Déclarer</a:t>
-            </a:r>
-            <a:r>
-              <a:rPr lang="fr-CA" dirty="0"/>
-              <a:t> une fonction</a:t>
+              <a:t>changerTexte() </a:t>
+            </a:r>
+            <a:r>
+              <a:rPr lang="fr-CA" dirty="0"/>
+              <a:t>» dans la console, le texte du titre change ! </a:t>
+            </a:r>
+            <a:r>
+              <a:rPr lang="en-CA" dirty="0"/>
+              <a:t>😱</a:t>
             </a:r>
           </a:p>
           <a:p>
             <a:pPr lvl="2"/>
-            <a:r>
-              <a:rPr lang="fr-CA" dirty="0"/>
-              <a:t> Ici, on a une </a:t>
-            </a:r>
-            <a:r>
-              <a:rPr lang="fr-CA" b="1" dirty="0"/>
-              <a:t>fonction</a:t>
-            </a:r>
-            <a:r>
-              <a:rPr lang="fr-CA" dirty="0"/>
-              <a:t> nommée «</a:t>
-            </a:r>
-            <a:r>
-              <a:rPr lang="fr-CA" b="1" dirty="0">
-                <a:solidFill>
-                  <a:srgbClr val="73B3D1"/>
-                </a:solidFill>
-              </a:rPr>
-              <a:t> changerTexte </a:t>
-            </a:r>
-            <a:r>
-              <a:rPr lang="fr-CA" dirty="0"/>
-              <a:t>» qui contient un morceau de code qui modifie le </a:t>
-            </a:r>
-            <a:r>
-              <a:rPr lang="fr-CA" b="1" dirty="0"/>
-              <a:t>contenu textuel </a:t>
-            </a:r>
-            <a:r>
-              <a:rPr lang="fr-CA" dirty="0"/>
-              <a:t>de l’élément avec l’id </a:t>
-            </a:r>
-            <a:r>
-              <a:rPr lang="fr-CA" b="1" dirty="0">
-                <a:solidFill>
-                  <a:srgbClr val="73B3D1"/>
-                </a:solidFill>
-              </a:rPr>
-              <a:t>titre</a:t>
-            </a:r>
-            <a:r>
-              <a:rPr lang="fr-CA" dirty="0"/>
-              <a:t>.</a:t>
-            </a:r>
+            <a:endParaRPr lang="en-CA" dirty="0"/>
+          </a:p>
+          <a:p>
+            <a:pPr lvl="2"/>
+            <a:endParaRPr lang="en-CA" dirty="0"/>
+          </a:p>
+          <a:p>
+            <a:pPr lvl="2"/>
+            <a:endParaRPr lang="en-CA" dirty="0"/>
+          </a:p>
+          <a:p>
+            <a:pPr lvl="2"/>
+            <a:endParaRPr lang="en-CA" dirty="0"/>
+          </a:p>
+          <a:p>
+            <a:pPr lvl="2"/>
+            <a:endParaRPr lang="en-CA" dirty="0"/>
+          </a:p>
+          <a:p>
+            <a:pPr lvl="2"/>
+            <a:endParaRPr lang="en-CA" dirty="0"/>
+          </a:p>
+          <a:p>
+            <a:pPr lvl="2"/>
+            <a:endParaRPr lang="en-CA" dirty="0"/>
+          </a:p>
+          <a:p>
+            <a:pPr lvl="2"/>
+            <a:endParaRPr lang="en-CA" dirty="0"/>
+          </a:p>
+          <a:p>
+            <a:pPr lvl="2"/>
+            <a:endParaRPr lang="en-CA" dirty="0"/>
+          </a:p>
+          <a:p>
+            <a:pPr lvl="2"/>
+            <a:endParaRPr lang="en-CA" dirty="0"/>
           </a:p>
           <a:p>
             <a:pPr lvl="2"/>
@@ -11689,33 +12199,9 @@
           </a:p>
           <a:p>
             <a:pPr lvl="2"/>
-            <a:endParaRPr lang="fr-CA" dirty="0"/>
-          </a:p>
-          <a:p>
-            <a:pPr lvl="2"/>
-            <a:endParaRPr lang="fr-CA" dirty="0"/>
-          </a:p>
-          <a:p>
-            <a:pPr lvl="2"/>
-            <a:endParaRPr lang="fr-CA" dirty="0"/>
-          </a:p>
-          <a:p>
-            <a:pPr lvl="2"/>
-            <a:endParaRPr lang="fr-CA" dirty="0"/>
-          </a:p>
-          <a:p>
-            <a:pPr lvl="2"/>
-            <a:endParaRPr lang="fr-CA" dirty="0"/>
-          </a:p>
-          <a:p>
-            <a:pPr lvl="2"/>
-            <a:endParaRPr lang="fr-CA" dirty="0"/>
-          </a:p>
-          <a:p>
-            <a:pPr lvl="2"/>
-            <a:r>
-              <a:rPr lang="fr-CA" dirty="0"/>
-              <a:t> Le fait de « </a:t>
+            <a:r>
+              <a:rPr lang="fr-CA" dirty="0"/>
+              <a:t> Comment c’est possible ? Nous n’avons même pas utilisé </a:t>
             </a:r>
             <a:r>
               <a:rPr lang="fr-CA" dirty="0">
@@ -11723,31 +12209,23 @@
                   <a:srgbClr val="FA4098"/>
                 </a:solidFill>
               </a:rPr>
-              <a:t>déclarer</a:t>
-            </a:r>
-            <a:r>
-              <a:rPr lang="fr-CA" dirty="0"/>
-              <a:t> » cette fonction va nous permettre </a:t>
-            </a:r>
-            <a:r>
-              <a:rPr lang="fr-CA"/>
-              <a:t>de « </a:t>
-            </a:r>
-            <a:r>
-              <a:rPr lang="fr-CA" b="1" u="sng">
+              <a:t>.querySelector</a:t>
+            </a:r>
+            <a:r>
+              <a:rPr lang="fr-CA" dirty="0"/>
+              <a:t> ou </a:t>
+            </a:r>
+            <a:r>
+              <a:rPr lang="fr-CA" dirty="0">
                 <a:solidFill>
                   <a:srgbClr val="FA4098"/>
                 </a:solidFill>
               </a:rPr>
-              <a:t>l’appeler</a:t>
-            </a:r>
-            <a:r>
-              <a:rPr lang="fr-CA"/>
-              <a:t> » </a:t>
-            </a:r>
-            <a:r>
-              <a:rPr lang="fr-CA" dirty="0"/>
-              <a:t>dans la console comme on l’a vu dans la diapositive précédente.</a:t>
+              <a:t>.textContent</a:t>
+            </a:r>
+            <a:r>
+              <a:rPr lang="fr-CA" dirty="0"/>
+              <a:t> !</a:t>
             </a:r>
           </a:p>
         </p:txBody>
@@ -11780,177 +12258,12 @@
           </a:p>
         </p:txBody>
       </p:sp>
-      <p:sp>
-        <p:nvSpPr>
-          <p:cNvPr id="24" name="ZoneTexte 23">
-            <a:extLst>
-              <a:ext uri="{FF2B5EF4-FFF2-40B4-BE49-F238E27FC236}">
-                <a16:creationId xmlns:a16="http://schemas.microsoft.com/office/drawing/2014/main" id="{0EEFAE01-7F47-4AD7-8A80-0E4DB1D15532}"/>
-              </a:ext>
-            </a:extLst>
-          </p:cNvPr>
-          <p:cNvSpPr txBox="1"/>
-          <p:nvPr/>
-        </p:nvSpPr>
-        <p:spPr>
-          <a:xfrm>
-            <a:off x="1776005" y="2735828"/>
-            <a:ext cx="2371344" cy="523220"/>
-          </a:xfrm>
-          <a:prstGeom prst="rect">
-            <a:avLst/>
-          </a:prstGeom>
-          <a:noFill/>
-        </p:spPr>
-        <p:txBody>
-          <a:bodyPr wrap="square" rtlCol="0">
-            <a:spAutoFit/>
-          </a:bodyPr>
-          <a:lstStyle/>
-          <a:p>
-            <a:r>
-              <a:rPr lang="fr-CA" sz="1400" dirty="0">
-                <a:solidFill>
-                  <a:srgbClr val="9073D1"/>
-                </a:solidFill>
-              </a:rPr>
-              <a:t>Ce mot-clé sert à </a:t>
-            </a:r>
-            <a:r>
-              <a:rPr lang="fr-CA" sz="1400" b="1" dirty="0">
-                <a:solidFill>
-                  <a:srgbClr val="73B3D1"/>
-                </a:solidFill>
-              </a:rPr>
-              <a:t>déclarer</a:t>
-            </a:r>
-            <a:r>
-              <a:rPr lang="fr-CA" sz="1400" dirty="0">
-                <a:solidFill>
-                  <a:srgbClr val="9073D1"/>
-                </a:solidFill>
-              </a:rPr>
-              <a:t> une fonction</a:t>
-            </a:r>
-          </a:p>
-        </p:txBody>
-      </p:sp>
-      <p:sp>
-        <p:nvSpPr>
-          <p:cNvPr id="29" name="ZoneTexte 28">
-            <a:extLst>
-              <a:ext uri="{FF2B5EF4-FFF2-40B4-BE49-F238E27FC236}">
-                <a16:creationId xmlns:a16="http://schemas.microsoft.com/office/drawing/2014/main" id="{7B8DAFCF-077E-437B-8A45-57242A1FB836}"/>
-              </a:ext>
-            </a:extLst>
-          </p:cNvPr>
-          <p:cNvSpPr txBox="1"/>
-          <p:nvPr/>
-        </p:nvSpPr>
-        <p:spPr>
-          <a:xfrm>
-            <a:off x="4266220" y="2738504"/>
-            <a:ext cx="3149722" cy="523220"/>
-          </a:xfrm>
-          <a:prstGeom prst="rect">
-            <a:avLst/>
-          </a:prstGeom>
-          <a:noFill/>
-        </p:spPr>
-        <p:txBody>
-          <a:bodyPr wrap="square" rtlCol="0">
-            <a:spAutoFit/>
-          </a:bodyPr>
-          <a:lstStyle/>
-          <a:p>
-            <a:r>
-              <a:rPr lang="fr-CA" sz="1400" dirty="0">
-                <a:solidFill>
-                  <a:srgbClr val="9073D1"/>
-                </a:solidFill>
-              </a:rPr>
-              <a:t>Ceci est le </a:t>
-            </a:r>
-            <a:r>
-              <a:rPr lang="fr-CA" sz="1400" b="1" dirty="0">
-                <a:solidFill>
-                  <a:srgbClr val="73B3D1"/>
-                </a:solidFill>
-              </a:rPr>
-              <a:t>nom</a:t>
-            </a:r>
-            <a:r>
-              <a:rPr lang="fr-CA" sz="1400" dirty="0">
-                <a:solidFill>
-                  <a:srgbClr val="9073D1"/>
-                </a:solidFill>
-              </a:rPr>
-              <a:t> de la fonction. C’est ce qui l’identifie.</a:t>
-            </a:r>
-          </a:p>
-        </p:txBody>
-      </p:sp>
-      <p:sp>
-        <p:nvSpPr>
-          <p:cNvPr id="32" name="ZoneTexte 31">
-            <a:extLst>
-              <a:ext uri="{FF2B5EF4-FFF2-40B4-BE49-F238E27FC236}">
-                <a16:creationId xmlns:a16="http://schemas.microsoft.com/office/drawing/2014/main" id="{76FFA2E6-6E34-4ED8-A600-C612BDF306AC}"/>
-              </a:ext>
-            </a:extLst>
-          </p:cNvPr>
-          <p:cNvSpPr txBox="1"/>
-          <p:nvPr/>
-        </p:nvSpPr>
-        <p:spPr>
-          <a:xfrm>
-            <a:off x="7468348" y="2731133"/>
-            <a:ext cx="3685031" cy="523220"/>
-          </a:xfrm>
-          <a:prstGeom prst="rect">
-            <a:avLst/>
-          </a:prstGeom>
-          <a:noFill/>
-        </p:spPr>
-        <p:txBody>
-          <a:bodyPr wrap="square" rtlCol="0">
-            <a:spAutoFit/>
-          </a:bodyPr>
-          <a:lstStyle/>
-          <a:p>
-            <a:r>
-              <a:rPr lang="fr-CA" sz="1400" dirty="0">
-                <a:solidFill>
-                  <a:srgbClr val="9073D1"/>
-                </a:solidFill>
-              </a:rPr>
-              <a:t>Le morceau de code réutilisable est situé entre des </a:t>
-            </a:r>
-            <a:r>
-              <a:rPr lang="fr-CA" sz="1400" b="1" dirty="0">
-                <a:solidFill>
-                  <a:srgbClr val="73B3D1"/>
-                </a:solidFill>
-              </a:rPr>
-              <a:t>accolades</a:t>
-            </a:r>
-            <a:r>
-              <a:rPr lang="fr-CA" sz="1400" dirty="0">
-                <a:solidFill>
-                  <a:srgbClr val="9073D1"/>
-                </a:solidFill>
-              </a:rPr>
-              <a:t> { ... }</a:t>
-            </a:r>
-          </a:p>
-        </p:txBody>
-      </p:sp>
       <p:pic>
         <p:nvPicPr>
-          <p:cNvPr id="6" name="Image 5">
-            <a:extLst>
-              <a:ext uri="{FF2B5EF4-FFF2-40B4-BE49-F238E27FC236}">
-                <a16:creationId xmlns:a16="http://schemas.microsoft.com/office/drawing/2014/main" id="{4767CD88-D68E-4483-AE22-FE33B2DD8DCD}"/>
+          <p:cNvPr id="15" name="Image 14">
+            <a:extLst>
+              <a:ext uri="{FF2B5EF4-FFF2-40B4-BE49-F238E27FC236}">
+                <a16:creationId xmlns:a16="http://schemas.microsoft.com/office/drawing/2014/main" id="{B74E3008-FF9F-4A08-9186-CCD41FEAB4EB}"/>
               </a:ext>
             </a:extLst>
           </p:cNvPr>
@@ -11967,8 +12280,8 @@
         </p:blipFill>
         <p:spPr>
           <a:xfrm>
-            <a:off x="2127498" y="3632166"/>
-            <a:ext cx="8278380" cy="1047896"/>
+            <a:off x="2536473" y="3932715"/>
+            <a:ext cx="3024068" cy="1646694"/>
           </a:xfrm>
           <a:prstGeom prst="rect">
             <a:avLst/>
@@ -11980,31 +12293,151 @@
           </a:ln>
         </p:spPr>
       </p:pic>
+      <p:pic>
+        <p:nvPicPr>
+          <p:cNvPr id="17" name="Image 16">
+            <a:extLst>
+              <a:ext uri="{FF2B5EF4-FFF2-40B4-BE49-F238E27FC236}">
+                <a16:creationId xmlns:a16="http://schemas.microsoft.com/office/drawing/2014/main" id="{1954C3DF-54B2-4241-A8D8-7AF8E85264F7}"/>
+              </a:ext>
+            </a:extLst>
+          </p:cNvPr>
+          <p:cNvPicPr>
+            <a:picLocks noChangeAspect="1"/>
+          </p:cNvPicPr>
+          <p:nvPr/>
+        </p:nvPicPr>
+        <p:blipFill>
+          <a:blip r:embed="rId3"/>
+          <a:stretch>
+            <a:fillRect/>
+          </a:stretch>
+        </p:blipFill>
+        <p:spPr>
+          <a:xfrm>
+            <a:off x="5006463" y="2440821"/>
+            <a:ext cx="2503809" cy="1213384"/>
+          </a:xfrm>
+          <a:prstGeom prst="rect">
+            <a:avLst/>
+          </a:prstGeom>
+          <a:ln w="28575">
+            <a:solidFill>
+              <a:srgbClr val="797CDE"/>
+            </a:solidFill>
+          </a:ln>
+        </p:spPr>
+      </p:pic>
+      <p:pic>
+        <p:nvPicPr>
+          <p:cNvPr id="19" name="Image 18">
+            <a:extLst>
+              <a:ext uri="{FF2B5EF4-FFF2-40B4-BE49-F238E27FC236}">
+                <a16:creationId xmlns:a16="http://schemas.microsoft.com/office/drawing/2014/main" id="{9291056B-C38F-4292-9F18-2AE9EB957655}"/>
+              </a:ext>
+            </a:extLst>
+          </p:cNvPr>
+          <p:cNvPicPr>
+            <a:picLocks noChangeAspect="1"/>
+          </p:cNvPicPr>
+          <p:nvPr/>
+        </p:nvPicPr>
+        <p:blipFill>
+          <a:blip r:embed="rId4"/>
+          <a:stretch>
+            <a:fillRect/>
+          </a:stretch>
+        </p:blipFill>
+        <p:spPr>
+          <a:xfrm>
+            <a:off x="6879835" y="3927498"/>
+            <a:ext cx="3024068" cy="1657128"/>
+          </a:xfrm>
+          <a:prstGeom prst="rect">
+            <a:avLst/>
+          </a:prstGeom>
+          <a:ln w="28575">
+            <a:solidFill>
+              <a:srgbClr val="797CDE"/>
+            </a:solidFill>
+          </a:ln>
+        </p:spPr>
+      </p:pic>
+      <p:sp>
+        <p:nvSpPr>
+          <p:cNvPr id="20" name="Flèche : droite 19">
+            <a:extLst>
+              <a:ext uri="{FF2B5EF4-FFF2-40B4-BE49-F238E27FC236}">
+                <a16:creationId xmlns:a16="http://schemas.microsoft.com/office/drawing/2014/main" id="{E46382E4-57D9-4962-B0C9-65D9EC3A48F3}"/>
+              </a:ext>
+            </a:extLst>
+          </p:cNvPr>
+          <p:cNvSpPr/>
+          <p:nvPr/>
+        </p:nvSpPr>
+        <p:spPr>
+          <a:xfrm>
+            <a:off x="5748528" y="4425696"/>
+            <a:ext cx="993648" cy="755904"/>
+          </a:xfrm>
+          <a:prstGeom prst="rightArrow">
+            <a:avLst/>
+          </a:prstGeom>
+          <a:solidFill>
+            <a:srgbClr val="797CDE"/>
+          </a:solidFill>
+          <a:ln>
+            <a:noFill/>
+          </a:ln>
+        </p:spPr>
+        <p:style>
+          <a:lnRef idx="2">
+            <a:schemeClr val="accent1">
+              <a:shade val="50000"/>
+            </a:schemeClr>
+          </a:lnRef>
+          <a:fillRef idx="1">
+            <a:schemeClr val="accent1"/>
+          </a:fillRef>
+          <a:effectRef idx="0">
+            <a:schemeClr val="accent1"/>
+          </a:effectRef>
+          <a:fontRef idx="minor">
+            <a:schemeClr val="lt1"/>
+          </a:fontRef>
+        </p:style>
+        <p:txBody>
+          <a:bodyPr rtlCol="0" anchor="ctr"/>
+          <a:lstStyle/>
+          <a:p>
+            <a:pPr algn="ctr"/>
+            <a:endParaRPr lang="fr-CA" dirty="0"/>
+          </a:p>
+        </p:txBody>
+      </p:sp>
       <p:cxnSp>
         <p:nvCxnSpPr>
-          <p:cNvPr id="26" name="Connecteur droit avec flèche 25">
-            <a:extLst>
-              <a:ext uri="{FF2B5EF4-FFF2-40B4-BE49-F238E27FC236}">
-                <a16:creationId xmlns:a16="http://schemas.microsoft.com/office/drawing/2014/main" id="{9EE329C7-1875-4D40-879F-4AFEC0DBB2C1}"/>
-              </a:ext>
-            </a:extLst>
-          </p:cNvPr>
-          <p:cNvCxnSpPr>
-            <a:cxnSpLocks/>
-          </p:cNvCxnSpPr>
+          <p:cNvPr id="22" name="Connecteur droit avec flèche 21">
+            <a:extLst>
+              <a:ext uri="{FF2B5EF4-FFF2-40B4-BE49-F238E27FC236}">
+                <a16:creationId xmlns:a16="http://schemas.microsoft.com/office/drawing/2014/main" id="{320BB0BA-B546-426F-BD5F-794E9947D122}"/>
+              </a:ext>
+            </a:extLst>
+          </p:cNvPr>
+          <p:cNvCxnSpPr/>
           <p:nvPr/>
         </p:nvCxnSpPr>
         <p:spPr>
-          <a:xfrm>
-            <a:off x="2676144" y="3154715"/>
-            <a:ext cx="143257" cy="567525"/>
+          <a:xfrm flipH="1">
+            <a:off x="6455664" y="3060192"/>
+            <a:ext cx="424171" cy="225552"/>
           </a:xfrm>
           <a:prstGeom prst="straightConnector1">
             <a:avLst/>
           </a:prstGeom>
-          <a:ln w="57150">
+          <a:ln w="38100">
             <a:solidFill>
-              <a:srgbClr val="9073D1"/>
+              <a:srgbClr val="FA4098"/>
             </a:solidFill>
             <a:tailEnd type="triangle"/>
           </a:ln>
@@ -12026,142 +12459,19 @@
       </p:cxnSp>
       <p:cxnSp>
         <p:nvCxnSpPr>
-          <p:cNvPr id="30" name="Connecteur droit avec flèche 29">
-            <a:extLst>
-              <a:ext uri="{FF2B5EF4-FFF2-40B4-BE49-F238E27FC236}">
-                <a16:creationId xmlns:a16="http://schemas.microsoft.com/office/drawing/2014/main" id="{1A5CA0A0-EB98-45D2-9605-79C50F698BA3}"/>
-              </a:ext>
-            </a:extLst>
-          </p:cNvPr>
-          <p:cNvCxnSpPr>
-            <a:cxnSpLocks/>
-          </p:cNvCxnSpPr>
+          <p:cNvPr id="31" name="Connecteur droit avec flèche 30">
+            <a:extLst>
+              <a:ext uri="{FF2B5EF4-FFF2-40B4-BE49-F238E27FC236}">
+                <a16:creationId xmlns:a16="http://schemas.microsoft.com/office/drawing/2014/main" id="{2165BF1A-A336-4DA3-A577-30AEAB41BE76}"/>
+              </a:ext>
+            </a:extLst>
+          </p:cNvPr>
+          <p:cNvCxnSpPr/>
           <p:nvPr/>
         </p:nvCxnSpPr>
         <p:spPr>
           <a:xfrm flipH="1">
-            <a:off x="4266221" y="3254353"/>
-            <a:ext cx="476467" cy="467887"/>
-          </a:xfrm>
-          <a:prstGeom prst="straightConnector1">
-            <a:avLst/>
-          </a:prstGeom>
-          <a:ln w="57150">
-            <a:solidFill>
-              <a:srgbClr val="9073D1"/>
-            </a:solidFill>
-            <a:tailEnd type="triangle"/>
-          </a:ln>
-        </p:spPr>
-        <p:style>
-          <a:lnRef idx="1">
-            <a:schemeClr val="accent1"/>
-          </a:lnRef>
-          <a:fillRef idx="0">
-            <a:schemeClr val="accent1"/>
-          </a:fillRef>
-          <a:effectRef idx="0">
-            <a:schemeClr val="accent1"/>
-          </a:effectRef>
-          <a:fontRef idx="minor">
-            <a:schemeClr val="tx1"/>
-          </a:fontRef>
-        </p:style>
-      </p:cxnSp>
-      <p:cxnSp>
-        <p:nvCxnSpPr>
-          <p:cNvPr id="35" name="Connecteur droit avec flèche 34">
-            <a:extLst>
-              <a:ext uri="{FF2B5EF4-FFF2-40B4-BE49-F238E27FC236}">
-                <a16:creationId xmlns:a16="http://schemas.microsoft.com/office/drawing/2014/main" id="{B3179EE9-56EE-4642-BBFD-114FBA860FEC}"/>
-              </a:ext>
-            </a:extLst>
-          </p:cNvPr>
-          <p:cNvCxnSpPr>
-            <a:cxnSpLocks/>
-          </p:cNvCxnSpPr>
-          <p:nvPr/>
-        </p:nvCxnSpPr>
-        <p:spPr>
-          <a:xfrm flipH="1">
-            <a:off x="5483736" y="3291235"/>
-            <a:ext cx="2667755" cy="610205"/>
-          </a:xfrm>
-          <a:prstGeom prst="straightConnector1">
-            <a:avLst/>
-          </a:prstGeom>
-          <a:ln w="57150">
-            <a:solidFill>
-              <a:srgbClr val="9073D1"/>
-            </a:solidFill>
-            <a:tailEnd type="triangle"/>
-          </a:ln>
-        </p:spPr>
-        <p:style>
-          <a:lnRef idx="1">
-            <a:schemeClr val="accent1"/>
-          </a:lnRef>
-          <a:fillRef idx="0">
-            <a:schemeClr val="accent1"/>
-          </a:fillRef>
-          <a:effectRef idx="0">
-            <a:schemeClr val="accent1"/>
-          </a:effectRef>
-          <a:fontRef idx="minor">
-            <a:schemeClr val="tx1"/>
-          </a:fontRef>
-        </p:style>
-      </p:cxnSp>
-      <p:pic>
-        <p:nvPicPr>
-          <p:cNvPr id="11" name="Image 10">
-            <a:extLst>
-              <a:ext uri="{FF2B5EF4-FFF2-40B4-BE49-F238E27FC236}">
-                <a16:creationId xmlns:a16="http://schemas.microsoft.com/office/drawing/2014/main" id="{D129D1BA-B94B-40D9-A829-B0BAD83F0961}"/>
-              </a:ext>
-            </a:extLst>
-          </p:cNvPr>
-          <p:cNvPicPr>
-            <a:picLocks noChangeAspect="1"/>
-          </p:cNvPicPr>
-          <p:nvPr/>
-        </p:nvPicPr>
-        <p:blipFill>
-          <a:blip r:embed="rId3"/>
-          <a:stretch>
-            <a:fillRect/>
-          </a:stretch>
-        </p:blipFill>
-        <p:spPr>
-          <a:xfrm>
-            <a:off x="7371711" y="5435411"/>
-            <a:ext cx="2503809" cy="1213384"/>
-          </a:xfrm>
-          <a:prstGeom prst="rect">
-            <a:avLst/>
-          </a:prstGeom>
-          <a:ln w="28575">
-            <a:solidFill>
-              <a:srgbClr val="797CDE"/>
-            </a:solidFill>
-          </a:ln>
-        </p:spPr>
-      </p:pic>
-      <p:cxnSp>
-        <p:nvCxnSpPr>
-          <p:cNvPr id="12" name="Connecteur droit avec flèche 11">
-            <a:extLst>
-              <a:ext uri="{FF2B5EF4-FFF2-40B4-BE49-F238E27FC236}">
-                <a16:creationId xmlns:a16="http://schemas.microsoft.com/office/drawing/2014/main" id="{15819092-2AE1-4097-9A3E-E5ECE141A801}"/>
-              </a:ext>
-            </a:extLst>
-          </p:cNvPr>
-          <p:cNvCxnSpPr/>
-          <p:nvPr/>
-        </p:nvCxnSpPr>
-        <p:spPr>
-          <a:xfrm flipH="1">
-            <a:off x="8820912" y="6054782"/>
+            <a:off x="7778496" y="3870960"/>
             <a:ext cx="424171" cy="225552"/>
           </a:xfrm>
           <a:prstGeom prst="straightConnector1">
@@ -12192,7 +12502,7 @@
     </p:spTree>
     <p:extLst>
       <p:ext uri="{BB962C8B-B14F-4D97-AF65-F5344CB8AC3E}">
-        <p14:creationId xmlns:p14="http://schemas.microsoft.com/office/powerpoint/2010/main" val="2984827623"/>
+        <p14:creationId xmlns:p14="http://schemas.microsoft.com/office/powerpoint/2010/main" val="3821458347"/>
       </p:ext>
     </p:extLst>
   </p:cSld>
@@ -12242,67 +12552,162 @@
           <a:p>
             <a:r>
               <a:rPr lang="fr-CA" dirty="0"/>
-              <a:t> Où </a:t>
+              <a:t> Qu’est-ce qu’une </a:t>
+            </a:r>
+            <a:r>
+              <a:rPr lang="fr-CA" b="1" dirty="0">
+                <a:solidFill>
+                  <a:srgbClr val="73B3D1"/>
+                </a:solidFill>
+              </a:rPr>
+              <a:t>fonction</a:t>
+            </a:r>
+            <a:r>
+              <a:rPr lang="fr-CA" dirty="0"/>
+              <a:t>, grossièrement ? 🤔</a:t>
+            </a:r>
+          </a:p>
+          <a:p>
+            <a:pPr lvl="1"/>
+            <a:r>
+              <a:rPr lang="fr-CA" dirty="0"/>
+              <a:t> </a:t>
+            </a:r>
+            <a:r>
+              <a:rPr lang="fr-CA" dirty="0">
+                <a:solidFill>
+                  <a:srgbClr val="FA4098"/>
+                </a:solidFill>
+              </a:rPr>
+              <a:t>Déclarer</a:t>
+            </a:r>
+            <a:r>
+              <a:rPr lang="fr-CA" dirty="0"/>
+              <a:t> une fonction</a:t>
+            </a:r>
+          </a:p>
+          <a:p>
+            <a:pPr lvl="2"/>
+            <a:r>
+              <a:rPr lang="fr-CA" dirty="0"/>
+              <a:t> Ici, on a une </a:t>
             </a:r>
             <a:r>
               <a:rPr lang="fr-CA" b="1" dirty="0"/>
-              <a:t>déclarer la fonction </a:t>
-            </a:r>
-            <a:r>
-              <a:rPr lang="fr-CA" dirty="0"/>
-              <a:t>?</a:t>
-            </a:r>
-          </a:p>
-          <a:p>
-            <a:pPr lvl="1"/>
-            <a:r>
-              <a:rPr lang="fr-CA" dirty="0"/>
-              <a:t> Où faut-il écrire le morceau de code qui sert à déclarer la fonction ?</a:t>
-            </a:r>
-          </a:p>
-          <a:p>
-            <a:pPr lvl="1"/>
-            <a:endParaRPr lang="fr-CA" dirty="0"/>
-          </a:p>
-          <a:p>
-            <a:pPr lvl="1"/>
-            <a:endParaRPr lang="fr-CA" dirty="0"/>
-          </a:p>
-          <a:p>
-            <a:pPr lvl="1"/>
-            <a:endParaRPr lang="fr-CA" dirty="0"/>
-          </a:p>
-          <a:p>
-            <a:pPr lvl="2"/>
-            <a:r>
-              <a:rPr lang="fr-CA" dirty="0"/>
-              <a:t> Si on déclare la fonction dans la </a:t>
+              <a:t>fonction</a:t>
+            </a:r>
+            <a:r>
+              <a:rPr lang="fr-CA" dirty="0"/>
+              <a:t> nommée «</a:t>
+            </a:r>
+            <a:r>
+              <a:rPr lang="fr-CA" b="1" dirty="0">
+                <a:solidFill>
+                  <a:srgbClr val="73B3D1"/>
+                </a:solidFill>
+              </a:rPr>
+              <a:t> changerTexte </a:t>
+            </a:r>
+            <a:r>
+              <a:rPr lang="fr-CA" dirty="0"/>
+              <a:t>» qui contient un morceau de code qui modifie le </a:t>
             </a:r>
             <a:r>
               <a:rPr lang="fr-CA" b="1" dirty="0"/>
-              <a:t>console</a:t>
-            </a:r>
-            <a:r>
-              <a:rPr lang="fr-CA" dirty="0"/>
-              <a:t> du navigateur... la fonction n’existera plus quand nous réactualiserons la page. </a:t>
-            </a:r>
-            <a:r>
-              <a:rPr lang="fr-CA" sz="2000" dirty="0"/>
-              <a:t>😢 Pas très pratique.</a:t>
+              <a:t>contenu textuel </a:t>
+            </a:r>
+            <a:r>
+              <a:rPr lang="fr-CA" dirty="0"/>
+              <a:t>de l’élément avec l’id </a:t>
+            </a:r>
+            <a:r>
+              <a:rPr lang="fr-CA" b="1" dirty="0">
+                <a:solidFill>
+                  <a:srgbClr val="73B3D1"/>
+                </a:solidFill>
+              </a:rPr>
+              <a:t>titre</a:t>
+            </a:r>
+            <a:r>
+              <a:rPr lang="fr-CA" dirty="0"/>
+              <a:t>.</a:t>
             </a:r>
           </a:p>
           <a:p>
             <a:pPr lvl="2"/>
             <a:endParaRPr lang="fr-CA" dirty="0"/>
+          </a:p>
+          <a:p>
+            <a:pPr lvl="2"/>
+            <a:endParaRPr lang="fr-CA" dirty="0"/>
+          </a:p>
+          <a:p>
+            <a:pPr lvl="2"/>
+            <a:endParaRPr lang="fr-CA" dirty="0"/>
+          </a:p>
+          <a:p>
+            <a:pPr lvl="2"/>
+            <a:endParaRPr lang="fr-CA" dirty="0"/>
+          </a:p>
+          <a:p>
+            <a:pPr lvl="2"/>
+            <a:endParaRPr lang="fr-CA" dirty="0"/>
+          </a:p>
+          <a:p>
+            <a:pPr lvl="2"/>
+            <a:endParaRPr lang="fr-CA" dirty="0"/>
+          </a:p>
+          <a:p>
+            <a:pPr lvl="2"/>
+            <a:endParaRPr lang="fr-CA" dirty="0"/>
+          </a:p>
+          <a:p>
+            <a:pPr lvl="2"/>
+            <a:r>
+              <a:rPr lang="fr-CA" dirty="0"/>
+              <a:t> Le fait de « </a:t>
+            </a:r>
+            <a:r>
+              <a:rPr lang="fr-CA" dirty="0">
+                <a:solidFill>
+                  <a:srgbClr val="FA4098"/>
+                </a:solidFill>
+              </a:rPr>
+              <a:t>déclarer</a:t>
+            </a:r>
+            <a:r>
+              <a:rPr lang="fr-CA" dirty="0"/>
+              <a:t> » cette fonction va nous permettre </a:t>
+            </a:r>
+            <a:r>
+              <a:rPr lang="fr-CA"/>
+              <a:t>de « </a:t>
+            </a:r>
+            <a:r>
+              <a:rPr lang="fr-CA" b="1" u="sng">
+                <a:solidFill>
+                  <a:srgbClr val="FA4098"/>
+                </a:solidFill>
+              </a:rPr>
+              <a:t>l’appeler</a:t>
+            </a:r>
+            <a:r>
+              <a:rPr lang="fr-CA"/>
+              <a:t> » </a:t>
+            </a:r>
+            <a:r>
+              <a:rPr lang="fr-CA" dirty="0"/>
+              <a:t>dans la console comme on l’a vu dans la diapositive précédente.</a:t>
+            </a:r>
           </a:p>
         </p:txBody>
       </p:sp>
       <p:sp>
         <p:nvSpPr>
-          <p:cNvPr id="9" name="Titre 2">
-            <a:extLst>
-              <a:ext uri="{FF2B5EF4-FFF2-40B4-BE49-F238E27FC236}">
-                <a16:creationId xmlns:a16="http://schemas.microsoft.com/office/drawing/2014/main" id="{2D0E330E-A85A-4A99-BF7A-3A4CCDD80129}"/>
+          <p:cNvPr id="3" name="Titre 2">
+            <a:extLst>
+              <a:ext uri="{FF2B5EF4-FFF2-40B4-BE49-F238E27FC236}">
+                <a16:creationId xmlns:a16="http://schemas.microsoft.com/office/drawing/2014/main" id="{A7365136-E933-4296-BE91-C6C71E34AC7E}"/>
               </a:ext>
             </a:extLst>
           </p:cNvPr>
@@ -12327,66 +12732,175 @@
       </p:sp>
       <p:sp>
         <p:nvSpPr>
-          <p:cNvPr id="10" name="Interdiction 9">
-            <a:extLst>
-              <a:ext uri="{FF2B5EF4-FFF2-40B4-BE49-F238E27FC236}">
-                <a16:creationId xmlns:a16="http://schemas.microsoft.com/office/drawing/2014/main" id="{29B0F7BD-2C56-402E-B998-F24A338564E5}"/>
-              </a:ext>
-            </a:extLst>
-          </p:cNvPr>
-          <p:cNvSpPr/>
+          <p:cNvPr id="24" name="ZoneTexte 23">
+            <a:extLst>
+              <a:ext uri="{FF2B5EF4-FFF2-40B4-BE49-F238E27FC236}">
+                <a16:creationId xmlns:a16="http://schemas.microsoft.com/office/drawing/2014/main" id="{0EEFAE01-7F47-4AD7-8A80-0E4DB1D15532}"/>
+              </a:ext>
+            </a:extLst>
+          </p:cNvPr>
+          <p:cNvSpPr txBox="1"/>
           <p:nvPr/>
         </p:nvSpPr>
         <p:spPr>
           <a:xfrm>
-            <a:off x="1790858" y="4681178"/>
-            <a:ext cx="635464" cy="635464"/>
-          </a:xfrm>
-          <a:prstGeom prst="noSmoking">
-            <a:avLst/>
-          </a:prstGeom>
-          <a:solidFill>
-            <a:srgbClr val="FA4840"/>
-          </a:solidFill>
-          <a:ln>
-            <a:noFill/>
-          </a:ln>
-        </p:spPr>
-        <p:style>
-          <a:lnRef idx="2">
-            <a:schemeClr val="accent1">
-              <a:shade val="50000"/>
-            </a:schemeClr>
-          </a:lnRef>
-          <a:fillRef idx="1">
-            <a:schemeClr val="accent1"/>
-          </a:fillRef>
-          <a:effectRef idx="0">
-            <a:schemeClr val="accent1"/>
-          </a:effectRef>
-          <a:fontRef idx="minor">
-            <a:schemeClr val="lt1"/>
-          </a:fontRef>
-        </p:style>
+            <a:off x="1776005" y="2735828"/>
+            <a:ext cx="2371344" cy="523220"/>
+          </a:xfrm>
+          <a:prstGeom prst="rect">
+            <a:avLst/>
+          </a:prstGeom>
+          <a:noFill/>
+        </p:spPr>
         <p:txBody>
-          <a:bodyPr rtlCol="0" anchor="ctr"/>
+          <a:bodyPr wrap="square" rtlCol="0">
+            <a:spAutoFit/>
+          </a:bodyPr>
           <a:lstStyle/>
           <a:p>
-            <a:pPr algn="ctr"/>
-            <a:endParaRPr lang="fr-CA" dirty="0">
-              <a:solidFill>
-                <a:schemeClr val="tx1"/>
-              </a:solidFill>
-            </a:endParaRPr>
+            <a:r>
+              <a:rPr lang="fr-CA" sz="1400" dirty="0">
+                <a:solidFill>
+                  <a:srgbClr val="9073D1"/>
+                </a:solidFill>
+              </a:rPr>
+              <a:t>Ce mot-clé sert à </a:t>
+            </a:r>
+            <a:r>
+              <a:rPr lang="fr-CA" sz="1400" b="1" dirty="0">
+                <a:solidFill>
+                  <a:srgbClr val="73B3D1"/>
+                </a:solidFill>
+              </a:rPr>
+              <a:t>déclarer</a:t>
+            </a:r>
+            <a:r>
+              <a:rPr lang="fr-CA" sz="1400" dirty="0">
+                <a:solidFill>
+                  <a:srgbClr val="9073D1"/>
+                </a:solidFill>
+              </a:rPr>
+              <a:t> une fonction</a:t>
+            </a:r>
+          </a:p>
+        </p:txBody>
+      </p:sp>
+      <p:sp>
+        <p:nvSpPr>
+          <p:cNvPr id="29" name="ZoneTexte 28">
+            <a:extLst>
+              <a:ext uri="{FF2B5EF4-FFF2-40B4-BE49-F238E27FC236}">
+                <a16:creationId xmlns:a16="http://schemas.microsoft.com/office/drawing/2014/main" id="{7B8DAFCF-077E-437B-8A45-57242A1FB836}"/>
+              </a:ext>
+            </a:extLst>
+          </p:cNvPr>
+          <p:cNvSpPr txBox="1"/>
+          <p:nvPr/>
+        </p:nvSpPr>
+        <p:spPr>
+          <a:xfrm>
+            <a:off x="4266220" y="2738504"/>
+            <a:ext cx="3149722" cy="523220"/>
+          </a:xfrm>
+          <a:prstGeom prst="rect">
+            <a:avLst/>
+          </a:prstGeom>
+          <a:noFill/>
+        </p:spPr>
+        <p:txBody>
+          <a:bodyPr wrap="square" rtlCol="0">
+            <a:spAutoFit/>
+          </a:bodyPr>
+          <a:lstStyle/>
+          <a:p>
+            <a:r>
+              <a:rPr lang="fr-CA" sz="1400" dirty="0">
+                <a:solidFill>
+                  <a:srgbClr val="9073D1"/>
+                </a:solidFill>
+              </a:rPr>
+              <a:t>Ceci est le </a:t>
+            </a:r>
+            <a:r>
+              <a:rPr lang="fr-CA" sz="1400" b="1" dirty="0">
+                <a:solidFill>
+                  <a:srgbClr val="73B3D1"/>
+                </a:solidFill>
+              </a:rPr>
+              <a:t>nom</a:t>
+            </a:r>
+            <a:r>
+              <a:rPr lang="fr-CA" sz="1400" dirty="0">
+                <a:solidFill>
+                  <a:srgbClr val="9073D1"/>
+                </a:solidFill>
+              </a:rPr>
+              <a:t> de la fonction. C’est ce qui l’identifie.</a:t>
+            </a:r>
+          </a:p>
+        </p:txBody>
+      </p:sp>
+      <p:sp>
+        <p:nvSpPr>
+          <p:cNvPr id="32" name="ZoneTexte 31">
+            <a:extLst>
+              <a:ext uri="{FF2B5EF4-FFF2-40B4-BE49-F238E27FC236}">
+                <a16:creationId xmlns:a16="http://schemas.microsoft.com/office/drawing/2014/main" id="{76FFA2E6-6E34-4ED8-A600-C612BDF306AC}"/>
+              </a:ext>
+            </a:extLst>
+          </p:cNvPr>
+          <p:cNvSpPr txBox="1"/>
+          <p:nvPr/>
+        </p:nvSpPr>
+        <p:spPr>
+          <a:xfrm>
+            <a:off x="7468348" y="2731133"/>
+            <a:ext cx="3685031" cy="523220"/>
+          </a:xfrm>
+          <a:prstGeom prst="rect">
+            <a:avLst/>
+          </a:prstGeom>
+          <a:noFill/>
+        </p:spPr>
+        <p:txBody>
+          <a:bodyPr wrap="square" rtlCol="0">
+            <a:spAutoFit/>
+          </a:bodyPr>
+          <a:lstStyle/>
+          <a:p>
+            <a:r>
+              <a:rPr lang="fr-CA" sz="1400" dirty="0">
+                <a:solidFill>
+                  <a:srgbClr val="9073D1"/>
+                </a:solidFill>
+              </a:rPr>
+              <a:t>Le morceau de code réutilisable est situé entre des </a:t>
+            </a:r>
+            <a:r>
+              <a:rPr lang="fr-CA" sz="1400" b="1" dirty="0">
+                <a:solidFill>
+                  <a:srgbClr val="73B3D1"/>
+                </a:solidFill>
+              </a:rPr>
+              <a:t>accolades</a:t>
+            </a:r>
+            <a:r>
+              <a:rPr lang="fr-CA" sz="1400" dirty="0">
+                <a:solidFill>
+                  <a:srgbClr val="9073D1"/>
+                </a:solidFill>
+              </a:rPr>
+              <a:t> { ... }</a:t>
+            </a:r>
           </a:p>
         </p:txBody>
       </p:sp>
       <p:pic>
         <p:nvPicPr>
-          <p:cNvPr id="8" name="Image 7">
-            <a:extLst>
-              <a:ext uri="{FF2B5EF4-FFF2-40B4-BE49-F238E27FC236}">
-                <a16:creationId xmlns:a16="http://schemas.microsoft.com/office/drawing/2014/main" id="{15533FC6-A264-476E-9239-29196125A5DD}"/>
+          <p:cNvPr id="6" name="Image 5">
+            <a:extLst>
+              <a:ext uri="{FF2B5EF4-FFF2-40B4-BE49-F238E27FC236}">
+                <a16:creationId xmlns:a16="http://schemas.microsoft.com/office/drawing/2014/main" id="{4767CD88-D68E-4483-AE22-FE33B2DD8DCD}"/>
               </a:ext>
             </a:extLst>
           </p:cNvPr>
@@ -12403,25 +12917,157 @@
         </p:blipFill>
         <p:spPr>
           <a:xfrm>
-            <a:off x="2764533" y="2126454"/>
-            <a:ext cx="6662934" cy="843409"/>
+            <a:off x="2127498" y="3632166"/>
+            <a:ext cx="8278380" cy="1047896"/>
           </a:xfrm>
           <a:prstGeom prst="rect">
             <a:avLst/>
           </a:prstGeom>
           <a:ln w="28575">
+            <a:solidFill>
+              <a:srgbClr val="797CDE"/>
+            </a:solidFill>
+          </a:ln>
+        </p:spPr>
+      </p:pic>
+      <p:cxnSp>
+        <p:nvCxnSpPr>
+          <p:cNvPr id="26" name="Connecteur droit avec flèche 25">
+            <a:extLst>
+              <a:ext uri="{FF2B5EF4-FFF2-40B4-BE49-F238E27FC236}">
+                <a16:creationId xmlns:a16="http://schemas.microsoft.com/office/drawing/2014/main" id="{9EE329C7-1875-4D40-879F-4AFEC0DBB2C1}"/>
+              </a:ext>
+            </a:extLst>
+          </p:cNvPr>
+          <p:cNvCxnSpPr>
+            <a:cxnSpLocks/>
+          </p:cNvCxnSpPr>
+          <p:nvPr/>
+        </p:nvCxnSpPr>
+        <p:spPr>
+          <a:xfrm>
+            <a:off x="2676144" y="3154715"/>
+            <a:ext cx="143257" cy="567525"/>
+          </a:xfrm>
+          <a:prstGeom prst="straightConnector1">
+            <a:avLst/>
+          </a:prstGeom>
+          <a:ln w="57150">
             <a:solidFill>
               <a:srgbClr val="9073D1"/>
             </a:solidFill>
+            <a:tailEnd type="triangle"/>
           </a:ln>
         </p:spPr>
-      </p:pic>
+        <p:style>
+          <a:lnRef idx="1">
+            <a:schemeClr val="accent1"/>
+          </a:lnRef>
+          <a:fillRef idx="0">
+            <a:schemeClr val="accent1"/>
+          </a:fillRef>
+          <a:effectRef idx="0">
+            <a:schemeClr val="accent1"/>
+          </a:effectRef>
+          <a:fontRef idx="minor">
+            <a:schemeClr val="tx1"/>
+          </a:fontRef>
+        </p:style>
+      </p:cxnSp>
+      <p:cxnSp>
+        <p:nvCxnSpPr>
+          <p:cNvPr id="30" name="Connecteur droit avec flèche 29">
+            <a:extLst>
+              <a:ext uri="{FF2B5EF4-FFF2-40B4-BE49-F238E27FC236}">
+                <a16:creationId xmlns:a16="http://schemas.microsoft.com/office/drawing/2014/main" id="{1A5CA0A0-EB98-45D2-9605-79C50F698BA3}"/>
+              </a:ext>
+            </a:extLst>
+          </p:cNvPr>
+          <p:cNvCxnSpPr>
+            <a:cxnSpLocks/>
+          </p:cNvCxnSpPr>
+          <p:nvPr/>
+        </p:nvCxnSpPr>
+        <p:spPr>
+          <a:xfrm flipH="1">
+            <a:off x="4266221" y="3254353"/>
+            <a:ext cx="476467" cy="467887"/>
+          </a:xfrm>
+          <a:prstGeom prst="straightConnector1">
+            <a:avLst/>
+          </a:prstGeom>
+          <a:ln w="57150">
+            <a:solidFill>
+              <a:srgbClr val="9073D1"/>
+            </a:solidFill>
+            <a:tailEnd type="triangle"/>
+          </a:ln>
+        </p:spPr>
+        <p:style>
+          <a:lnRef idx="1">
+            <a:schemeClr val="accent1"/>
+          </a:lnRef>
+          <a:fillRef idx="0">
+            <a:schemeClr val="accent1"/>
+          </a:fillRef>
+          <a:effectRef idx="0">
+            <a:schemeClr val="accent1"/>
+          </a:effectRef>
+          <a:fontRef idx="minor">
+            <a:schemeClr val="tx1"/>
+          </a:fontRef>
+        </p:style>
+      </p:cxnSp>
+      <p:cxnSp>
+        <p:nvCxnSpPr>
+          <p:cNvPr id="35" name="Connecteur droit avec flèche 34">
+            <a:extLst>
+              <a:ext uri="{FF2B5EF4-FFF2-40B4-BE49-F238E27FC236}">
+                <a16:creationId xmlns:a16="http://schemas.microsoft.com/office/drawing/2014/main" id="{B3179EE9-56EE-4642-BBFD-114FBA860FEC}"/>
+              </a:ext>
+            </a:extLst>
+          </p:cNvPr>
+          <p:cNvCxnSpPr>
+            <a:cxnSpLocks/>
+          </p:cNvCxnSpPr>
+          <p:nvPr/>
+        </p:nvCxnSpPr>
+        <p:spPr>
+          <a:xfrm flipH="1">
+            <a:off x="5483736" y="3291235"/>
+            <a:ext cx="2667755" cy="610205"/>
+          </a:xfrm>
+          <a:prstGeom prst="straightConnector1">
+            <a:avLst/>
+          </a:prstGeom>
+          <a:ln w="57150">
+            <a:solidFill>
+              <a:srgbClr val="9073D1"/>
+            </a:solidFill>
+            <a:tailEnd type="triangle"/>
+          </a:ln>
+        </p:spPr>
+        <p:style>
+          <a:lnRef idx="1">
+            <a:schemeClr val="accent1"/>
+          </a:lnRef>
+          <a:fillRef idx="0">
+            <a:schemeClr val="accent1"/>
+          </a:fillRef>
+          <a:effectRef idx="0">
+            <a:schemeClr val="accent1"/>
+          </a:effectRef>
+          <a:fontRef idx="minor">
+            <a:schemeClr val="tx1"/>
+          </a:fontRef>
+        </p:style>
+      </p:cxnSp>
       <p:pic>
         <p:nvPicPr>
-          <p:cNvPr id="4" name="Image 3">
-            <a:extLst>
-              <a:ext uri="{FF2B5EF4-FFF2-40B4-BE49-F238E27FC236}">
-                <a16:creationId xmlns:a16="http://schemas.microsoft.com/office/drawing/2014/main" id="{CDE74A8C-5D43-4184-9567-CF8D3C56CA2A}"/>
+          <p:cNvPr id="11" name="Image 10">
+            <a:extLst>
+              <a:ext uri="{FF2B5EF4-FFF2-40B4-BE49-F238E27FC236}">
+                <a16:creationId xmlns:a16="http://schemas.microsoft.com/office/drawing/2014/main" id="{D129D1BA-B94B-40D9-A829-B0BAD83F0961}"/>
               </a:ext>
             </a:extLst>
           </p:cNvPr>
@@ -12438,23 +13084,65 @@
         </p:blipFill>
         <p:spPr>
           <a:xfrm>
-            <a:off x="2652686" y="3945745"/>
-            <a:ext cx="6883027" cy="2106330"/>
+            <a:off x="7371711" y="5435411"/>
+            <a:ext cx="2503809" cy="1213384"/>
           </a:xfrm>
           <a:prstGeom prst="rect">
             <a:avLst/>
           </a:prstGeom>
           <a:ln w="28575">
             <a:solidFill>
-              <a:srgbClr val="9073D1"/>
+              <a:srgbClr val="797CDE"/>
             </a:solidFill>
           </a:ln>
         </p:spPr>
       </p:pic>
+      <p:cxnSp>
+        <p:nvCxnSpPr>
+          <p:cNvPr id="12" name="Connecteur droit avec flèche 11">
+            <a:extLst>
+              <a:ext uri="{FF2B5EF4-FFF2-40B4-BE49-F238E27FC236}">
+                <a16:creationId xmlns:a16="http://schemas.microsoft.com/office/drawing/2014/main" id="{15819092-2AE1-4097-9A3E-E5ECE141A801}"/>
+              </a:ext>
+            </a:extLst>
+          </p:cNvPr>
+          <p:cNvCxnSpPr/>
+          <p:nvPr/>
+        </p:nvCxnSpPr>
+        <p:spPr>
+          <a:xfrm flipH="1">
+            <a:off x="8820912" y="6054782"/>
+            <a:ext cx="424171" cy="225552"/>
+          </a:xfrm>
+          <a:prstGeom prst="straightConnector1">
+            <a:avLst/>
+          </a:prstGeom>
+          <a:ln w="38100">
+            <a:solidFill>
+              <a:srgbClr val="FA4098"/>
+            </a:solidFill>
+            <a:tailEnd type="triangle"/>
+          </a:ln>
+        </p:spPr>
+        <p:style>
+          <a:lnRef idx="1">
+            <a:schemeClr val="accent1"/>
+          </a:lnRef>
+          <a:fillRef idx="0">
+            <a:schemeClr val="accent1"/>
+          </a:fillRef>
+          <a:effectRef idx="0">
+            <a:schemeClr val="accent1"/>
+          </a:effectRef>
+          <a:fontRef idx="minor">
+            <a:schemeClr val="tx1"/>
+          </a:fontRef>
+        </p:style>
+      </p:cxnSp>
     </p:spTree>
     <p:extLst>
       <p:ext uri="{BB962C8B-B14F-4D97-AF65-F5344CB8AC3E}">
-        <p14:creationId xmlns:p14="http://schemas.microsoft.com/office/powerpoint/2010/main" val="77760022"/>
+        <p14:creationId xmlns:p14="http://schemas.microsoft.com/office/powerpoint/2010/main" val="2984827623"/>
       </p:ext>
     </p:extLst>
   </p:cSld>
@@ -12519,53 +13207,52 @@
             <a:pPr lvl="1"/>
             <a:r>
               <a:rPr lang="fr-CA" dirty="0"/>
-              <a:t> La fonction doit être déclarée dans un fichier avec l’extension </a:t>
-            </a:r>
-            <a:r>
-              <a:rPr lang="fr-CA" b="1" dirty="0">
-                <a:solidFill>
-                  <a:srgbClr val="73B3D1"/>
-                </a:solidFill>
-              </a:rPr>
-              <a:t>.js</a:t>
-            </a:r>
-            <a:r>
-              <a:rPr lang="fr-CA" dirty="0"/>
-              <a:t>, dans le dossier </a:t>
-            </a:r>
-            <a:r>
-              <a:rPr lang="fr-CA" b="1" dirty="0">
-                <a:solidFill>
-                  <a:srgbClr val="73B3D1"/>
-                </a:solidFill>
-              </a:rPr>
-              <a:t>js</a:t>
-            </a:r>
-            <a:r>
-              <a:rPr lang="fr-CA" dirty="0"/>
-              <a:t> de notre </a:t>
+              <a:t> Où faut-il écrire le morceau de code qui sert à déclarer la fonction ?</a:t>
+            </a:r>
+          </a:p>
+          <a:p>
+            <a:pPr lvl="1"/>
+            <a:endParaRPr lang="fr-CA" dirty="0"/>
+          </a:p>
+          <a:p>
+            <a:pPr lvl="1"/>
+            <a:endParaRPr lang="fr-CA" dirty="0"/>
+          </a:p>
+          <a:p>
+            <a:pPr lvl="1"/>
+            <a:endParaRPr lang="fr-CA" dirty="0"/>
+          </a:p>
+          <a:p>
+            <a:pPr lvl="2"/>
+            <a:r>
+              <a:rPr lang="fr-CA" dirty="0"/>
+              <a:t> Si on déclare la fonction dans la </a:t>
             </a:r>
             <a:r>
               <a:rPr lang="fr-CA" b="1" dirty="0"/>
-              <a:t>projet Web</a:t>
-            </a:r>
-            <a:r>
-              <a:rPr lang="fr-CA" dirty="0"/>
-              <a:t>.</a:t>
-            </a:r>
-          </a:p>
-          <a:p>
-            <a:pPr lvl="1"/>
+              <a:t>console</a:t>
+            </a:r>
+            <a:r>
+              <a:rPr lang="fr-CA" dirty="0"/>
+              <a:t> du navigateur... la fonction n’existera plus quand nous réactualiserons la page. </a:t>
+            </a:r>
+            <a:r>
+              <a:rPr lang="fr-CA" sz="2000" dirty="0"/>
+              <a:t>😢 Pas très pratique.</a:t>
+            </a:r>
+          </a:p>
+          <a:p>
+            <a:pPr lvl="2"/>
             <a:endParaRPr lang="fr-CA" dirty="0"/>
           </a:p>
         </p:txBody>
       </p:sp>
       <p:sp>
         <p:nvSpPr>
-          <p:cNvPr id="40" name="Titre 2">
-            <a:extLst>
-              <a:ext uri="{FF2B5EF4-FFF2-40B4-BE49-F238E27FC236}">
-                <a16:creationId xmlns:a16="http://schemas.microsoft.com/office/drawing/2014/main" id="{1F2E5F8C-C6F9-4F10-9817-B25E7A7E21B8}"/>
+          <p:cNvPr id="9" name="Titre 2">
+            <a:extLst>
+              <a:ext uri="{FF2B5EF4-FFF2-40B4-BE49-F238E27FC236}">
+                <a16:creationId xmlns:a16="http://schemas.microsoft.com/office/drawing/2014/main" id="{2D0E330E-A85A-4A99-BF7A-3A4CCDD80129}"/>
               </a:ext>
             </a:extLst>
           </p:cNvPr>
@@ -12588,1056 +13275,28 @@
           </a:p>
         </p:txBody>
       </p:sp>
-      <p:pic>
-        <p:nvPicPr>
-          <p:cNvPr id="12" name="Image 11">
-            <a:extLst>
-              <a:ext uri="{FF2B5EF4-FFF2-40B4-BE49-F238E27FC236}">
-                <a16:creationId xmlns:a16="http://schemas.microsoft.com/office/drawing/2014/main" id="{17D9718B-4609-47C6-84E1-77D82C7A05A0}"/>
-              </a:ext>
-            </a:extLst>
-          </p:cNvPr>
-          <p:cNvPicPr>
-            <a:picLocks noChangeAspect="1"/>
-          </p:cNvPicPr>
-          <p:nvPr/>
-        </p:nvPicPr>
-        <p:blipFill>
-          <a:blip r:embed="rId2">
-            <a:extLst>
-              <a:ext uri="{28A0092B-C50C-407E-A947-70E740481C1C}">
-                <a14:useLocalDpi xmlns:a14="http://schemas.microsoft.com/office/drawing/2010/main" val="0"/>
-              </a:ext>
-            </a:extLst>
-          </a:blip>
-          <a:stretch>
-            <a:fillRect/>
-          </a:stretch>
-        </p:blipFill>
-        <p:spPr>
-          <a:xfrm>
-            <a:off x="2774774" y="2956560"/>
-            <a:ext cx="662178" cy="662178"/>
-          </a:xfrm>
-          <a:prstGeom prst="rect">
-            <a:avLst/>
-          </a:prstGeom>
-        </p:spPr>
-      </p:pic>
       <p:sp>
         <p:nvSpPr>
-          <p:cNvPr id="13" name="ZoneTexte 12">
-            <a:extLst>
-              <a:ext uri="{FF2B5EF4-FFF2-40B4-BE49-F238E27FC236}">
-                <a16:creationId xmlns:a16="http://schemas.microsoft.com/office/drawing/2014/main" id="{178BD5CE-7758-47E0-9D02-343BA1038834}"/>
-              </a:ext>
-            </a:extLst>
-          </p:cNvPr>
-          <p:cNvSpPr txBox="1"/>
+          <p:cNvPr id="10" name="Interdiction 9">
+            <a:extLst>
+              <a:ext uri="{FF2B5EF4-FFF2-40B4-BE49-F238E27FC236}">
+                <a16:creationId xmlns:a16="http://schemas.microsoft.com/office/drawing/2014/main" id="{29B0F7BD-2C56-402E-B998-F24A338564E5}"/>
+              </a:ext>
+            </a:extLst>
+          </p:cNvPr>
+          <p:cNvSpPr/>
           <p:nvPr/>
         </p:nvSpPr>
         <p:spPr>
           <a:xfrm>
-            <a:off x="2502359" y="2802671"/>
-            <a:ext cx="1207008" cy="307777"/>
-          </a:xfrm>
-          <a:prstGeom prst="rect">
-            <a:avLst/>
-          </a:prstGeom>
-          <a:noFill/>
-        </p:spPr>
-        <p:txBody>
-          <a:bodyPr wrap="square" rtlCol="0">
-            <a:spAutoFit/>
-          </a:bodyPr>
-          <a:lstStyle/>
-          <a:p>
-            <a:pPr algn="ctr"/>
-            <a:r>
-              <a:rPr lang="fr-CA" sz="1400" b="1" dirty="0">
-                <a:solidFill>
-                  <a:srgbClr val="9073D1"/>
-                </a:solidFill>
-              </a:rPr>
-              <a:t>Nom_projet</a:t>
-            </a:r>
-          </a:p>
-        </p:txBody>
-      </p:sp>
-      <p:pic>
-        <p:nvPicPr>
-          <p:cNvPr id="14" name="Image 13">
-            <a:extLst>
-              <a:ext uri="{FF2B5EF4-FFF2-40B4-BE49-F238E27FC236}">
-                <a16:creationId xmlns:a16="http://schemas.microsoft.com/office/drawing/2014/main" id="{768B6B21-526E-4626-9863-D7CCF7895BD1}"/>
-              </a:ext>
-            </a:extLst>
-          </p:cNvPr>
-          <p:cNvPicPr>
-            <a:picLocks noChangeAspect="1"/>
-          </p:cNvPicPr>
-          <p:nvPr/>
-        </p:nvPicPr>
-        <p:blipFill>
-          <a:blip r:embed="rId2">
-            <a:extLst>
-              <a:ext uri="{28A0092B-C50C-407E-A947-70E740481C1C}">
-                <a14:useLocalDpi xmlns:a14="http://schemas.microsoft.com/office/drawing/2010/main" val="0"/>
-              </a:ext>
-            </a:extLst>
-          </a:blip>
-          <a:stretch>
-            <a:fillRect/>
-          </a:stretch>
-        </p:blipFill>
-        <p:spPr>
-          <a:xfrm>
-            <a:off x="350676" y="4234167"/>
-            <a:ext cx="662178" cy="662178"/>
-          </a:xfrm>
-          <a:prstGeom prst="rect">
-            <a:avLst/>
-          </a:prstGeom>
-        </p:spPr>
-      </p:pic>
-      <p:sp>
-        <p:nvSpPr>
-          <p:cNvPr id="15" name="ZoneTexte 14">
-            <a:extLst>
-              <a:ext uri="{FF2B5EF4-FFF2-40B4-BE49-F238E27FC236}">
-                <a16:creationId xmlns:a16="http://schemas.microsoft.com/office/drawing/2014/main" id="{84B45299-209C-46F0-925B-C65039E835C8}"/>
-              </a:ext>
-            </a:extLst>
-          </p:cNvPr>
-          <p:cNvSpPr txBox="1"/>
-          <p:nvPr/>
-        </p:nvSpPr>
-        <p:spPr>
-          <a:xfrm>
-            <a:off x="78261" y="4080278"/>
-            <a:ext cx="1207008" cy="307777"/>
-          </a:xfrm>
-          <a:prstGeom prst="rect">
-            <a:avLst/>
-          </a:prstGeom>
-          <a:noFill/>
-        </p:spPr>
-        <p:txBody>
-          <a:bodyPr wrap="square" rtlCol="0">
-            <a:spAutoFit/>
-          </a:bodyPr>
-          <a:lstStyle/>
-          <a:p>
-            <a:pPr algn="ctr"/>
-            <a:r>
-              <a:rPr lang="fr-CA" sz="1400" b="1" dirty="0">
-                <a:solidFill>
-                  <a:srgbClr val="9073D1"/>
-                </a:solidFill>
-              </a:rPr>
-              <a:t>css</a:t>
-            </a:r>
-          </a:p>
-        </p:txBody>
-      </p:sp>
-      <p:pic>
-        <p:nvPicPr>
-          <p:cNvPr id="16" name="Image 15">
-            <a:extLst>
-              <a:ext uri="{FF2B5EF4-FFF2-40B4-BE49-F238E27FC236}">
-                <a16:creationId xmlns:a16="http://schemas.microsoft.com/office/drawing/2014/main" id="{C75D8252-9881-44E7-B7F4-523B7CDE335F}"/>
-              </a:ext>
-            </a:extLst>
-          </p:cNvPr>
-          <p:cNvPicPr>
-            <a:picLocks noChangeAspect="1"/>
-          </p:cNvPicPr>
-          <p:nvPr/>
-        </p:nvPicPr>
-        <p:blipFill>
-          <a:blip r:embed="rId2">
-            <a:extLst>
-              <a:ext uri="{28A0092B-C50C-407E-A947-70E740481C1C}">
-                <a14:useLocalDpi xmlns:a14="http://schemas.microsoft.com/office/drawing/2010/main" val="0"/>
-              </a:ext>
-            </a:extLst>
-          </a:blip>
-          <a:stretch>
-            <a:fillRect/>
-          </a:stretch>
-        </p:blipFill>
-        <p:spPr>
-          <a:xfrm>
-            <a:off x="1285269" y="4234167"/>
-            <a:ext cx="662178" cy="662178"/>
-          </a:xfrm>
-          <a:prstGeom prst="rect">
-            <a:avLst/>
-          </a:prstGeom>
-        </p:spPr>
-      </p:pic>
-      <p:sp>
-        <p:nvSpPr>
-          <p:cNvPr id="17" name="ZoneTexte 16">
-            <a:extLst>
-              <a:ext uri="{FF2B5EF4-FFF2-40B4-BE49-F238E27FC236}">
-                <a16:creationId xmlns:a16="http://schemas.microsoft.com/office/drawing/2014/main" id="{A845DAC1-A8DB-4035-908F-A65B55E3B01A}"/>
-              </a:ext>
-            </a:extLst>
-          </p:cNvPr>
-          <p:cNvSpPr txBox="1"/>
-          <p:nvPr/>
-        </p:nvSpPr>
-        <p:spPr>
-          <a:xfrm>
-            <a:off x="1012854" y="4080278"/>
-            <a:ext cx="1207008" cy="307777"/>
-          </a:xfrm>
-          <a:prstGeom prst="rect">
-            <a:avLst/>
-          </a:prstGeom>
-          <a:noFill/>
-        </p:spPr>
-        <p:txBody>
-          <a:bodyPr wrap="square" rtlCol="0">
-            <a:spAutoFit/>
-          </a:bodyPr>
-          <a:lstStyle/>
-          <a:p>
-            <a:pPr algn="ctr"/>
-            <a:r>
-              <a:rPr lang="fr-CA" sz="1400" b="1" dirty="0">
-                <a:solidFill>
-                  <a:srgbClr val="9073D1"/>
-                </a:solidFill>
-              </a:rPr>
-              <a:t>js</a:t>
-            </a:r>
-          </a:p>
-        </p:txBody>
-      </p:sp>
-      <p:pic>
-        <p:nvPicPr>
-          <p:cNvPr id="18" name="Image 17">
-            <a:extLst>
-              <a:ext uri="{FF2B5EF4-FFF2-40B4-BE49-F238E27FC236}">
-                <a16:creationId xmlns:a16="http://schemas.microsoft.com/office/drawing/2014/main" id="{2321D1AE-1435-4689-9E83-6891E192BBB1}"/>
-              </a:ext>
-            </a:extLst>
-          </p:cNvPr>
-          <p:cNvPicPr>
-            <a:picLocks noChangeAspect="1"/>
-          </p:cNvPicPr>
-          <p:nvPr/>
-        </p:nvPicPr>
-        <p:blipFill>
-          <a:blip r:embed="rId2">
-            <a:extLst>
-              <a:ext uri="{28A0092B-C50C-407E-A947-70E740481C1C}">
-                <a14:useLocalDpi xmlns:a14="http://schemas.microsoft.com/office/drawing/2010/main" val="0"/>
-              </a:ext>
-            </a:extLst>
-          </a:blip>
-          <a:stretch>
-            <a:fillRect/>
-          </a:stretch>
-        </p:blipFill>
-        <p:spPr>
-          <a:xfrm>
-            <a:off x="2219862" y="4251657"/>
-            <a:ext cx="662178" cy="662178"/>
-          </a:xfrm>
-          <a:prstGeom prst="rect">
-            <a:avLst/>
-          </a:prstGeom>
-        </p:spPr>
-      </p:pic>
-      <p:sp>
-        <p:nvSpPr>
-          <p:cNvPr id="19" name="ZoneTexte 18">
-            <a:extLst>
-              <a:ext uri="{FF2B5EF4-FFF2-40B4-BE49-F238E27FC236}">
-                <a16:creationId xmlns:a16="http://schemas.microsoft.com/office/drawing/2014/main" id="{052FB71C-A1D0-4719-8852-37725EC22D14}"/>
-              </a:ext>
-            </a:extLst>
-          </p:cNvPr>
-          <p:cNvSpPr txBox="1"/>
-          <p:nvPr/>
-        </p:nvSpPr>
-        <p:spPr>
-          <a:xfrm>
-            <a:off x="1947447" y="4097768"/>
-            <a:ext cx="1207008" cy="307777"/>
-          </a:xfrm>
-          <a:prstGeom prst="rect">
-            <a:avLst/>
-          </a:prstGeom>
-          <a:noFill/>
-        </p:spPr>
-        <p:txBody>
-          <a:bodyPr wrap="square" rtlCol="0">
-            <a:spAutoFit/>
-          </a:bodyPr>
-          <a:lstStyle/>
-          <a:p>
-            <a:pPr algn="ctr"/>
-            <a:r>
-              <a:rPr lang="fr-CA" sz="1400" b="1" dirty="0">
-                <a:solidFill>
-                  <a:srgbClr val="9073D1"/>
-                </a:solidFill>
-              </a:rPr>
-              <a:t>images</a:t>
-            </a:r>
-          </a:p>
-        </p:txBody>
-      </p:sp>
-      <p:pic>
-        <p:nvPicPr>
-          <p:cNvPr id="20" name="Image 19">
-            <a:extLst>
-              <a:ext uri="{FF2B5EF4-FFF2-40B4-BE49-F238E27FC236}">
-                <a16:creationId xmlns:a16="http://schemas.microsoft.com/office/drawing/2014/main" id="{1C16DA1D-EF4A-4D0E-B5B6-91D881D5D5F8}"/>
-              </a:ext>
-            </a:extLst>
-          </p:cNvPr>
-          <p:cNvPicPr>
-            <a:picLocks noChangeAspect="1"/>
-          </p:cNvPicPr>
-          <p:nvPr/>
-        </p:nvPicPr>
-        <p:blipFill>
-          <a:blip r:embed="rId3">
-            <a:extLst>
-              <a:ext uri="{28A0092B-C50C-407E-A947-70E740481C1C}">
-                <a14:useLocalDpi xmlns:a14="http://schemas.microsoft.com/office/drawing/2010/main" val="0"/>
-              </a:ext>
-            </a:extLst>
-          </a:blip>
-          <a:stretch>
-            <a:fillRect/>
-          </a:stretch>
-        </p:blipFill>
-        <p:spPr>
-          <a:xfrm>
-            <a:off x="3855849" y="4340424"/>
-            <a:ext cx="525307" cy="525307"/>
-          </a:xfrm>
-          <a:prstGeom prst="rect">
-            <a:avLst/>
-          </a:prstGeom>
-        </p:spPr>
-      </p:pic>
-      <p:sp>
-        <p:nvSpPr>
-          <p:cNvPr id="21" name="ZoneTexte 20">
-            <a:extLst>
-              <a:ext uri="{FF2B5EF4-FFF2-40B4-BE49-F238E27FC236}">
-                <a16:creationId xmlns:a16="http://schemas.microsoft.com/office/drawing/2014/main" id="{3AEBE190-10F0-4CF3-AB01-ABBE0949F9EF}"/>
-              </a:ext>
-            </a:extLst>
-          </p:cNvPr>
-          <p:cNvSpPr txBox="1"/>
-          <p:nvPr/>
-        </p:nvSpPr>
-        <p:spPr>
-          <a:xfrm>
-            <a:off x="3481736" y="4091671"/>
-            <a:ext cx="1207008" cy="276999"/>
-          </a:xfrm>
-          <a:prstGeom prst="rect">
-            <a:avLst/>
-          </a:prstGeom>
-          <a:noFill/>
-        </p:spPr>
-        <p:txBody>
-          <a:bodyPr wrap="square" rtlCol="0">
-            <a:spAutoFit/>
-          </a:bodyPr>
-          <a:lstStyle/>
-          <a:p>
-            <a:pPr algn="ctr"/>
-            <a:r>
-              <a:rPr lang="fr-CA" sz="1200" b="1" dirty="0">
-                <a:solidFill>
-                  <a:srgbClr val="9073D1"/>
-                </a:solidFill>
-              </a:rPr>
-              <a:t>index.html</a:t>
-            </a:r>
-          </a:p>
-        </p:txBody>
-      </p:sp>
-      <p:pic>
-        <p:nvPicPr>
-          <p:cNvPr id="22" name="Image 21">
-            <a:extLst>
-              <a:ext uri="{FF2B5EF4-FFF2-40B4-BE49-F238E27FC236}">
-                <a16:creationId xmlns:a16="http://schemas.microsoft.com/office/drawing/2014/main" id="{0F285423-05A5-40F0-8B7B-ACABEDF5343A}"/>
-              </a:ext>
-            </a:extLst>
-          </p:cNvPr>
-          <p:cNvPicPr>
-            <a:picLocks noChangeAspect="1"/>
-          </p:cNvPicPr>
-          <p:nvPr/>
-        </p:nvPicPr>
-        <p:blipFill>
-          <a:blip r:embed="rId3">
-            <a:extLst>
-              <a:ext uri="{28A0092B-C50C-407E-A947-70E740481C1C}">
-                <a14:useLocalDpi xmlns:a14="http://schemas.microsoft.com/office/drawing/2010/main" val="0"/>
-              </a:ext>
-            </a:extLst>
-          </a:blip>
-          <a:stretch>
-            <a:fillRect/>
-          </a:stretch>
-        </p:blipFill>
-        <p:spPr>
-          <a:xfrm>
-            <a:off x="4800203" y="4340423"/>
-            <a:ext cx="525307" cy="525307"/>
-          </a:xfrm>
-          <a:prstGeom prst="rect">
-            <a:avLst/>
-          </a:prstGeom>
-        </p:spPr>
-      </p:pic>
-      <p:sp>
-        <p:nvSpPr>
-          <p:cNvPr id="23" name="ZoneTexte 22">
-            <a:extLst>
-              <a:ext uri="{FF2B5EF4-FFF2-40B4-BE49-F238E27FC236}">
-                <a16:creationId xmlns:a16="http://schemas.microsoft.com/office/drawing/2014/main" id="{3C2FA4A3-6A32-4F4E-A1E3-3157A341F676}"/>
-              </a:ext>
-            </a:extLst>
-          </p:cNvPr>
-          <p:cNvSpPr txBox="1"/>
-          <p:nvPr/>
-        </p:nvSpPr>
-        <p:spPr>
-          <a:xfrm>
-            <a:off x="4455579" y="4091670"/>
-            <a:ext cx="1207008" cy="276999"/>
-          </a:xfrm>
-          <a:prstGeom prst="rect">
-            <a:avLst/>
-          </a:prstGeom>
-          <a:noFill/>
-        </p:spPr>
-        <p:txBody>
-          <a:bodyPr wrap="square" rtlCol="0">
-            <a:spAutoFit/>
-          </a:bodyPr>
-          <a:lstStyle/>
-          <a:p>
-            <a:pPr algn="ctr"/>
-            <a:r>
-              <a:rPr lang="fr-CA" sz="1200" b="1" dirty="0">
-                <a:solidFill>
-                  <a:srgbClr val="9073D1"/>
-                </a:solidFill>
-              </a:rPr>
-              <a:t>apropos.html</a:t>
-            </a:r>
-          </a:p>
-        </p:txBody>
-      </p:sp>
-      <p:cxnSp>
-        <p:nvCxnSpPr>
-          <p:cNvPr id="26" name="Connecteur : en angle 25">
-            <a:extLst>
-              <a:ext uri="{FF2B5EF4-FFF2-40B4-BE49-F238E27FC236}">
-                <a16:creationId xmlns:a16="http://schemas.microsoft.com/office/drawing/2014/main" id="{C38DC1EC-7D13-47C0-B9D8-B7A774459F05}"/>
-              </a:ext>
-            </a:extLst>
-          </p:cNvPr>
-          <p:cNvCxnSpPr>
-            <a:stCxn id="12" idx="2"/>
-            <a:endCxn id="19" idx="0"/>
-          </p:cNvCxnSpPr>
-          <p:nvPr/>
-        </p:nvCxnSpPr>
-        <p:spPr>
-          <a:xfrm rot="5400000">
-            <a:off x="2588892" y="3580797"/>
-            <a:ext cx="479030" cy="554912"/>
-          </a:xfrm>
-          <a:prstGeom prst="bentConnector3">
-            <a:avLst/>
-          </a:prstGeom>
-          <a:ln w="38100">
-            <a:solidFill>
-              <a:srgbClr val="9073D1"/>
-            </a:solidFill>
-            <a:tailEnd type="triangle"/>
-          </a:ln>
-        </p:spPr>
-        <p:style>
-          <a:lnRef idx="1">
-            <a:schemeClr val="accent1"/>
-          </a:lnRef>
-          <a:fillRef idx="0">
-            <a:schemeClr val="accent1"/>
-          </a:fillRef>
-          <a:effectRef idx="0">
-            <a:schemeClr val="accent1"/>
-          </a:effectRef>
-          <a:fontRef idx="minor">
-            <a:schemeClr val="tx1"/>
-          </a:fontRef>
-        </p:style>
-      </p:cxnSp>
-      <p:cxnSp>
-        <p:nvCxnSpPr>
-          <p:cNvPr id="27" name="Connecteur : en angle 26">
-            <a:extLst>
-              <a:ext uri="{FF2B5EF4-FFF2-40B4-BE49-F238E27FC236}">
-                <a16:creationId xmlns:a16="http://schemas.microsoft.com/office/drawing/2014/main" id="{85E57858-6819-45E0-9CC2-6BE66C23C196}"/>
-              </a:ext>
-            </a:extLst>
-          </p:cNvPr>
-          <p:cNvCxnSpPr>
-            <a:cxnSpLocks/>
-            <a:stCxn id="12" idx="2"/>
-            <a:endCxn id="17" idx="0"/>
-          </p:cNvCxnSpPr>
-          <p:nvPr/>
-        </p:nvCxnSpPr>
-        <p:spPr>
-          <a:xfrm rot="5400000">
-            <a:off x="2130341" y="3104756"/>
-            <a:ext cx="461540" cy="1489505"/>
-          </a:xfrm>
-          <a:prstGeom prst="bentConnector3">
-            <a:avLst>
-              <a:gd name="adj1" fmla="val 50000"/>
-            </a:avLst>
-          </a:prstGeom>
-          <a:ln w="38100">
-            <a:solidFill>
-              <a:srgbClr val="9073D1"/>
-            </a:solidFill>
-            <a:tailEnd type="triangle"/>
-          </a:ln>
-        </p:spPr>
-        <p:style>
-          <a:lnRef idx="1">
-            <a:schemeClr val="accent1"/>
-          </a:lnRef>
-          <a:fillRef idx="0">
-            <a:schemeClr val="accent1"/>
-          </a:fillRef>
-          <a:effectRef idx="0">
-            <a:schemeClr val="accent1"/>
-          </a:effectRef>
-          <a:fontRef idx="minor">
-            <a:schemeClr val="tx1"/>
-          </a:fontRef>
-        </p:style>
-      </p:cxnSp>
-      <p:cxnSp>
-        <p:nvCxnSpPr>
-          <p:cNvPr id="28" name="Connecteur : en angle 27">
-            <a:extLst>
-              <a:ext uri="{FF2B5EF4-FFF2-40B4-BE49-F238E27FC236}">
-                <a16:creationId xmlns:a16="http://schemas.microsoft.com/office/drawing/2014/main" id="{BBE929E6-7B9E-4A7A-BD64-394245A3D960}"/>
-              </a:ext>
-            </a:extLst>
-          </p:cNvPr>
-          <p:cNvCxnSpPr>
-            <a:cxnSpLocks/>
-            <a:stCxn id="12" idx="2"/>
-            <a:endCxn id="15" idx="0"/>
-          </p:cNvCxnSpPr>
-          <p:nvPr/>
-        </p:nvCxnSpPr>
-        <p:spPr>
-          <a:xfrm rot="5400000">
-            <a:off x="1663044" y="2637459"/>
-            <a:ext cx="461540" cy="2424098"/>
-          </a:xfrm>
-          <a:prstGeom prst="bentConnector3">
-            <a:avLst>
-              <a:gd name="adj1" fmla="val 50000"/>
-            </a:avLst>
-          </a:prstGeom>
-          <a:ln w="38100">
-            <a:solidFill>
-              <a:srgbClr val="9073D1"/>
-            </a:solidFill>
-            <a:tailEnd type="triangle"/>
-          </a:ln>
-        </p:spPr>
-        <p:style>
-          <a:lnRef idx="1">
-            <a:schemeClr val="accent1"/>
-          </a:lnRef>
-          <a:fillRef idx="0">
-            <a:schemeClr val="accent1"/>
-          </a:fillRef>
-          <a:effectRef idx="0">
-            <a:schemeClr val="accent1"/>
-          </a:effectRef>
-          <a:fontRef idx="minor">
-            <a:schemeClr val="tx1"/>
-          </a:fontRef>
-        </p:style>
-      </p:cxnSp>
-      <p:cxnSp>
-        <p:nvCxnSpPr>
-          <p:cNvPr id="29" name="Connecteur : en angle 28">
-            <a:extLst>
-              <a:ext uri="{FF2B5EF4-FFF2-40B4-BE49-F238E27FC236}">
-                <a16:creationId xmlns:a16="http://schemas.microsoft.com/office/drawing/2014/main" id="{5AD840B3-0896-4F8B-80AB-08AA5BDC3896}"/>
-              </a:ext>
-            </a:extLst>
-          </p:cNvPr>
-          <p:cNvCxnSpPr>
-            <a:cxnSpLocks/>
-            <a:stCxn id="12" idx="2"/>
-            <a:endCxn id="21" idx="0"/>
-          </p:cNvCxnSpPr>
-          <p:nvPr/>
-        </p:nvCxnSpPr>
-        <p:spPr>
-          <a:xfrm rot="16200000" flipH="1">
-            <a:off x="3359085" y="3365515"/>
-            <a:ext cx="472933" cy="979377"/>
-          </a:xfrm>
-          <a:prstGeom prst="bentConnector3">
-            <a:avLst>
-              <a:gd name="adj1" fmla="val 50000"/>
-            </a:avLst>
-          </a:prstGeom>
-          <a:ln w="38100">
-            <a:solidFill>
-              <a:srgbClr val="9073D1"/>
-            </a:solidFill>
-            <a:tailEnd type="triangle"/>
-          </a:ln>
-        </p:spPr>
-        <p:style>
-          <a:lnRef idx="1">
-            <a:schemeClr val="accent1"/>
-          </a:lnRef>
-          <a:fillRef idx="0">
-            <a:schemeClr val="accent1"/>
-          </a:fillRef>
-          <a:effectRef idx="0">
-            <a:schemeClr val="accent1"/>
-          </a:effectRef>
-          <a:fontRef idx="minor">
-            <a:schemeClr val="tx1"/>
-          </a:fontRef>
-        </p:style>
-      </p:cxnSp>
-      <p:cxnSp>
-        <p:nvCxnSpPr>
-          <p:cNvPr id="30" name="Connecteur : en angle 29">
-            <a:extLst>
-              <a:ext uri="{FF2B5EF4-FFF2-40B4-BE49-F238E27FC236}">
-                <a16:creationId xmlns:a16="http://schemas.microsoft.com/office/drawing/2014/main" id="{FC42DE8A-3AE0-4CB4-A5CD-DD51F3839C4E}"/>
-              </a:ext>
-            </a:extLst>
-          </p:cNvPr>
-          <p:cNvCxnSpPr>
-            <a:cxnSpLocks/>
-            <a:stCxn id="12" idx="2"/>
-            <a:endCxn id="23" idx="0"/>
-          </p:cNvCxnSpPr>
-          <p:nvPr/>
-        </p:nvCxnSpPr>
-        <p:spPr>
-          <a:xfrm rot="16200000" flipH="1">
-            <a:off x="3846007" y="2878594"/>
-            <a:ext cx="472932" cy="1953220"/>
-          </a:xfrm>
-          <a:prstGeom prst="bentConnector3">
-            <a:avLst>
-              <a:gd name="adj1" fmla="val 50000"/>
-            </a:avLst>
-          </a:prstGeom>
-          <a:ln w="38100">
-            <a:solidFill>
-              <a:srgbClr val="9073D1"/>
-            </a:solidFill>
-            <a:tailEnd type="triangle"/>
-          </a:ln>
-        </p:spPr>
-        <p:style>
-          <a:lnRef idx="1">
-            <a:schemeClr val="accent1"/>
-          </a:lnRef>
-          <a:fillRef idx="0">
-            <a:schemeClr val="accent1"/>
-          </a:fillRef>
-          <a:effectRef idx="0">
-            <a:schemeClr val="accent1"/>
-          </a:effectRef>
-          <a:fontRef idx="minor">
-            <a:schemeClr val="tx1"/>
-          </a:fontRef>
-        </p:style>
-      </p:cxnSp>
-      <p:pic>
-        <p:nvPicPr>
-          <p:cNvPr id="36" name="Image 35">
-            <a:extLst>
-              <a:ext uri="{FF2B5EF4-FFF2-40B4-BE49-F238E27FC236}">
-                <a16:creationId xmlns:a16="http://schemas.microsoft.com/office/drawing/2014/main" id="{E3069D24-74AE-453A-839D-B896414B91DC}"/>
-              </a:ext>
-            </a:extLst>
-          </p:cNvPr>
-          <p:cNvPicPr>
-            <a:picLocks noChangeAspect="1"/>
-          </p:cNvPicPr>
-          <p:nvPr/>
-        </p:nvPicPr>
-        <p:blipFill>
-          <a:blip r:embed="rId3">
-            <a:extLst>
-              <a:ext uri="{28A0092B-C50C-407E-A947-70E740481C1C}">
-                <a14:useLocalDpi xmlns:a14="http://schemas.microsoft.com/office/drawing/2010/main" val="0"/>
-              </a:ext>
-            </a:extLst>
-          </a:blip>
-          <a:stretch>
-            <a:fillRect/>
-          </a:stretch>
-        </p:blipFill>
-        <p:spPr>
-          <a:xfrm>
-            <a:off x="1034282" y="5744590"/>
-            <a:ext cx="525307" cy="525307"/>
-          </a:xfrm>
-          <a:prstGeom prst="rect">
-            <a:avLst/>
-          </a:prstGeom>
-        </p:spPr>
-      </p:pic>
-      <p:sp>
-        <p:nvSpPr>
-          <p:cNvPr id="37" name="ZoneTexte 36">
-            <a:extLst>
-              <a:ext uri="{FF2B5EF4-FFF2-40B4-BE49-F238E27FC236}">
-                <a16:creationId xmlns:a16="http://schemas.microsoft.com/office/drawing/2014/main" id="{8C921A66-43B2-47B0-8951-1F51387EF27E}"/>
-              </a:ext>
-            </a:extLst>
-          </p:cNvPr>
-          <p:cNvSpPr txBox="1"/>
-          <p:nvPr/>
-        </p:nvSpPr>
-        <p:spPr>
-          <a:xfrm>
-            <a:off x="693432" y="5499847"/>
-            <a:ext cx="1207008" cy="276999"/>
-          </a:xfrm>
-          <a:prstGeom prst="rect">
-            <a:avLst/>
-          </a:prstGeom>
-          <a:noFill/>
-        </p:spPr>
-        <p:txBody>
-          <a:bodyPr wrap="square" rtlCol="0">
-            <a:spAutoFit/>
-          </a:bodyPr>
-          <a:lstStyle/>
-          <a:p>
-            <a:pPr algn="ctr"/>
-            <a:r>
-              <a:rPr lang="fr-CA" sz="1200" b="1" dirty="0">
-                <a:solidFill>
-                  <a:srgbClr val="9073D1"/>
-                </a:solidFill>
-              </a:rPr>
-              <a:t>script.js</a:t>
-            </a:r>
-          </a:p>
-        </p:txBody>
-      </p:sp>
-      <p:pic>
-        <p:nvPicPr>
-          <p:cNvPr id="38" name="Image 37">
-            <a:extLst>
-              <a:ext uri="{FF2B5EF4-FFF2-40B4-BE49-F238E27FC236}">
-                <a16:creationId xmlns:a16="http://schemas.microsoft.com/office/drawing/2014/main" id="{07C1C23A-5A8D-4F21-A6A4-E66C2B909568}"/>
-              </a:ext>
-            </a:extLst>
-          </p:cNvPr>
-          <p:cNvPicPr>
-            <a:picLocks noChangeAspect="1"/>
-          </p:cNvPicPr>
-          <p:nvPr/>
-        </p:nvPicPr>
-        <p:blipFill>
-          <a:blip r:embed="rId3">
-            <a:extLst>
-              <a:ext uri="{28A0092B-C50C-407E-A947-70E740481C1C}">
-                <a14:useLocalDpi xmlns:a14="http://schemas.microsoft.com/office/drawing/2010/main" val="0"/>
-              </a:ext>
-            </a:extLst>
-          </a:blip>
-          <a:stretch>
-            <a:fillRect/>
-          </a:stretch>
-        </p:blipFill>
-        <p:spPr>
-          <a:xfrm>
-            <a:off x="1976287" y="5748600"/>
-            <a:ext cx="525307" cy="525307"/>
-          </a:xfrm>
-          <a:prstGeom prst="rect">
-            <a:avLst/>
-          </a:prstGeom>
-        </p:spPr>
-      </p:pic>
-      <p:sp>
-        <p:nvSpPr>
-          <p:cNvPr id="39" name="ZoneTexte 38">
-            <a:extLst>
-              <a:ext uri="{FF2B5EF4-FFF2-40B4-BE49-F238E27FC236}">
-                <a16:creationId xmlns:a16="http://schemas.microsoft.com/office/drawing/2014/main" id="{3FBC99F5-1A67-4FB4-BA36-222010F9AA88}"/>
-              </a:ext>
-            </a:extLst>
-          </p:cNvPr>
-          <p:cNvSpPr txBox="1"/>
-          <p:nvPr/>
-        </p:nvSpPr>
-        <p:spPr>
-          <a:xfrm>
-            <a:off x="1644846" y="5499847"/>
-            <a:ext cx="1207008" cy="276999"/>
-          </a:xfrm>
-          <a:prstGeom prst="rect">
-            <a:avLst/>
-          </a:prstGeom>
-          <a:noFill/>
-        </p:spPr>
-        <p:txBody>
-          <a:bodyPr wrap="square" rtlCol="0">
-            <a:spAutoFit/>
-          </a:bodyPr>
-          <a:lstStyle/>
-          <a:p>
-            <a:pPr algn="ctr"/>
-            <a:r>
-              <a:rPr lang="fr-CA" sz="1200" b="1" dirty="0">
-                <a:solidFill>
-                  <a:srgbClr val="9073D1"/>
-                </a:solidFill>
-              </a:rPr>
-              <a:t>widget.js</a:t>
-            </a:r>
-          </a:p>
-        </p:txBody>
-      </p:sp>
-      <p:cxnSp>
-        <p:nvCxnSpPr>
-          <p:cNvPr id="46" name="Connecteur : en angle 45">
-            <a:extLst>
-              <a:ext uri="{FF2B5EF4-FFF2-40B4-BE49-F238E27FC236}">
-                <a16:creationId xmlns:a16="http://schemas.microsoft.com/office/drawing/2014/main" id="{0311F53B-7D9B-4483-9215-28F7790BA290}"/>
-              </a:ext>
-            </a:extLst>
-          </p:cNvPr>
-          <p:cNvCxnSpPr>
-            <a:cxnSpLocks/>
-            <a:stCxn id="16" idx="2"/>
-            <a:endCxn id="37" idx="0"/>
-          </p:cNvCxnSpPr>
-          <p:nvPr/>
-        </p:nvCxnSpPr>
-        <p:spPr>
-          <a:xfrm rot="5400000">
-            <a:off x="1154896" y="5038385"/>
-            <a:ext cx="603502" cy="319422"/>
-          </a:xfrm>
-          <a:prstGeom prst="bentConnector3">
-            <a:avLst>
-              <a:gd name="adj1" fmla="val 50000"/>
-            </a:avLst>
-          </a:prstGeom>
-          <a:ln w="38100">
-            <a:solidFill>
-              <a:srgbClr val="9073D1"/>
-            </a:solidFill>
-            <a:tailEnd type="triangle"/>
-          </a:ln>
-        </p:spPr>
-        <p:style>
-          <a:lnRef idx="1">
-            <a:schemeClr val="accent1"/>
-          </a:lnRef>
-          <a:fillRef idx="0">
-            <a:schemeClr val="accent1"/>
-          </a:fillRef>
-          <a:effectRef idx="0">
-            <a:schemeClr val="accent1"/>
-          </a:effectRef>
-          <a:fontRef idx="minor">
-            <a:schemeClr val="tx1"/>
-          </a:fontRef>
-        </p:style>
-      </p:cxnSp>
-      <p:cxnSp>
-        <p:nvCxnSpPr>
-          <p:cNvPr id="47" name="Connecteur : en angle 46">
-            <a:extLst>
-              <a:ext uri="{FF2B5EF4-FFF2-40B4-BE49-F238E27FC236}">
-                <a16:creationId xmlns:a16="http://schemas.microsoft.com/office/drawing/2014/main" id="{0DFA7D3C-5A77-414C-9055-2ABCC4E28D5E}"/>
-              </a:ext>
-            </a:extLst>
-          </p:cNvPr>
-          <p:cNvCxnSpPr>
-            <a:cxnSpLocks/>
-            <a:stCxn id="16" idx="2"/>
-            <a:endCxn id="39" idx="0"/>
-          </p:cNvCxnSpPr>
-          <p:nvPr/>
-        </p:nvCxnSpPr>
-        <p:spPr>
-          <a:xfrm rot="16200000" flipH="1">
-            <a:off x="1630603" y="4882100"/>
-            <a:ext cx="603502" cy="631992"/>
-          </a:xfrm>
-          <a:prstGeom prst="bentConnector3">
-            <a:avLst>
-              <a:gd name="adj1" fmla="val 50000"/>
-            </a:avLst>
-          </a:prstGeom>
-          <a:ln w="38100">
-            <a:solidFill>
-              <a:srgbClr val="9073D1"/>
-            </a:solidFill>
-            <a:tailEnd type="triangle"/>
-          </a:ln>
-        </p:spPr>
-        <p:style>
-          <a:lnRef idx="1">
-            <a:schemeClr val="accent1"/>
-          </a:lnRef>
-          <a:fillRef idx="0">
-            <a:schemeClr val="accent1"/>
-          </a:fillRef>
-          <a:effectRef idx="0">
-            <a:schemeClr val="accent1"/>
-          </a:effectRef>
-          <a:fontRef idx="minor">
-            <a:schemeClr val="tx1"/>
-          </a:fontRef>
-        </p:style>
-      </p:cxnSp>
-      <p:sp>
-        <p:nvSpPr>
-          <p:cNvPr id="64" name="ZoneTexte 63">
-            <a:extLst>
-              <a:ext uri="{FF2B5EF4-FFF2-40B4-BE49-F238E27FC236}">
-                <a16:creationId xmlns:a16="http://schemas.microsoft.com/office/drawing/2014/main" id="{D440E40B-6199-4E97-B440-90385508196D}"/>
-              </a:ext>
-            </a:extLst>
-          </p:cNvPr>
-          <p:cNvSpPr txBox="1"/>
-          <p:nvPr/>
-        </p:nvSpPr>
-        <p:spPr>
-          <a:xfrm>
-            <a:off x="3059015" y="5670523"/>
-            <a:ext cx="5991439" cy="646331"/>
-          </a:xfrm>
-          <a:prstGeom prst="rect">
-            <a:avLst/>
-          </a:prstGeom>
-          <a:noFill/>
-        </p:spPr>
-        <p:txBody>
-          <a:bodyPr wrap="square" rtlCol="0">
-            <a:spAutoFit/>
-          </a:bodyPr>
-          <a:lstStyle/>
-          <a:p>
-            <a:r>
-              <a:rPr lang="fr-CA" dirty="0">
-                <a:solidFill>
-                  <a:srgbClr val="9073D1"/>
-                </a:solidFill>
-              </a:rPr>
-              <a:t>Par exemple, les fichiers </a:t>
-            </a:r>
-            <a:r>
-              <a:rPr lang="fr-CA" b="1" dirty="0">
-                <a:solidFill>
-                  <a:srgbClr val="73B3D1"/>
-                </a:solidFill>
-              </a:rPr>
-              <a:t>script.js </a:t>
-            </a:r>
-            <a:r>
-              <a:rPr lang="fr-CA" dirty="0">
-                <a:solidFill>
-                  <a:srgbClr val="9073D1"/>
-                </a:solidFill>
-              </a:rPr>
-              <a:t>et </a:t>
-            </a:r>
-            <a:r>
-              <a:rPr lang="fr-CA" b="1" dirty="0">
-                <a:solidFill>
-                  <a:srgbClr val="73B3D1"/>
-                </a:solidFill>
-              </a:rPr>
-              <a:t>widget.js </a:t>
-            </a:r>
-            <a:r>
-              <a:rPr lang="fr-CA" dirty="0">
-                <a:solidFill>
-                  <a:srgbClr val="9073D1"/>
-                </a:solidFill>
-              </a:rPr>
-              <a:t>pourraient contenir des </a:t>
-            </a:r>
-            <a:r>
-              <a:rPr lang="fr-CA" b="1" dirty="0">
-                <a:solidFill>
-                  <a:srgbClr val="9073D1"/>
-                </a:solidFill>
-              </a:rPr>
-              <a:t>déclarations de fonction </a:t>
-            </a:r>
-            <a:r>
-              <a:rPr lang="fr-CA" dirty="0">
-                <a:solidFill>
-                  <a:srgbClr val="9073D1"/>
-                </a:solidFill>
-              </a:rPr>
-              <a:t>en JavaScript !</a:t>
-            </a:r>
-          </a:p>
-        </p:txBody>
-      </p:sp>
-      <p:sp>
-        <p:nvSpPr>
-          <p:cNvPr id="65" name="Flèche : droite 64">
-            <a:extLst>
-              <a:ext uri="{FF2B5EF4-FFF2-40B4-BE49-F238E27FC236}">
-                <a16:creationId xmlns:a16="http://schemas.microsoft.com/office/drawing/2014/main" id="{93AE889D-1FEE-4494-9B51-7E688836D0AA}"/>
-              </a:ext>
-            </a:extLst>
-          </p:cNvPr>
-          <p:cNvSpPr/>
-          <p:nvPr/>
-        </p:nvSpPr>
-        <p:spPr>
-          <a:xfrm rot="10800000">
-            <a:off x="2702796" y="5744590"/>
-            <a:ext cx="316992" cy="524256"/>
-          </a:xfrm>
-          <a:prstGeom prst="rightArrow">
+            <a:off x="1790858" y="4681178"/>
+            <a:ext cx="635464" cy="635464"/>
+          </a:xfrm>
+          <a:prstGeom prst="noSmoking">
             <a:avLst/>
           </a:prstGeom>
           <a:solidFill>
-            <a:srgbClr val="9073D1"/>
+            <a:srgbClr val="FA4840"/>
           </a:solidFill>
           <a:ln>
             <a:noFill/>
@@ -13664,71 +13323,20 @@
           <a:lstStyle/>
           <a:p>
             <a:pPr algn="ctr"/>
-            <a:endParaRPr lang="fr-CA" dirty="0"/>
-          </a:p>
-        </p:txBody>
-      </p:sp>
-      <p:sp>
-        <p:nvSpPr>
-          <p:cNvPr id="76" name="ZoneTexte 75">
-            <a:extLst>
-              <a:ext uri="{FF2B5EF4-FFF2-40B4-BE49-F238E27FC236}">
-                <a16:creationId xmlns:a16="http://schemas.microsoft.com/office/drawing/2014/main" id="{37938A01-0282-458E-AD0A-8F51FF158FD1}"/>
-              </a:ext>
-            </a:extLst>
-          </p:cNvPr>
-          <p:cNvSpPr txBox="1"/>
-          <p:nvPr/>
-        </p:nvSpPr>
-        <p:spPr>
-          <a:xfrm>
-            <a:off x="5963558" y="4192606"/>
-            <a:ext cx="6059480" cy="646331"/>
-          </a:xfrm>
-          <a:prstGeom prst="rect">
-            <a:avLst/>
-          </a:prstGeom>
-          <a:noFill/>
-        </p:spPr>
-        <p:txBody>
-          <a:bodyPr wrap="square" rtlCol="0">
-            <a:spAutoFit/>
-          </a:bodyPr>
-          <a:lstStyle/>
-          <a:p>
-            <a:r>
-              <a:rPr lang="fr-CA" dirty="0">
-                <a:solidFill>
-                  <a:srgbClr val="9073D1"/>
-                </a:solidFill>
-              </a:rPr>
-              <a:t>Ceci est un aperçu du fichier </a:t>
-            </a:r>
-            <a:r>
-              <a:rPr lang="fr-CA" b="1" dirty="0">
-                <a:solidFill>
-                  <a:srgbClr val="9073D1"/>
-                </a:solidFill>
-              </a:rPr>
-              <a:t>script.js</a:t>
-            </a:r>
-            <a:r>
-              <a:rPr lang="fr-CA" dirty="0">
-                <a:solidFill>
-                  <a:srgbClr val="9073D1"/>
-                </a:solidFill>
-              </a:rPr>
-              <a:t>, qui contient une déclaration de fonction.</a:t>
-            </a:r>
+            <a:endParaRPr lang="fr-CA" dirty="0">
+              <a:solidFill>
+                <a:schemeClr val="tx1"/>
+              </a:solidFill>
+            </a:endParaRPr>
           </a:p>
         </p:txBody>
       </p:sp>
       <p:pic>
         <p:nvPicPr>
-          <p:cNvPr id="4" name="Image 3">
-            <a:extLst>
-              <a:ext uri="{FF2B5EF4-FFF2-40B4-BE49-F238E27FC236}">
-                <a16:creationId xmlns:a16="http://schemas.microsoft.com/office/drawing/2014/main" id="{73CDCD78-4E56-4305-BD62-8C0B8ACA5FC4}"/>
+          <p:cNvPr id="8" name="Image 7">
+            <a:extLst>
+              <a:ext uri="{FF2B5EF4-FFF2-40B4-BE49-F238E27FC236}">
+                <a16:creationId xmlns:a16="http://schemas.microsoft.com/office/drawing/2014/main" id="{15533FC6-A264-476E-9239-29196125A5DD}"/>
               </a:ext>
             </a:extLst>
           </p:cNvPr>
@@ -13738,15 +13346,15 @@
           <p:nvPr/>
         </p:nvPicPr>
         <p:blipFill>
-          <a:blip r:embed="rId4"/>
+          <a:blip r:embed="rId2"/>
           <a:stretch>
             <a:fillRect/>
           </a:stretch>
         </p:blipFill>
         <p:spPr>
           <a:xfrm>
-            <a:off x="5682280" y="2758179"/>
-            <a:ext cx="6040453" cy="1341642"/>
+            <a:off x="2764533" y="2126454"/>
+            <a:ext cx="6662934" cy="843409"/>
           </a:xfrm>
           <a:prstGeom prst="rect">
             <a:avLst/>
@@ -13758,10 +13366,45 @@
           </a:ln>
         </p:spPr>
       </p:pic>
+      <p:pic>
+        <p:nvPicPr>
+          <p:cNvPr id="4" name="Image 3">
+            <a:extLst>
+              <a:ext uri="{FF2B5EF4-FFF2-40B4-BE49-F238E27FC236}">
+                <a16:creationId xmlns:a16="http://schemas.microsoft.com/office/drawing/2014/main" id="{CDE74A8C-5D43-4184-9567-CF8D3C56CA2A}"/>
+              </a:ext>
+            </a:extLst>
+          </p:cNvPr>
+          <p:cNvPicPr>
+            <a:picLocks noChangeAspect="1"/>
+          </p:cNvPicPr>
+          <p:nvPr/>
+        </p:nvPicPr>
+        <p:blipFill>
+          <a:blip r:embed="rId3"/>
+          <a:stretch>
+            <a:fillRect/>
+          </a:stretch>
+        </p:blipFill>
+        <p:spPr>
+          <a:xfrm>
+            <a:off x="2652686" y="3945745"/>
+            <a:ext cx="6883027" cy="2106330"/>
+          </a:xfrm>
+          <a:prstGeom prst="rect">
+            <a:avLst/>
+          </a:prstGeom>
+          <a:ln w="28575">
+            <a:solidFill>
+              <a:srgbClr val="9073D1"/>
+            </a:solidFill>
+          </a:ln>
+        </p:spPr>
+      </p:pic>
     </p:spTree>
     <p:extLst>
       <p:ext uri="{BB962C8B-B14F-4D97-AF65-F5344CB8AC3E}">
-        <p14:creationId xmlns:p14="http://schemas.microsoft.com/office/powerpoint/2010/main" val="4208259904"/>
+        <p14:creationId xmlns:p14="http://schemas.microsoft.com/office/powerpoint/2010/main" val="77760022"/>
       </p:ext>
     </p:extLst>
   </p:cSld>
@@ -13826,38 +13469,7 @@
             <a:pPr lvl="1"/>
             <a:r>
               <a:rPr lang="fr-CA" dirty="0"/>
-              <a:t> De plus, il faut ajouter une ligne de code HTML dans la page Web où l’on souhaite pouvoir utiliser cette fonction :</a:t>
-            </a:r>
-          </a:p>
-          <a:p>
-            <a:pPr lvl="1"/>
-            <a:endParaRPr lang="fr-CA" dirty="0"/>
-          </a:p>
-          <a:p>
-            <a:pPr lvl="1"/>
-            <a:endParaRPr lang="fr-CA" dirty="0"/>
-          </a:p>
-          <a:p>
-            <a:pPr lvl="1"/>
-            <a:endParaRPr lang="fr-CA" dirty="0"/>
-          </a:p>
-          <a:p>
-            <a:pPr lvl="1"/>
-            <a:endParaRPr lang="fr-CA" dirty="0"/>
-          </a:p>
-          <a:p>
-            <a:pPr lvl="1"/>
-            <a:endParaRPr lang="fr-CA" dirty="0"/>
-          </a:p>
-          <a:p>
-            <a:pPr lvl="1"/>
-            <a:endParaRPr lang="fr-CA" dirty="0"/>
-          </a:p>
-          <a:p>
-            <a:pPr lvl="1"/>
-            <a:r>
-              <a:rPr lang="fr-CA" dirty="0"/>
-              <a:t> La portion « </a:t>
+              <a:t> La fonction doit être déclarée dans un fichier avec l’extension </a:t>
             </a:r>
             <a:r>
               <a:rPr lang="fr-CA" b="1" dirty="0">
@@ -13865,11 +13477,31 @@
                   <a:srgbClr val="73B3D1"/>
                 </a:solidFill>
               </a:rPr>
-              <a:t>script.js </a:t>
-            </a:r>
-            <a:r>
-              <a:rPr lang="fr-CA" dirty="0"/>
-              <a:t>» correspond au nom du fichier qui contient la / les déclaration(s) de fonction.</a:t>
+              <a:t>.js</a:t>
+            </a:r>
+            <a:r>
+              <a:rPr lang="fr-CA" dirty="0"/>
+              <a:t>, dans le dossier </a:t>
+            </a:r>
+            <a:r>
+              <a:rPr lang="fr-CA" b="1" dirty="0">
+                <a:solidFill>
+                  <a:srgbClr val="73B3D1"/>
+                </a:solidFill>
+              </a:rPr>
+              <a:t>js</a:t>
+            </a:r>
+            <a:r>
+              <a:rPr lang="fr-CA" dirty="0"/>
+              <a:t> de notre </a:t>
+            </a:r>
+            <a:r>
+              <a:rPr lang="fr-CA" b="1" dirty="0"/>
+              <a:t>projet Web</a:t>
+            </a:r>
+            <a:r>
+              <a:rPr lang="fr-CA" dirty="0"/>
+              <a:t>.</a:t>
             </a:r>
           </a:p>
           <a:p>
@@ -13880,10 +13512,10 @@
       </p:sp>
       <p:sp>
         <p:nvSpPr>
-          <p:cNvPr id="3" name="Titre 2">
-            <a:extLst>
-              <a:ext uri="{FF2B5EF4-FFF2-40B4-BE49-F238E27FC236}">
-                <a16:creationId xmlns:a16="http://schemas.microsoft.com/office/drawing/2014/main" id="{A7365136-E933-4296-BE91-C6C71E34AC7E}"/>
+          <p:cNvPr id="40" name="Titre 2">
+            <a:extLst>
+              <a:ext uri="{FF2B5EF4-FFF2-40B4-BE49-F238E27FC236}">
+                <a16:creationId xmlns:a16="http://schemas.microsoft.com/office/drawing/2014/main" id="{1F2E5F8C-C6F9-4F10-9817-B25E7A7E21B8}"/>
               </a:ext>
             </a:extLst>
           </p:cNvPr>
@@ -13908,10 +13540,10 @@
       </p:sp>
       <p:pic>
         <p:nvPicPr>
-          <p:cNvPr id="9" name="Image 8">
-            <a:extLst>
-              <a:ext uri="{FF2B5EF4-FFF2-40B4-BE49-F238E27FC236}">
-                <a16:creationId xmlns:a16="http://schemas.microsoft.com/office/drawing/2014/main" id="{BD460D73-35C9-48AF-891C-106D574052DC}"/>
+          <p:cNvPr id="12" name="Image 11">
+            <a:extLst>
+              <a:ext uri="{FF2B5EF4-FFF2-40B4-BE49-F238E27FC236}">
+                <a16:creationId xmlns:a16="http://schemas.microsoft.com/office/drawing/2014/main" id="{17D9718B-4609-47C6-84E1-77D82C7A05A0}"/>
               </a:ext>
             </a:extLst>
           </p:cNvPr>
@@ -13921,49 +13553,663 @@
           <p:nvPr/>
         </p:nvPicPr>
         <p:blipFill>
-          <a:blip r:embed="rId2"/>
+          <a:blip r:embed="rId2">
+            <a:extLst>
+              <a:ext uri="{28A0092B-C50C-407E-A947-70E740481C1C}">
+                <a14:useLocalDpi xmlns:a14="http://schemas.microsoft.com/office/drawing/2010/main" val="0"/>
+              </a:ext>
+            </a:extLst>
+          </a:blip>
           <a:stretch>
             <a:fillRect/>
           </a:stretch>
         </p:blipFill>
         <p:spPr>
           <a:xfrm>
-            <a:off x="3317381" y="2447938"/>
-            <a:ext cx="5177080" cy="2050407"/>
+            <a:off x="2774774" y="2956560"/>
+            <a:ext cx="662178" cy="662178"/>
           </a:xfrm>
           <a:prstGeom prst="rect">
+            <a:avLst/>
+          </a:prstGeom>
+        </p:spPr>
+      </p:pic>
+      <p:sp>
+        <p:nvSpPr>
+          <p:cNvPr id="13" name="ZoneTexte 12">
+            <a:extLst>
+              <a:ext uri="{FF2B5EF4-FFF2-40B4-BE49-F238E27FC236}">
+                <a16:creationId xmlns:a16="http://schemas.microsoft.com/office/drawing/2014/main" id="{178BD5CE-7758-47E0-9D02-343BA1038834}"/>
+              </a:ext>
+            </a:extLst>
+          </p:cNvPr>
+          <p:cNvSpPr txBox="1"/>
+          <p:nvPr/>
+        </p:nvSpPr>
+        <p:spPr>
+          <a:xfrm>
+            <a:off x="2502359" y="2802671"/>
+            <a:ext cx="1207008" cy="307777"/>
+          </a:xfrm>
+          <a:prstGeom prst="rect">
+            <a:avLst/>
+          </a:prstGeom>
+          <a:noFill/>
+        </p:spPr>
+        <p:txBody>
+          <a:bodyPr wrap="square" rtlCol="0">
+            <a:spAutoFit/>
+          </a:bodyPr>
+          <a:lstStyle/>
+          <a:p>
+            <a:pPr algn="ctr"/>
+            <a:r>
+              <a:rPr lang="fr-CA" sz="1400" b="1" dirty="0">
+                <a:solidFill>
+                  <a:srgbClr val="9073D1"/>
+                </a:solidFill>
+              </a:rPr>
+              <a:t>Nom_projet</a:t>
+            </a:r>
+          </a:p>
+        </p:txBody>
+      </p:sp>
+      <p:pic>
+        <p:nvPicPr>
+          <p:cNvPr id="14" name="Image 13">
+            <a:extLst>
+              <a:ext uri="{FF2B5EF4-FFF2-40B4-BE49-F238E27FC236}">
+                <a16:creationId xmlns:a16="http://schemas.microsoft.com/office/drawing/2014/main" id="{768B6B21-526E-4626-9863-D7CCF7895BD1}"/>
+              </a:ext>
+            </a:extLst>
+          </p:cNvPr>
+          <p:cNvPicPr>
+            <a:picLocks noChangeAspect="1"/>
+          </p:cNvPicPr>
+          <p:nvPr/>
+        </p:nvPicPr>
+        <p:blipFill>
+          <a:blip r:embed="rId2">
+            <a:extLst>
+              <a:ext uri="{28A0092B-C50C-407E-A947-70E740481C1C}">
+                <a14:useLocalDpi xmlns:a14="http://schemas.microsoft.com/office/drawing/2010/main" val="0"/>
+              </a:ext>
+            </a:extLst>
+          </a:blip>
+          <a:stretch>
+            <a:fillRect/>
+          </a:stretch>
+        </p:blipFill>
+        <p:spPr>
+          <a:xfrm>
+            <a:off x="350676" y="4234167"/>
+            <a:ext cx="662178" cy="662178"/>
+          </a:xfrm>
+          <a:prstGeom prst="rect">
+            <a:avLst/>
+          </a:prstGeom>
+        </p:spPr>
+      </p:pic>
+      <p:sp>
+        <p:nvSpPr>
+          <p:cNvPr id="15" name="ZoneTexte 14">
+            <a:extLst>
+              <a:ext uri="{FF2B5EF4-FFF2-40B4-BE49-F238E27FC236}">
+                <a16:creationId xmlns:a16="http://schemas.microsoft.com/office/drawing/2014/main" id="{84B45299-209C-46F0-925B-C65039E835C8}"/>
+              </a:ext>
+            </a:extLst>
+          </p:cNvPr>
+          <p:cNvSpPr txBox="1"/>
+          <p:nvPr/>
+        </p:nvSpPr>
+        <p:spPr>
+          <a:xfrm>
+            <a:off x="78261" y="4080278"/>
+            <a:ext cx="1207008" cy="307777"/>
+          </a:xfrm>
+          <a:prstGeom prst="rect">
+            <a:avLst/>
+          </a:prstGeom>
+          <a:noFill/>
+        </p:spPr>
+        <p:txBody>
+          <a:bodyPr wrap="square" rtlCol="0">
+            <a:spAutoFit/>
+          </a:bodyPr>
+          <a:lstStyle/>
+          <a:p>
+            <a:pPr algn="ctr"/>
+            <a:r>
+              <a:rPr lang="fr-CA" sz="1400" b="1" dirty="0">
+                <a:solidFill>
+                  <a:srgbClr val="9073D1"/>
+                </a:solidFill>
+              </a:rPr>
+              <a:t>css</a:t>
+            </a:r>
+          </a:p>
+        </p:txBody>
+      </p:sp>
+      <p:pic>
+        <p:nvPicPr>
+          <p:cNvPr id="16" name="Image 15">
+            <a:extLst>
+              <a:ext uri="{FF2B5EF4-FFF2-40B4-BE49-F238E27FC236}">
+                <a16:creationId xmlns:a16="http://schemas.microsoft.com/office/drawing/2014/main" id="{C75D8252-9881-44E7-B7F4-523B7CDE335F}"/>
+              </a:ext>
+            </a:extLst>
+          </p:cNvPr>
+          <p:cNvPicPr>
+            <a:picLocks noChangeAspect="1"/>
+          </p:cNvPicPr>
+          <p:nvPr/>
+        </p:nvPicPr>
+        <p:blipFill>
+          <a:blip r:embed="rId2">
+            <a:extLst>
+              <a:ext uri="{28A0092B-C50C-407E-A947-70E740481C1C}">
+                <a14:useLocalDpi xmlns:a14="http://schemas.microsoft.com/office/drawing/2010/main" val="0"/>
+              </a:ext>
+            </a:extLst>
+          </a:blip>
+          <a:stretch>
+            <a:fillRect/>
+          </a:stretch>
+        </p:blipFill>
+        <p:spPr>
+          <a:xfrm>
+            <a:off x="1285269" y="4234167"/>
+            <a:ext cx="662178" cy="662178"/>
+          </a:xfrm>
+          <a:prstGeom prst="rect">
+            <a:avLst/>
+          </a:prstGeom>
+        </p:spPr>
+      </p:pic>
+      <p:sp>
+        <p:nvSpPr>
+          <p:cNvPr id="17" name="ZoneTexte 16">
+            <a:extLst>
+              <a:ext uri="{FF2B5EF4-FFF2-40B4-BE49-F238E27FC236}">
+                <a16:creationId xmlns:a16="http://schemas.microsoft.com/office/drawing/2014/main" id="{A845DAC1-A8DB-4035-908F-A65B55E3B01A}"/>
+              </a:ext>
+            </a:extLst>
+          </p:cNvPr>
+          <p:cNvSpPr txBox="1"/>
+          <p:nvPr/>
+        </p:nvSpPr>
+        <p:spPr>
+          <a:xfrm>
+            <a:off x="1012854" y="4080278"/>
+            <a:ext cx="1207008" cy="307777"/>
+          </a:xfrm>
+          <a:prstGeom prst="rect">
+            <a:avLst/>
+          </a:prstGeom>
+          <a:noFill/>
+        </p:spPr>
+        <p:txBody>
+          <a:bodyPr wrap="square" rtlCol="0">
+            <a:spAutoFit/>
+          </a:bodyPr>
+          <a:lstStyle/>
+          <a:p>
+            <a:pPr algn="ctr"/>
+            <a:r>
+              <a:rPr lang="fr-CA" sz="1400" b="1" dirty="0">
+                <a:solidFill>
+                  <a:srgbClr val="9073D1"/>
+                </a:solidFill>
+              </a:rPr>
+              <a:t>js</a:t>
+            </a:r>
+          </a:p>
+        </p:txBody>
+      </p:sp>
+      <p:pic>
+        <p:nvPicPr>
+          <p:cNvPr id="18" name="Image 17">
+            <a:extLst>
+              <a:ext uri="{FF2B5EF4-FFF2-40B4-BE49-F238E27FC236}">
+                <a16:creationId xmlns:a16="http://schemas.microsoft.com/office/drawing/2014/main" id="{2321D1AE-1435-4689-9E83-6891E192BBB1}"/>
+              </a:ext>
+            </a:extLst>
+          </p:cNvPr>
+          <p:cNvPicPr>
+            <a:picLocks noChangeAspect="1"/>
+          </p:cNvPicPr>
+          <p:nvPr/>
+        </p:nvPicPr>
+        <p:blipFill>
+          <a:blip r:embed="rId2">
+            <a:extLst>
+              <a:ext uri="{28A0092B-C50C-407E-A947-70E740481C1C}">
+                <a14:useLocalDpi xmlns:a14="http://schemas.microsoft.com/office/drawing/2010/main" val="0"/>
+              </a:ext>
+            </a:extLst>
+          </a:blip>
+          <a:stretch>
+            <a:fillRect/>
+          </a:stretch>
+        </p:blipFill>
+        <p:spPr>
+          <a:xfrm>
+            <a:off x="2219862" y="4251657"/>
+            <a:ext cx="662178" cy="662178"/>
+          </a:xfrm>
+          <a:prstGeom prst="rect">
+            <a:avLst/>
+          </a:prstGeom>
+        </p:spPr>
+      </p:pic>
+      <p:sp>
+        <p:nvSpPr>
+          <p:cNvPr id="19" name="ZoneTexte 18">
+            <a:extLst>
+              <a:ext uri="{FF2B5EF4-FFF2-40B4-BE49-F238E27FC236}">
+                <a16:creationId xmlns:a16="http://schemas.microsoft.com/office/drawing/2014/main" id="{052FB71C-A1D0-4719-8852-37725EC22D14}"/>
+              </a:ext>
+            </a:extLst>
+          </p:cNvPr>
+          <p:cNvSpPr txBox="1"/>
+          <p:nvPr/>
+        </p:nvSpPr>
+        <p:spPr>
+          <a:xfrm>
+            <a:off x="1947447" y="4097768"/>
+            <a:ext cx="1207008" cy="307777"/>
+          </a:xfrm>
+          <a:prstGeom prst="rect">
+            <a:avLst/>
+          </a:prstGeom>
+          <a:noFill/>
+        </p:spPr>
+        <p:txBody>
+          <a:bodyPr wrap="square" rtlCol="0">
+            <a:spAutoFit/>
+          </a:bodyPr>
+          <a:lstStyle/>
+          <a:p>
+            <a:pPr algn="ctr"/>
+            <a:r>
+              <a:rPr lang="fr-CA" sz="1400" b="1" dirty="0">
+                <a:solidFill>
+                  <a:srgbClr val="9073D1"/>
+                </a:solidFill>
+              </a:rPr>
+              <a:t>images</a:t>
+            </a:r>
+          </a:p>
+        </p:txBody>
+      </p:sp>
+      <p:pic>
+        <p:nvPicPr>
+          <p:cNvPr id="20" name="Image 19">
+            <a:extLst>
+              <a:ext uri="{FF2B5EF4-FFF2-40B4-BE49-F238E27FC236}">
+                <a16:creationId xmlns:a16="http://schemas.microsoft.com/office/drawing/2014/main" id="{1C16DA1D-EF4A-4D0E-B5B6-91D881D5D5F8}"/>
+              </a:ext>
+            </a:extLst>
+          </p:cNvPr>
+          <p:cNvPicPr>
+            <a:picLocks noChangeAspect="1"/>
+          </p:cNvPicPr>
+          <p:nvPr/>
+        </p:nvPicPr>
+        <p:blipFill>
+          <a:blip r:embed="rId3">
+            <a:extLst>
+              <a:ext uri="{28A0092B-C50C-407E-A947-70E740481C1C}">
+                <a14:useLocalDpi xmlns:a14="http://schemas.microsoft.com/office/drawing/2010/main" val="0"/>
+              </a:ext>
+            </a:extLst>
+          </a:blip>
+          <a:stretch>
+            <a:fillRect/>
+          </a:stretch>
+        </p:blipFill>
+        <p:spPr>
+          <a:xfrm>
+            <a:off x="3855849" y="4340424"/>
+            <a:ext cx="525307" cy="525307"/>
+          </a:xfrm>
+          <a:prstGeom prst="rect">
+            <a:avLst/>
+          </a:prstGeom>
+        </p:spPr>
+      </p:pic>
+      <p:sp>
+        <p:nvSpPr>
+          <p:cNvPr id="21" name="ZoneTexte 20">
+            <a:extLst>
+              <a:ext uri="{FF2B5EF4-FFF2-40B4-BE49-F238E27FC236}">
+                <a16:creationId xmlns:a16="http://schemas.microsoft.com/office/drawing/2014/main" id="{3AEBE190-10F0-4CF3-AB01-ABBE0949F9EF}"/>
+              </a:ext>
+            </a:extLst>
+          </p:cNvPr>
+          <p:cNvSpPr txBox="1"/>
+          <p:nvPr/>
+        </p:nvSpPr>
+        <p:spPr>
+          <a:xfrm>
+            <a:off x="3481736" y="4091671"/>
+            <a:ext cx="1207008" cy="276999"/>
+          </a:xfrm>
+          <a:prstGeom prst="rect">
+            <a:avLst/>
+          </a:prstGeom>
+          <a:noFill/>
+        </p:spPr>
+        <p:txBody>
+          <a:bodyPr wrap="square" rtlCol="0">
+            <a:spAutoFit/>
+          </a:bodyPr>
+          <a:lstStyle/>
+          <a:p>
+            <a:pPr algn="ctr"/>
+            <a:r>
+              <a:rPr lang="fr-CA" sz="1200" b="1" dirty="0">
+                <a:solidFill>
+                  <a:srgbClr val="9073D1"/>
+                </a:solidFill>
+              </a:rPr>
+              <a:t>index.html</a:t>
+            </a:r>
+          </a:p>
+        </p:txBody>
+      </p:sp>
+      <p:pic>
+        <p:nvPicPr>
+          <p:cNvPr id="22" name="Image 21">
+            <a:extLst>
+              <a:ext uri="{FF2B5EF4-FFF2-40B4-BE49-F238E27FC236}">
+                <a16:creationId xmlns:a16="http://schemas.microsoft.com/office/drawing/2014/main" id="{0F285423-05A5-40F0-8B7B-ACABEDF5343A}"/>
+              </a:ext>
+            </a:extLst>
+          </p:cNvPr>
+          <p:cNvPicPr>
+            <a:picLocks noChangeAspect="1"/>
+          </p:cNvPicPr>
+          <p:nvPr/>
+        </p:nvPicPr>
+        <p:blipFill>
+          <a:blip r:embed="rId3">
+            <a:extLst>
+              <a:ext uri="{28A0092B-C50C-407E-A947-70E740481C1C}">
+                <a14:useLocalDpi xmlns:a14="http://schemas.microsoft.com/office/drawing/2010/main" val="0"/>
+              </a:ext>
+            </a:extLst>
+          </a:blip>
+          <a:stretch>
+            <a:fillRect/>
+          </a:stretch>
+        </p:blipFill>
+        <p:spPr>
+          <a:xfrm>
+            <a:off x="4800203" y="4340423"/>
+            <a:ext cx="525307" cy="525307"/>
+          </a:xfrm>
+          <a:prstGeom prst="rect">
+            <a:avLst/>
+          </a:prstGeom>
+        </p:spPr>
+      </p:pic>
+      <p:sp>
+        <p:nvSpPr>
+          <p:cNvPr id="23" name="ZoneTexte 22">
+            <a:extLst>
+              <a:ext uri="{FF2B5EF4-FFF2-40B4-BE49-F238E27FC236}">
+                <a16:creationId xmlns:a16="http://schemas.microsoft.com/office/drawing/2014/main" id="{3C2FA4A3-6A32-4F4E-A1E3-3157A341F676}"/>
+              </a:ext>
+            </a:extLst>
+          </p:cNvPr>
+          <p:cNvSpPr txBox="1"/>
+          <p:nvPr/>
+        </p:nvSpPr>
+        <p:spPr>
+          <a:xfrm>
+            <a:off x="4455579" y="4091670"/>
+            <a:ext cx="1207008" cy="276999"/>
+          </a:xfrm>
+          <a:prstGeom prst="rect">
+            <a:avLst/>
+          </a:prstGeom>
+          <a:noFill/>
+        </p:spPr>
+        <p:txBody>
+          <a:bodyPr wrap="square" rtlCol="0">
+            <a:spAutoFit/>
+          </a:bodyPr>
+          <a:lstStyle/>
+          <a:p>
+            <a:pPr algn="ctr"/>
+            <a:r>
+              <a:rPr lang="fr-CA" sz="1200" b="1" dirty="0">
+                <a:solidFill>
+                  <a:srgbClr val="9073D1"/>
+                </a:solidFill>
+              </a:rPr>
+              <a:t>apropos.html</a:t>
+            </a:r>
+          </a:p>
+        </p:txBody>
+      </p:sp>
+      <p:cxnSp>
+        <p:nvCxnSpPr>
+          <p:cNvPr id="26" name="Connecteur : en angle 25">
+            <a:extLst>
+              <a:ext uri="{FF2B5EF4-FFF2-40B4-BE49-F238E27FC236}">
+                <a16:creationId xmlns:a16="http://schemas.microsoft.com/office/drawing/2014/main" id="{C38DC1EC-7D13-47C0-B9D8-B7A774459F05}"/>
+              </a:ext>
+            </a:extLst>
+          </p:cNvPr>
+          <p:cNvCxnSpPr>
+            <a:stCxn id="12" idx="2"/>
+            <a:endCxn id="19" idx="0"/>
+          </p:cNvCxnSpPr>
+          <p:nvPr/>
+        </p:nvCxnSpPr>
+        <p:spPr>
+          <a:xfrm rot="5400000">
+            <a:off x="2588892" y="3580797"/>
+            <a:ext cx="479030" cy="554912"/>
+          </a:xfrm>
+          <a:prstGeom prst="bentConnector3">
             <a:avLst/>
           </a:prstGeom>
           <a:ln w="38100">
             <a:solidFill>
               <a:srgbClr val="9073D1"/>
             </a:solidFill>
+            <a:tailEnd type="triangle"/>
           </a:ln>
         </p:spPr>
-      </p:pic>
+        <p:style>
+          <a:lnRef idx="1">
+            <a:schemeClr val="accent1"/>
+          </a:lnRef>
+          <a:fillRef idx="0">
+            <a:schemeClr val="accent1"/>
+          </a:fillRef>
+          <a:effectRef idx="0">
+            <a:schemeClr val="accent1"/>
+          </a:effectRef>
+          <a:fontRef idx="minor">
+            <a:schemeClr val="tx1"/>
+          </a:fontRef>
+        </p:style>
+      </p:cxnSp>
       <p:cxnSp>
         <p:nvCxnSpPr>
-          <p:cNvPr id="6" name="Connecteur droit avec flèche 5">
-            <a:extLst>
-              <a:ext uri="{FF2B5EF4-FFF2-40B4-BE49-F238E27FC236}">
-                <a16:creationId xmlns:a16="http://schemas.microsoft.com/office/drawing/2014/main" id="{B145B07F-BAC2-435F-94F2-116C2819C9DF}"/>
+          <p:cNvPr id="27" name="Connecteur : en angle 26">
+            <a:extLst>
+              <a:ext uri="{FF2B5EF4-FFF2-40B4-BE49-F238E27FC236}">
+                <a16:creationId xmlns:a16="http://schemas.microsoft.com/office/drawing/2014/main" id="{85E57858-6819-45E0-9CC2-6BE66C23C196}"/>
               </a:ext>
             </a:extLst>
           </p:cNvPr>
           <p:cNvCxnSpPr>
             <a:cxnSpLocks/>
+            <a:stCxn id="12" idx="2"/>
+            <a:endCxn id="17" idx="0"/>
           </p:cNvCxnSpPr>
           <p:nvPr/>
         </p:nvCxnSpPr>
         <p:spPr>
-          <a:xfrm>
-            <a:off x="2640868" y="4225402"/>
-            <a:ext cx="1980896" cy="0"/>
-          </a:xfrm>
-          <a:prstGeom prst="straightConnector1">
-            <a:avLst/>
-          </a:prstGeom>
-          <a:ln w="57150">
+          <a:xfrm rot="5400000">
+            <a:off x="2130341" y="3104756"/>
+            <a:ext cx="461540" cy="1489505"/>
+          </a:xfrm>
+          <a:prstGeom prst="bentConnector3">
+            <a:avLst>
+              <a:gd name="adj1" fmla="val 50000"/>
+            </a:avLst>
+          </a:prstGeom>
+          <a:ln w="38100">
+            <a:solidFill>
+              <a:srgbClr val="9073D1"/>
+            </a:solidFill>
+            <a:tailEnd type="triangle"/>
+          </a:ln>
+        </p:spPr>
+        <p:style>
+          <a:lnRef idx="1">
+            <a:schemeClr val="accent1"/>
+          </a:lnRef>
+          <a:fillRef idx="0">
+            <a:schemeClr val="accent1"/>
+          </a:fillRef>
+          <a:effectRef idx="0">
+            <a:schemeClr val="accent1"/>
+          </a:effectRef>
+          <a:fontRef idx="minor">
+            <a:schemeClr val="tx1"/>
+          </a:fontRef>
+        </p:style>
+      </p:cxnSp>
+      <p:cxnSp>
+        <p:nvCxnSpPr>
+          <p:cNvPr id="28" name="Connecteur : en angle 27">
+            <a:extLst>
+              <a:ext uri="{FF2B5EF4-FFF2-40B4-BE49-F238E27FC236}">
+                <a16:creationId xmlns:a16="http://schemas.microsoft.com/office/drawing/2014/main" id="{BBE929E6-7B9E-4A7A-BD64-394245A3D960}"/>
+              </a:ext>
+            </a:extLst>
+          </p:cNvPr>
+          <p:cNvCxnSpPr>
+            <a:cxnSpLocks/>
+            <a:stCxn id="12" idx="2"/>
+            <a:endCxn id="15" idx="0"/>
+          </p:cNvCxnSpPr>
+          <p:nvPr/>
+        </p:nvCxnSpPr>
+        <p:spPr>
+          <a:xfrm rot="5400000">
+            <a:off x="1663044" y="2637459"/>
+            <a:ext cx="461540" cy="2424098"/>
+          </a:xfrm>
+          <a:prstGeom prst="bentConnector3">
+            <a:avLst>
+              <a:gd name="adj1" fmla="val 50000"/>
+            </a:avLst>
+          </a:prstGeom>
+          <a:ln w="38100">
+            <a:solidFill>
+              <a:srgbClr val="9073D1"/>
+            </a:solidFill>
+            <a:tailEnd type="triangle"/>
+          </a:ln>
+        </p:spPr>
+        <p:style>
+          <a:lnRef idx="1">
+            <a:schemeClr val="accent1"/>
+          </a:lnRef>
+          <a:fillRef idx="0">
+            <a:schemeClr val="accent1"/>
+          </a:fillRef>
+          <a:effectRef idx="0">
+            <a:schemeClr val="accent1"/>
+          </a:effectRef>
+          <a:fontRef idx="minor">
+            <a:schemeClr val="tx1"/>
+          </a:fontRef>
+        </p:style>
+      </p:cxnSp>
+      <p:cxnSp>
+        <p:nvCxnSpPr>
+          <p:cNvPr id="29" name="Connecteur : en angle 28">
+            <a:extLst>
+              <a:ext uri="{FF2B5EF4-FFF2-40B4-BE49-F238E27FC236}">
+                <a16:creationId xmlns:a16="http://schemas.microsoft.com/office/drawing/2014/main" id="{5AD840B3-0896-4F8B-80AB-08AA5BDC3896}"/>
+              </a:ext>
+            </a:extLst>
+          </p:cNvPr>
+          <p:cNvCxnSpPr>
+            <a:cxnSpLocks/>
+            <a:stCxn id="12" idx="2"/>
+            <a:endCxn id="21" idx="0"/>
+          </p:cNvCxnSpPr>
+          <p:nvPr/>
+        </p:nvCxnSpPr>
+        <p:spPr>
+          <a:xfrm rot="16200000" flipH="1">
+            <a:off x="3359085" y="3365515"/>
+            <a:ext cx="472933" cy="979377"/>
+          </a:xfrm>
+          <a:prstGeom prst="bentConnector3">
+            <a:avLst>
+              <a:gd name="adj1" fmla="val 50000"/>
+            </a:avLst>
+          </a:prstGeom>
+          <a:ln w="38100">
+            <a:solidFill>
+              <a:srgbClr val="9073D1"/>
+            </a:solidFill>
+            <a:tailEnd type="triangle"/>
+          </a:ln>
+        </p:spPr>
+        <p:style>
+          <a:lnRef idx="1">
+            <a:schemeClr val="accent1"/>
+          </a:lnRef>
+          <a:fillRef idx="0">
+            <a:schemeClr val="accent1"/>
+          </a:fillRef>
+          <a:effectRef idx="0">
+            <a:schemeClr val="accent1"/>
+          </a:effectRef>
+          <a:fontRef idx="minor">
+            <a:schemeClr val="tx1"/>
+          </a:fontRef>
+        </p:style>
+      </p:cxnSp>
+      <p:cxnSp>
+        <p:nvCxnSpPr>
+          <p:cNvPr id="30" name="Connecteur : en angle 29">
+            <a:extLst>
+              <a:ext uri="{FF2B5EF4-FFF2-40B4-BE49-F238E27FC236}">
+                <a16:creationId xmlns:a16="http://schemas.microsoft.com/office/drawing/2014/main" id="{FC42DE8A-3AE0-4CB4-A5CD-DD51F3839C4E}"/>
+              </a:ext>
+            </a:extLst>
+          </p:cNvPr>
+          <p:cNvCxnSpPr>
+            <a:cxnSpLocks/>
+            <a:stCxn id="12" idx="2"/>
+            <a:endCxn id="23" idx="0"/>
+          </p:cNvCxnSpPr>
+          <p:nvPr/>
+        </p:nvCxnSpPr>
+        <p:spPr>
+          <a:xfrm rot="16200000" flipH="1">
+            <a:off x="3846007" y="2878594"/>
+            <a:ext cx="472932" cy="1953220"/>
+          </a:xfrm>
+          <a:prstGeom prst="bentConnector3">
+            <a:avLst>
+              <a:gd name="adj1" fmla="val 50000"/>
+            </a:avLst>
+          </a:prstGeom>
+          <a:ln w="38100">
             <a:solidFill>
               <a:srgbClr val="9073D1"/>
             </a:solidFill>
@@ -13987,10 +14233,10 @@
       </p:cxnSp>
       <p:pic>
         <p:nvPicPr>
-          <p:cNvPr id="10" name="Image 9">
-            <a:extLst>
-              <a:ext uri="{FF2B5EF4-FFF2-40B4-BE49-F238E27FC236}">
-                <a16:creationId xmlns:a16="http://schemas.microsoft.com/office/drawing/2014/main" id="{0995A68B-DF9C-4363-AD03-0F4BDAE91D21}"/>
+          <p:cNvPr id="36" name="Image 35">
+            <a:extLst>
+              <a:ext uri="{FF2B5EF4-FFF2-40B4-BE49-F238E27FC236}">
+                <a16:creationId xmlns:a16="http://schemas.microsoft.com/office/drawing/2014/main" id="{E3069D24-74AE-453A-839D-B896414B91DC}"/>
               </a:ext>
             </a:extLst>
           </p:cNvPr>
@@ -14013,7 +14259,7 @@
         </p:blipFill>
         <p:spPr>
           <a:xfrm>
-            <a:off x="8793519" y="3626666"/>
+            <a:off x="1034282" y="5744590"/>
             <a:ext cx="525307" cy="525307"/>
           </a:xfrm>
           <a:prstGeom prst="rect">
@@ -14023,10 +14269,10 @@
       </p:pic>
       <p:sp>
         <p:nvSpPr>
-          <p:cNvPr id="11" name="ZoneTexte 10">
-            <a:extLst>
-              <a:ext uri="{FF2B5EF4-FFF2-40B4-BE49-F238E27FC236}">
-                <a16:creationId xmlns:a16="http://schemas.microsoft.com/office/drawing/2014/main" id="{2B332DAE-9558-4C12-B2C4-308569DB19F7}"/>
+          <p:cNvPr id="37" name="ZoneTexte 36">
+            <a:extLst>
+              <a:ext uri="{FF2B5EF4-FFF2-40B4-BE49-F238E27FC236}">
+                <a16:creationId xmlns:a16="http://schemas.microsoft.com/office/drawing/2014/main" id="{8C921A66-43B2-47B0-8951-1F51387EF27E}"/>
               </a:ext>
             </a:extLst>
           </p:cNvPr>
@@ -14035,7 +14281,7 @@
         </p:nvSpPr>
         <p:spPr>
           <a:xfrm>
-            <a:off x="8491976" y="4045425"/>
+            <a:off x="693432" y="5499847"/>
             <a:ext cx="1207008" cy="276999"/>
           </a:xfrm>
           <a:prstGeom prst="rect">
@@ -14061,10 +14307,411 @@
           </a:p>
         </p:txBody>
       </p:sp>
+      <p:pic>
+        <p:nvPicPr>
+          <p:cNvPr id="38" name="Image 37">
+            <a:extLst>
+              <a:ext uri="{FF2B5EF4-FFF2-40B4-BE49-F238E27FC236}">
+                <a16:creationId xmlns:a16="http://schemas.microsoft.com/office/drawing/2014/main" id="{07C1C23A-5A8D-4F21-A6A4-E66C2B909568}"/>
+              </a:ext>
+            </a:extLst>
+          </p:cNvPr>
+          <p:cNvPicPr>
+            <a:picLocks noChangeAspect="1"/>
+          </p:cNvPicPr>
+          <p:nvPr/>
+        </p:nvPicPr>
+        <p:blipFill>
+          <a:blip r:embed="rId3">
+            <a:extLst>
+              <a:ext uri="{28A0092B-C50C-407E-A947-70E740481C1C}">
+                <a14:useLocalDpi xmlns:a14="http://schemas.microsoft.com/office/drawing/2010/main" val="0"/>
+              </a:ext>
+            </a:extLst>
+          </a:blip>
+          <a:stretch>
+            <a:fillRect/>
+          </a:stretch>
+        </p:blipFill>
+        <p:spPr>
+          <a:xfrm>
+            <a:off x="1976287" y="5748600"/>
+            <a:ext cx="525307" cy="525307"/>
+          </a:xfrm>
+          <a:prstGeom prst="rect">
+            <a:avLst/>
+          </a:prstGeom>
+        </p:spPr>
+      </p:pic>
+      <p:sp>
+        <p:nvSpPr>
+          <p:cNvPr id="39" name="ZoneTexte 38">
+            <a:extLst>
+              <a:ext uri="{FF2B5EF4-FFF2-40B4-BE49-F238E27FC236}">
+                <a16:creationId xmlns:a16="http://schemas.microsoft.com/office/drawing/2014/main" id="{3FBC99F5-1A67-4FB4-BA36-222010F9AA88}"/>
+              </a:ext>
+            </a:extLst>
+          </p:cNvPr>
+          <p:cNvSpPr txBox="1"/>
+          <p:nvPr/>
+        </p:nvSpPr>
+        <p:spPr>
+          <a:xfrm>
+            <a:off x="1644846" y="5499847"/>
+            <a:ext cx="1207008" cy="276999"/>
+          </a:xfrm>
+          <a:prstGeom prst="rect">
+            <a:avLst/>
+          </a:prstGeom>
+          <a:noFill/>
+        </p:spPr>
+        <p:txBody>
+          <a:bodyPr wrap="square" rtlCol="0">
+            <a:spAutoFit/>
+          </a:bodyPr>
+          <a:lstStyle/>
+          <a:p>
+            <a:pPr algn="ctr"/>
+            <a:r>
+              <a:rPr lang="fr-CA" sz="1200" b="1" dirty="0">
+                <a:solidFill>
+                  <a:srgbClr val="9073D1"/>
+                </a:solidFill>
+              </a:rPr>
+              <a:t>widget.js</a:t>
+            </a:r>
+          </a:p>
+        </p:txBody>
+      </p:sp>
+      <p:cxnSp>
+        <p:nvCxnSpPr>
+          <p:cNvPr id="46" name="Connecteur : en angle 45">
+            <a:extLst>
+              <a:ext uri="{FF2B5EF4-FFF2-40B4-BE49-F238E27FC236}">
+                <a16:creationId xmlns:a16="http://schemas.microsoft.com/office/drawing/2014/main" id="{0311F53B-7D9B-4483-9215-28F7790BA290}"/>
+              </a:ext>
+            </a:extLst>
+          </p:cNvPr>
+          <p:cNvCxnSpPr>
+            <a:cxnSpLocks/>
+            <a:stCxn id="16" idx="2"/>
+            <a:endCxn id="37" idx="0"/>
+          </p:cNvCxnSpPr>
+          <p:nvPr/>
+        </p:nvCxnSpPr>
+        <p:spPr>
+          <a:xfrm rot="5400000">
+            <a:off x="1154896" y="5038385"/>
+            <a:ext cx="603502" cy="319422"/>
+          </a:xfrm>
+          <a:prstGeom prst="bentConnector3">
+            <a:avLst>
+              <a:gd name="adj1" fmla="val 50000"/>
+            </a:avLst>
+          </a:prstGeom>
+          <a:ln w="38100">
+            <a:solidFill>
+              <a:srgbClr val="9073D1"/>
+            </a:solidFill>
+            <a:tailEnd type="triangle"/>
+          </a:ln>
+        </p:spPr>
+        <p:style>
+          <a:lnRef idx="1">
+            <a:schemeClr val="accent1"/>
+          </a:lnRef>
+          <a:fillRef idx="0">
+            <a:schemeClr val="accent1"/>
+          </a:fillRef>
+          <a:effectRef idx="0">
+            <a:schemeClr val="accent1"/>
+          </a:effectRef>
+          <a:fontRef idx="minor">
+            <a:schemeClr val="tx1"/>
+          </a:fontRef>
+        </p:style>
+      </p:cxnSp>
+      <p:cxnSp>
+        <p:nvCxnSpPr>
+          <p:cNvPr id="47" name="Connecteur : en angle 46">
+            <a:extLst>
+              <a:ext uri="{FF2B5EF4-FFF2-40B4-BE49-F238E27FC236}">
+                <a16:creationId xmlns:a16="http://schemas.microsoft.com/office/drawing/2014/main" id="{0DFA7D3C-5A77-414C-9055-2ABCC4E28D5E}"/>
+              </a:ext>
+            </a:extLst>
+          </p:cNvPr>
+          <p:cNvCxnSpPr>
+            <a:cxnSpLocks/>
+            <a:stCxn id="16" idx="2"/>
+            <a:endCxn id="39" idx="0"/>
+          </p:cNvCxnSpPr>
+          <p:nvPr/>
+        </p:nvCxnSpPr>
+        <p:spPr>
+          <a:xfrm rot="16200000" flipH="1">
+            <a:off x="1630603" y="4882100"/>
+            <a:ext cx="603502" cy="631992"/>
+          </a:xfrm>
+          <a:prstGeom prst="bentConnector3">
+            <a:avLst>
+              <a:gd name="adj1" fmla="val 50000"/>
+            </a:avLst>
+          </a:prstGeom>
+          <a:ln w="38100">
+            <a:solidFill>
+              <a:srgbClr val="9073D1"/>
+            </a:solidFill>
+            <a:tailEnd type="triangle"/>
+          </a:ln>
+        </p:spPr>
+        <p:style>
+          <a:lnRef idx="1">
+            <a:schemeClr val="accent1"/>
+          </a:lnRef>
+          <a:fillRef idx="0">
+            <a:schemeClr val="accent1"/>
+          </a:fillRef>
+          <a:effectRef idx="0">
+            <a:schemeClr val="accent1"/>
+          </a:effectRef>
+          <a:fontRef idx="minor">
+            <a:schemeClr val="tx1"/>
+          </a:fontRef>
+        </p:style>
+      </p:cxnSp>
+      <p:sp>
+        <p:nvSpPr>
+          <p:cNvPr id="64" name="ZoneTexte 63">
+            <a:extLst>
+              <a:ext uri="{FF2B5EF4-FFF2-40B4-BE49-F238E27FC236}">
+                <a16:creationId xmlns:a16="http://schemas.microsoft.com/office/drawing/2014/main" id="{D440E40B-6199-4E97-B440-90385508196D}"/>
+              </a:ext>
+            </a:extLst>
+          </p:cNvPr>
+          <p:cNvSpPr txBox="1"/>
+          <p:nvPr/>
+        </p:nvSpPr>
+        <p:spPr>
+          <a:xfrm>
+            <a:off x="3059015" y="5670523"/>
+            <a:ext cx="5991439" cy="646331"/>
+          </a:xfrm>
+          <a:prstGeom prst="rect">
+            <a:avLst/>
+          </a:prstGeom>
+          <a:noFill/>
+        </p:spPr>
+        <p:txBody>
+          <a:bodyPr wrap="square" rtlCol="0">
+            <a:spAutoFit/>
+          </a:bodyPr>
+          <a:lstStyle/>
+          <a:p>
+            <a:r>
+              <a:rPr lang="fr-CA" dirty="0">
+                <a:solidFill>
+                  <a:srgbClr val="9073D1"/>
+                </a:solidFill>
+              </a:rPr>
+              <a:t>Par exemple, les fichiers </a:t>
+            </a:r>
+            <a:r>
+              <a:rPr lang="fr-CA" b="1" dirty="0">
+                <a:solidFill>
+                  <a:srgbClr val="73B3D1"/>
+                </a:solidFill>
+              </a:rPr>
+              <a:t>script.js </a:t>
+            </a:r>
+            <a:r>
+              <a:rPr lang="fr-CA" dirty="0">
+                <a:solidFill>
+                  <a:srgbClr val="9073D1"/>
+                </a:solidFill>
+              </a:rPr>
+              <a:t>et </a:t>
+            </a:r>
+            <a:r>
+              <a:rPr lang="fr-CA" b="1" dirty="0">
+                <a:solidFill>
+                  <a:srgbClr val="73B3D1"/>
+                </a:solidFill>
+              </a:rPr>
+              <a:t>widget.js </a:t>
+            </a:r>
+            <a:r>
+              <a:rPr lang="fr-CA" dirty="0">
+                <a:solidFill>
+                  <a:srgbClr val="9073D1"/>
+                </a:solidFill>
+              </a:rPr>
+              <a:t>pourraient contenir des </a:t>
+            </a:r>
+            <a:r>
+              <a:rPr lang="fr-CA" b="1" dirty="0">
+                <a:solidFill>
+                  <a:srgbClr val="9073D1"/>
+                </a:solidFill>
+              </a:rPr>
+              <a:t>déclarations de fonction </a:t>
+            </a:r>
+            <a:r>
+              <a:rPr lang="fr-CA" dirty="0">
+                <a:solidFill>
+                  <a:srgbClr val="9073D1"/>
+                </a:solidFill>
+              </a:rPr>
+              <a:t>en JavaScript !</a:t>
+            </a:r>
+          </a:p>
+        </p:txBody>
+      </p:sp>
+      <p:sp>
+        <p:nvSpPr>
+          <p:cNvPr id="65" name="Flèche : droite 64">
+            <a:extLst>
+              <a:ext uri="{FF2B5EF4-FFF2-40B4-BE49-F238E27FC236}">
+                <a16:creationId xmlns:a16="http://schemas.microsoft.com/office/drawing/2014/main" id="{93AE889D-1FEE-4494-9B51-7E688836D0AA}"/>
+              </a:ext>
+            </a:extLst>
+          </p:cNvPr>
+          <p:cNvSpPr/>
+          <p:nvPr/>
+        </p:nvSpPr>
+        <p:spPr>
+          <a:xfrm rot="10800000">
+            <a:off x="2702796" y="5744590"/>
+            <a:ext cx="316992" cy="524256"/>
+          </a:xfrm>
+          <a:prstGeom prst="rightArrow">
+            <a:avLst/>
+          </a:prstGeom>
+          <a:solidFill>
+            <a:srgbClr val="9073D1"/>
+          </a:solidFill>
+          <a:ln>
+            <a:noFill/>
+          </a:ln>
+        </p:spPr>
+        <p:style>
+          <a:lnRef idx="2">
+            <a:schemeClr val="accent1">
+              <a:shade val="50000"/>
+            </a:schemeClr>
+          </a:lnRef>
+          <a:fillRef idx="1">
+            <a:schemeClr val="accent1"/>
+          </a:fillRef>
+          <a:effectRef idx="0">
+            <a:schemeClr val="accent1"/>
+          </a:effectRef>
+          <a:fontRef idx="minor">
+            <a:schemeClr val="lt1"/>
+          </a:fontRef>
+        </p:style>
+        <p:txBody>
+          <a:bodyPr rtlCol="0" anchor="ctr"/>
+          <a:lstStyle/>
+          <a:p>
+            <a:pPr algn="ctr"/>
+            <a:endParaRPr lang="fr-CA" dirty="0"/>
+          </a:p>
+        </p:txBody>
+      </p:sp>
+      <p:sp>
+        <p:nvSpPr>
+          <p:cNvPr id="76" name="ZoneTexte 75">
+            <a:extLst>
+              <a:ext uri="{FF2B5EF4-FFF2-40B4-BE49-F238E27FC236}">
+                <a16:creationId xmlns:a16="http://schemas.microsoft.com/office/drawing/2014/main" id="{37938A01-0282-458E-AD0A-8F51FF158FD1}"/>
+              </a:ext>
+            </a:extLst>
+          </p:cNvPr>
+          <p:cNvSpPr txBox="1"/>
+          <p:nvPr/>
+        </p:nvSpPr>
+        <p:spPr>
+          <a:xfrm>
+            <a:off x="5963558" y="4192606"/>
+            <a:ext cx="6059480" cy="646331"/>
+          </a:xfrm>
+          <a:prstGeom prst="rect">
+            <a:avLst/>
+          </a:prstGeom>
+          <a:noFill/>
+        </p:spPr>
+        <p:txBody>
+          <a:bodyPr wrap="square" rtlCol="0">
+            <a:spAutoFit/>
+          </a:bodyPr>
+          <a:lstStyle/>
+          <a:p>
+            <a:r>
+              <a:rPr lang="fr-CA" dirty="0">
+                <a:solidFill>
+                  <a:srgbClr val="9073D1"/>
+                </a:solidFill>
+              </a:rPr>
+              <a:t>Ceci est un aperçu du fichier </a:t>
+            </a:r>
+            <a:r>
+              <a:rPr lang="fr-CA" b="1" dirty="0">
+                <a:solidFill>
+                  <a:srgbClr val="9073D1"/>
+                </a:solidFill>
+              </a:rPr>
+              <a:t>script.js</a:t>
+            </a:r>
+            <a:r>
+              <a:rPr lang="fr-CA" dirty="0">
+                <a:solidFill>
+                  <a:srgbClr val="9073D1"/>
+                </a:solidFill>
+              </a:rPr>
+              <a:t>, qui contient une déclaration de fonction.</a:t>
+            </a:r>
+          </a:p>
+        </p:txBody>
+      </p:sp>
+      <p:pic>
+        <p:nvPicPr>
+          <p:cNvPr id="4" name="Image 3">
+            <a:extLst>
+              <a:ext uri="{FF2B5EF4-FFF2-40B4-BE49-F238E27FC236}">
+                <a16:creationId xmlns:a16="http://schemas.microsoft.com/office/drawing/2014/main" id="{73CDCD78-4E56-4305-BD62-8C0B8ACA5FC4}"/>
+              </a:ext>
+            </a:extLst>
+          </p:cNvPr>
+          <p:cNvPicPr>
+            <a:picLocks noChangeAspect="1"/>
+          </p:cNvPicPr>
+          <p:nvPr/>
+        </p:nvPicPr>
+        <p:blipFill>
+          <a:blip r:embed="rId4"/>
+          <a:stretch>
+            <a:fillRect/>
+          </a:stretch>
+        </p:blipFill>
+        <p:spPr>
+          <a:xfrm>
+            <a:off x="5682280" y="2758179"/>
+            <a:ext cx="6040453" cy="1341642"/>
+          </a:xfrm>
+          <a:prstGeom prst="rect">
+            <a:avLst/>
+          </a:prstGeom>
+          <a:ln w="28575">
+            <a:solidFill>
+              <a:srgbClr val="9073D1"/>
+            </a:solidFill>
+          </a:ln>
+        </p:spPr>
+      </p:pic>
     </p:spTree>
     <p:extLst>
       <p:ext uri="{BB962C8B-B14F-4D97-AF65-F5344CB8AC3E}">
-        <p14:creationId xmlns:p14="http://schemas.microsoft.com/office/powerpoint/2010/main" val="733887173"/>
+        <p14:creationId xmlns:p14="http://schemas.microsoft.com/office/powerpoint/2010/main" val="4208259904"/>
       </p:ext>
     </p:extLst>
   </p:cSld>
@@ -14096,7 +14743,7 @@
           <p:cNvPr id="2" name="Espace réservé du contenu 1">
             <a:extLst>
               <a:ext uri="{FF2B5EF4-FFF2-40B4-BE49-F238E27FC236}">
-                <a16:creationId xmlns:a16="http://schemas.microsoft.com/office/drawing/2014/main" id="{B1ABC95F-058F-447B-94FC-365F82734F32}"/>
+                <a16:creationId xmlns:a16="http://schemas.microsoft.com/office/drawing/2014/main" id="{1D9D660D-4E78-4FB7-B956-02E0F30390DC}"/>
               </a:ext>
             </a:extLst>
           </p:cNvPr>
@@ -14114,130 +14761,70 @@
           <a:p>
             <a:r>
               <a:rPr lang="fr-CA" dirty="0"/>
-              <a:t> Fonctions préexistantes</a:t>
+              <a:t> Où </a:t>
+            </a:r>
+            <a:r>
+              <a:rPr lang="fr-CA" b="1" dirty="0"/>
+              <a:t>déclarer la fonction </a:t>
+            </a:r>
+            <a:r>
+              <a:rPr lang="fr-CA" dirty="0"/>
+              <a:t>?</a:t>
             </a:r>
           </a:p>
           <a:p>
             <a:pPr lvl="1"/>
             <a:r>
               <a:rPr lang="fr-CA" dirty="0"/>
-              <a:t> Certaines </a:t>
-            </a:r>
-            <a:r>
-              <a:rPr lang="fr-CA" b="1" dirty="0"/>
-              <a:t>fonctions </a:t>
-            </a:r>
-            <a:r>
-              <a:rPr lang="fr-CA" dirty="0"/>
-              <a:t>existent déjà par défaut en JavaScript. Nous n’avons donc pas besoin de les </a:t>
-            </a:r>
-            <a:r>
-              <a:rPr lang="fr-CA" b="1" dirty="0"/>
-              <a:t>déclarer</a:t>
-            </a:r>
-            <a:r>
-              <a:rPr lang="fr-CA" dirty="0"/>
-              <a:t> nous-mêmes et on peut les utiliser n’importe quand.</a:t>
+              <a:t> De plus, il faut ajouter une ligne de code HTML dans la page Web où l’on souhaite pouvoir utiliser cette fonction :</a:t>
             </a:r>
           </a:p>
           <a:p>
             <a:pPr lvl="1"/>
-            <a:r>
-              <a:rPr lang="fr-CA" dirty="0"/>
-              <a:t> Quelques exemples</a:t>
-            </a:r>
-          </a:p>
-          <a:p>
-            <a:pPr lvl="2"/>
-            <a:r>
-              <a:rPr lang="fr-CA" dirty="0"/>
-              <a:t> </a:t>
-            </a:r>
-            <a:r>
-              <a:rPr lang="fr-CA" dirty="0">
+            <a:endParaRPr lang="fr-CA" dirty="0"/>
+          </a:p>
+          <a:p>
+            <a:pPr lvl="1"/>
+            <a:endParaRPr lang="fr-CA" dirty="0"/>
+          </a:p>
+          <a:p>
+            <a:pPr lvl="1"/>
+            <a:endParaRPr lang="fr-CA" dirty="0"/>
+          </a:p>
+          <a:p>
+            <a:pPr lvl="1"/>
+            <a:endParaRPr lang="fr-CA" dirty="0"/>
+          </a:p>
+          <a:p>
+            <a:pPr lvl="1"/>
+            <a:endParaRPr lang="fr-CA" dirty="0"/>
+          </a:p>
+          <a:p>
+            <a:pPr lvl="1"/>
+            <a:endParaRPr lang="fr-CA" dirty="0"/>
+          </a:p>
+          <a:p>
+            <a:pPr lvl="1"/>
+            <a:r>
+              <a:rPr lang="fr-CA" dirty="0"/>
+              <a:t> La portion « </a:t>
+            </a:r>
+            <a:r>
+              <a:rPr lang="fr-CA" b="1" dirty="0">
                 <a:solidFill>
                   <a:srgbClr val="73B3D1"/>
                 </a:solidFill>
               </a:rPr>
-              <a:t>document.querySelector()</a:t>
-            </a:r>
-          </a:p>
-          <a:p>
-            <a:pPr lvl="2"/>
-            <a:r>
-              <a:rPr lang="fr-CA" dirty="0"/>
-              <a:t> </a:t>
-            </a:r>
-            <a:r>
-              <a:rPr lang="fr-CA" dirty="0">
-                <a:solidFill>
-                  <a:srgbClr val="73B3D1"/>
-                </a:solidFill>
-              </a:rPr>
-              <a:t>alert()</a:t>
-            </a:r>
-          </a:p>
-          <a:p>
-            <a:pPr lvl="2"/>
-            <a:r>
-              <a:rPr lang="fr-CA" dirty="0"/>
-              <a:t> </a:t>
-            </a:r>
-            <a:r>
-              <a:rPr lang="fr-CA" dirty="0">
-                <a:solidFill>
-                  <a:srgbClr val="73B3D1"/>
-                </a:solidFill>
-              </a:rPr>
-              <a:t>console.log()</a:t>
-            </a:r>
-          </a:p>
-          <a:p>
-            <a:pPr lvl="2"/>
+              <a:t>script.js </a:t>
+            </a:r>
+            <a:r>
+              <a:rPr lang="fr-CA" dirty="0"/>
+              <a:t>» correspond au nom du fichier qui contient la / les déclaration(s) de fonction.</a:t>
+            </a:r>
+          </a:p>
+          <a:p>
+            <a:pPr lvl="1"/>
             <a:endParaRPr lang="fr-CA" dirty="0"/>
-          </a:p>
-          <a:p>
-            <a:pPr lvl="1"/>
-            <a:r>
-              <a:rPr lang="fr-CA" dirty="0"/>
-              <a:t> On connait déjà </a:t>
-            </a:r>
-            <a:r>
-              <a:rPr lang="fr-CA" dirty="0">
-                <a:solidFill>
-                  <a:srgbClr val="73B3D1"/>
-                </a:solidFill>
-              </a:rPr>
-              <a:t>querySelector()</a:t>
-            </a:r>
-            <a:r>
-              <a:rPr lang="fr-CA" dirty="0"/>
-              <a:t>. Dans les prochaines diapositives, nous abordons </a:t>
-            </a:r>
-            <a:r>
-              <a:rPr lang="fr-CA" dirty="0">
-                <a:solidFill>
-                  <a:srgbClr val="73B3D1"/>
-                </a:solidFill>
-              </a:rPr>
-              <a:t>alert()</a:t>
-            </a:r>
-            <a:r>
-              <a:rPr lang="fr-CA" dirty="0"/>
-              <a:t> et </a:t>
-            </a:r>
-            <a:r>
-              <a:rPr lang="fr-CA" dirty="0">
-                <a:solidFill>
-                  <a:srgbClr val="73B3D1"/>
-                </a:solidFill>
-              </a:rPr>
-              <a:t>console.log()</a:t>
-            </a:r>
-            <a:r>
-              <a:rPr lang="fr-CA" dirty="0"/>
-              <a:t>.</a:t>
-            </a:r>
           </a:p>
         </p:txBody>
       </p:sp>
@@ -14246,7 +14833,7 @@
           <p:cNvPr id="3" name="Titre 2">
             <a:extLst>
               <a:ext uri="{FF2B5EF4-FFF2-40B4-BE49-F238E27FC236}">
-                <a16:creationId xmlns:a16="http://schemas.microsoft.com/office/drawing/2014/main" id="{CC2330FD-77E7-4DDF-A4EC-785E3A56CBBE}"/>
+                <a16:creationId xmlns:a16="http://schemas.microsoft.com/office/drawing/2014/main" id="{A7365136-E933-4296-BE91-C6C71E34AC7E}"/>
               </a:ext>
             </a:extLst>
           </p:cNvPr>
@@ -14264,7 +14851,162 @@
           <a:p>
             <a:r>
               <a:rPr lang="fr-CA" dirty="0"/>
-              <a:t>console.log() et alert()</a:t>
+              <a:t>Intro aux fonctions</a:t>
+            </a:r>
+          </a:p>
+        </p:txBody>
+      </p:sp>
+      <p:pic>
+        <p:nvPicPr>
+          <p:cNvPr id="9" name="Image 8">
+            <a:extLst>
+              <a:ext uri="{FF2B5EF4-FFF2-40B4-BE49-F238E27FC236}">
+                <a16:creationId xmlns:a16="http://schemas.microsoft.com/office/drawing/2014/main" id="{BD460D73-35C9-48AF-891C-106D574052DC}"/>
+              </a:ext>
+            </a:extLst>
+          </p:cNvPr>
+          <p:cNvPicPr>
+            <a:picLocks noChangeAspect="1"/>
+          </p:cNvPicPr>
+          <p:nvPr/>
+        </p:nvPicPr>
+        <p:blipFill>
+          <a:blip r:embed="rId2"/>
+          <a:stretch>
+            <a:fillRect/>
+          </a:stretch>
+        </p:blipFill>
+        <p:spPr>
+          <a:xfrm>
+            <a:off x="3317381" y="2447938"/>
+            <a:ext cx="5177080" cy="2050407"/>
+          </a:xfrm>
+          <a:prstGeom prst="rect">
+            <a:avLst/>
+          </a:prstGeom>
+          <a:ln w="38100">
+            <a:solidFill>
+              <a:srgbClr val="9073D1"/>
+            </a:solidFill>
+          </a:ln>
+        </p:spPr>
+      </p:pic>
+      <p:cxnSp>
+        <p:nvCxnSpPr>
+          <p:cNvPr id="6" name="Connecteur droit avec flèche 5">
+            <a:extLst>
+              <a:ext uri="{FF2B5EF4-FFF2-40B4-BE49-F238E27FC236}">
+                <a16:creationId xmlns:a16="http://schemas.microsoft.com/office/drawing/2014/main" id="{B145B07F-BAC2-435F-94F2-116C2819C9DF}"/>
+              </a:ext>
+            </a:extLst>
+          </p:cNvPr>
+          <p:cNvCxnSpPr>
+            <a:cxnSpLocks/>
+          </p:cNvCxnSpPr>
+          <p:nvPr/>
+        </p:nvCxnSpPr>
+        <p:spPr>
+          <a:xfrm>
+            <a:off x="2640868" y="4225402"/>
+            <a:ext cx="1980896" cy="0"/>
+          </a:xfrm>
+          <a:prstGeom prst="straightConnector1">
+            <a:avLst/>
+          </a:prstGeom>
+          <a:ln w="57150">
+            <a:solidFill>
+              <a:srgbClr val="9073D1"/>
+            </a:solidFill>
+            <a:tailEnd type="triangle"/>
+          </a:ln>
+        </p:spPr>
+        <p:style>
+          <a:lnRef idx="1">
+            <a:schemeClr val="accent1"/>
+          </a:lnRef>
+          <a:fillRef idx="0">
+            <a:schemeClr val="accent1"/>
+          </a:fillRef>
+          <a:effectRef idx="0">
+            <a:schemeClr val="accent1"/>
+          </a:effectRef>
+          <a:fontRef idx="minor">
+            <a:schemeClr val="tx1"/>
+          </a:fontRef>
+        </p:style>
+      </p:cxnSp>
+      <p:pic>
+        <p:nvPicPr>
+          <p:cNvPr id="10" name="Image 9">
+            <a:extLst>
+              <a:ext uri="{FF2B5EF4-FFF2-40B4-BE49-F238E27FC236}">
+                <a16:creationId xmlns:a16="http://schemas.microsoft.com/office/drawing/2014/main" id="{0995A68B-DF9C-4363-AD03-0F4BDAE91D21}"/>
+              </a:ext>
+            </a:extLst>
+          </p:cNvPr>
+          <p:cNvPicPr>
+            <a:picLocks noChangeAspect="1"/>
+          </p:cNvPicPr>
+          <p:nvPr/>
+        </p:nvPicPr>
+        <p:blipFill>
+          <a:blip r:embed="rId3">
+            <a:extLst>
+              <a:ext uri="{28A0092B-C50C-407E-A947-70E740481C1C}">
+                <a14:useLocalDpi xmlns:a14="http://schemas.microsoft.com/office/drawing/2010/main" val="0"/>
+              </a:ext>
+            </a:extLst>
+          </a:blip>
+          <a:stretch>
+            <a:fillRect/>
+          </a:stretch>
+        </p:blipFill>
+        <p:spPr>
+          <a:xfrm>
+            <a:off x="8793519" y="3626666"/>
+            <a:ext cx="525307" cy="525307"/>
+          </a:xfrm>
+          <a:prstGeom prst="rect">
+            <a:avLst/>
+          </a:prstGeom>
+        </p:spPr>
+      </p:pic>
+      <p:sp>
+        <p:nvSpPr>
+          <p:cNvPr id="11" name="ZoneTexte 10">
+            <a:extLst>
+              <a:ext uri="{FF2B5EF4-FFF2-40B4-BE49-F238E27FC236}">
+                <a16:creationId xmlns:a16="http://schemas.microsoft.com/office/drawing/2014/main" id="{2B332DAE-9558-4C12-B2C4-308569DB19F7}"/>
+              </a:ext>
+            </a:extLst>
+          </p:cNvPr>
+          <p:cNvSpPr txBox="1"/>
+          <p:nvPr/>
+        </p:nvSpPr>
+        <p:spPr>
+          <a:xfrm>
+            <a:off x="8491976" y="4045425"/>
+            <a:ext cx="1207008" cy="276999"/>
+          </a:xfrm>
+          <a:prstGeom prst="rect">
+            <a:avLst/>
+          </a:prstGeom>
+          <a:noFill/>
+        </p:spPr>
+        <p:txBody>
+          <a:bodyPr wrap="square" rtlCol="0">
+            <a:spAutoFit/>
+          </a:bodyPr>
+          <a:lstStyle/>
+          <a:p>
+            <a:pPr algn="ctr"/>
+            <a:r>
+              <a:rPr lang="fr-CA" sz="1200" b="1" dirty="0">
+                <a:solidFill>
+                  <a:srgbClr val="9073D1"/>
+                </a:solidFill>
+              </a:rPr>
+              <a:t>script.js</a:t>
             </a:r>
           </a:p>
         </p:txBody>
@@ -14272,7 +15014,7 @@
     </p:spTree>
     <p:extLst>
       <p:ext uri="{BB962C8B-B14F-4D97-AF65-F5344CB8AC3E}">
-        <p14:creationId xmlns:p14="http://schemas.microsoft.com/office/powerpoint/2010/main" val="1576714103"/>
+        <p14:creationId xmlns:p14="http://schemas.microsoft.com/office/powerpoint/2010/main" val="733887173"/>
       </p:ext>
     </p:extLst>
   </p:cSld>
@@ -14315,72 +15057,136 @@
             <p:ph idx="1"/>
           </p:nvPr>
         </p:nvSpPr>
-        <p:spPr>
-          <a:xfrm>
-            <a:off x="838200" y="1156668"/>
-            <a:ext cx="10512000" cy="5026393"/>
-          </a:xfrm>
-        </p:spPr>
+        <p:spPr/>
         <p:txBody>
           <a:bodyPr/>
           <a:lstStyle/>
           <a:p>
             <a:r>
               <a:rPr lang="fr-CA" dirty="0"/>
-              <a:t> alert()</a:t>
+              <a:t> Fonctions préexistantes</a:t>
             </a:r>
           </a:p>
           <a:p>
             <a:pPr lvl="1"/>
             <a:r>
               <a:rPr lang="fr-CA" dirty="0"/>
-              <a:t> La fonction </a:t>
-            </a:r>
-            <a:r>
-              <a:rPr lang="fr-CA" b="1" dirty="0">
+              <a:t> Certaines </a:t>
+            </a:r>
+            <a:r>
+              <a:rPr lang="fr-CA" b="1" dirty="0"/>
+              <a:t>fonctions </a:t>
+            </a:r>
+            <a:r>
+              <a:rPr lang="fr-CA" dirty="0"/>
+              <a:t>existent déjà par défaut en JavaScript. Nous n’avons donc pas besoin de les </a:t>
+            </a:r>
+            <a:r>
+              <a:rPr lang="fr-CA" b="1" dirty="0"/>
+              <a:t>déclarer</a:t>
+            </a:r>
+            <a:r>
+              <a:rPr lang="fr-CA" dirty="0"/>
+              <a:t> nous-mêmes et on peut les utiliser n’importe quand.</a:t>
+            </a:r>
+          </a:p>
+          <a:p>
+            <a:pPr lvl="1"/>
+            <a:r>
+              <a:rPr lang="fr-CA" dirty="0"/>
+              <a:t> Quelques exemples</a:t>
+            </a:r>
+          </a:p>
+          <a:p>
+            <a:pPr lvl="2"/>
+            <a:r>
+              <a:rPr lang="fr-CA" dirty="0"/>
+              <a:t> </a:t>
+            </a:r>
+            <a:r>
+              <a:rPr lang="fr-CA" dirty="0">
                 <a:solidFill>
                   <a:srgbClr val="73B3D1"/>
                 </a:solidFill>
               </a:rPr>
-              <a:t>alert() </a:t>
-            </a:r>
-            <a:r>
-              <a:rPr lang="fr-CA" dirty="0"/>
-              <a:t>permet de créer un « pop-up » dans la page avec le message de notre choix.</a:t>
+              <a:t>document.querySelector()</a:t>
             </a:r>
           </a:p>
           <a:p>
             <a:pPr lvl="2"/>
             <a:r>
               <a:rPr lang="fr-CA" dirty="0"/>
-              <a:t> Il suffit d’inclure une </a:t>
-            </a:r>
-            <a:r>
-              <a:rPr lang="fr-CA" b="1" dirty="0">
+              <a:t> </a:t>
+            </a:r>
+            <a:r>
+              <a:rPr lang="fr-CA" dirty="0">
                 <a:solidFill>
                   <a:srgbClr val="73B3D1"/>
                 </a:solidFill>
               </a:rPr>
-              <a:t>chaîne de caractères</a:t>
-            </a:r>
-            <a:r>
-              <a:rPr lang="fr-CA" dirty="0"/>
-              <a:t> à l’intérieur des </a:t>
-            </a:r>
-            <a:r>
-              <a:rPr lang="fr-CA" b="1" dirty="0"/>
-              <a:t>parenthèses</a:t>
+              <a:t>alert()</a:t>
+            </a:r>
+          </a:p>
+          <a:p>
+            <a:pPr lvl="2"/>
+            <a:r>
+              <a:rPr lang="fr-CA" dirty="0"/>
+              <a:t> </a:t>
+            </a:r>
+            <a:r>
+              <a:rPr lang="fr-CA" dirty="0">
+                <a:solidFill>
+                  <a:srgbClr val="73B3D1"/>
+                </a:solidFill>
+              </a:rPr>
+              <a:t>console.log()</a:t>
+            </a:r>
+          </a:p>
+          <a:p>
+            <a:pPr lvl="2"/>
+            <a:endParaRPr lang="fr-CA" dirty="0"/>
+          </a:p>
+          <a:p>
+            <a:pPr lvl="1"/>
+            <a:r>
+              <a:rPr lang="fr-CA" dirty="0"/>
+              <a:t> On connait déjà </a:t>
+            </a:r>
+            <a:r>
+              <a:rPr lang="fr-CA" dirty="0">
+                <a:solidFill>
+                  <a:srgbClr val="73B3D1"/>
+                </a:solidFill>
+              </a:rPr>
+              <a:t>querySelector()</a:t>
+            </a:r>
+            <a:r>
+              <a:rPr lang="fr-CA" dirty="0"/>
+              <a:t>. Dans les prochaines diapositives, nous abordons </a:t>
+            </a:r>
+            <a:r>
+              <a:rPr lang="fr-CA" dirty="0">
+                <a:solidFill>
+                  <a:srgbClr val="73B3D1"/>
+                </a:solidFill>
+              </a:rPr>
+              <a:t>alert()</a:t>
+            </a:r>
+            <a:r>
+              <a:rPr lang="fr-CA" dirty="0"/>
+              <a:t> et </a:t>
+            </a:r>
+            <a:r>
+              <a:rPr lang="fr-CA" dirty="0">
+                <a:solidFill>
+                  <a:srgbClr val="73B3D1"/>
+                </a:solidFill>
+              </a:rPr>
+              <a:t>console.log()</a:t>
             </a:r>
             <a:r>
               <a:rPr lang="fr-CA" dirty="0"/>
               <a:t>.</a:t>
-            </a:r>
-          </a:p>
-          <a:p>
-            <a:pPr lvl="2"/>
-            <a:r>
-              <a:rPr lang="fr-CA" dirty="0"/>
-              <a:t> Exemple :</a:t>
             </a:r>
           </a:p>
         </p:txBody>
@@ -14413,80 +15219,10 @@
           </a:p>
         </p:txBody>
       </p:sp>
-      <p:pic>
-        <p:nvPicPr>
-          <p:cNvPr id="5" name="Image 4">
-            <a:extLst>
-              <a:ext uri="{FF2B5EF4-FFF2-40B4-BE49-F238E27FC236}">
-                <a16:creationId xmlns:a16="http://schemas.microsoft.com/office/drawing/2014/main" id="{BB819184-A6B0-488F-AEDF-0ED6F11A4E67}"/>
-              </a:ext>
-            </a:extLst>
-          </p:cNvPr>
-          <p:cNvPicPr>
-            <a:picLocks noChangeAspect="1"/>
-          </p:cNvPicPr>
-          <p:nvPr/>
-        </p:nvPicPr>
-        <p:blipFill>
-          <a:blip r:embed="rId2"/>
-          <a:stretch>
-            <a:fillRect/>
-          </a:stretch>
-        </p:blipFill>
-        <p:spPr>
-          <a:xfrm>
-            <a:off x="492948" y="3669863"/>
-            <a:ext cx="4829849" cy="1514686"/>
-          </a:xfrm>
-          <a:prstGeom prst="rect">
-            <a:avLst/>
-          </a:prstGeom>
-          <a:ln w="28575">
-            <a:solidFill>
-              <a:srgbClr val="B177BF"/>
-            </a:solidFill>
-          </a:ln>
-        </p:spPr>
-      </p:pic>
-      <p:pic>
-        <p:nvPicPr>
-          <p:cNvPr id="7" name="Image 6">
-            <a:extLst>
-              <a:ext uri="{FF2B5EF4-FFF2-40B4-BE49-F238E27FC236}">
-                <a16:creationId xmlns:a16="http://schemas.microsoft.com/office/drawing/2014/main" id="{2053F936-5D5B-4A77-9545-44BCC572C7C4}"/>
-              </a:ext>
-            </a:extLst>
-          </p:cNvPr>
-          <p:cNvPicPr>
-            <a:picLocks noChangeAspect="1"/>
-          </p:cNvPicPr>
-          <p:nvPr/>
-        </p:nvPicPr>
-        <p:blipFill>
-          <a:blip r:embed="rId3"/>
-          <a:stretch>
-            <a:fillRect/>
-          </a:stretch>
-        </p:blipFill>
-        <p:spPr>
-          <a:xfrm>
-            <a:off x="5870448" y="3055005"/>
-            <a:ext cx="5909723" cy="2744401"/>
-          </a:xfrm>
-          <a:prstGeom prst="rect">
-            <a:avLst/>
-          </a:prstGeom>
-          <a:ln w="28575">
-            <a:solidFill>
-              <a:srgbClr val="B177BF"/>
-            </a:solidFill>
-          </a:ln>
-        </p:spPr>
-      </p:pic>
     </p:spTree>
     <p:extLst>
       <p:ext uri="{BB962C8B-B14F-4D97-AF65-F5344CB8AC3E}">
-        <p14:creationId xmlns:p14="http://schemas.microsoft.com/office/powerpoint/2010/main" val="1645308402"/>
+        <p14:creationId xmlns:p14="http://schemas.microsoft.com/office/powerpoint/2010/main" val="1576714103"/>
       </p:ext>
     </p:extLst>
   </p:cSld>
@@ -14529,14 +15265,19 @@
             <p:ph idx="1"/>
           </p:nvPr>
         </p:nvSpPr>
-        <p:spPr/>
+        <p:spPr>
+          <a:xfrm>
+            <a:off x="838200" y="1156668"/>
+            <a:ext cx="10512000" cy="5026393"/>
+          </a:xfrm>
+        </p:spPr>
         <p:txBody>
           <a:bodyPr/>
           <a:lstStyle/>
           <a:p>
             <a:r>
               <a:rPr lang="fr-CA" dirty="0"/>
-              <a:t> console.log()</a:t>
+              <a:t> alert()</a:t>
             </a:r>
           </a:p>
           <a:p>
@@ -14551,11 +15292,11 @@
                   <a:srgbClr val="73B3D1"/>
                 </a:solidFill>
               </a:rPr>
-              <a:t>console.log() </a:t>
-            </a:r>
-            <a:r>
-              <a:rPr lang="fr-CA" dirty="0"/>
-              <a:t>permet simplement d’afficher du texte dans la console du navigateur.</a:t>
+              <a:t>alert() </a:t>
+            </a:r>
+            <a:r>
+              <a:rPr lang="fr-CA" dirty="0"/>
+              <a:t>permet de créer un « pop-up » dans la page avec le message de notre choix.</a:t>
             </a:r>
           </a:p>
           <a:p>
@@ -14574,7 +15315,7 @@
             </a:r>
             <a:r>
               <a:rPr lang="fr-CA" dirty="0"/>
-              <a:t> ou une variable de notre choix à l’intérieur des </a:t>
+              <a:t> à l’intérieur des </a:t>
             </a:r>
             <a:r>
               <a:rPr lang="fr-CA" b="1" dirty="0"/>
@@ -14627,7 +15368,7 @@
           <p:cNvPr id="5" name="Image 4">
             <a:extLst>
               <a:ext uri="{FF2B5EF4-FFF2-40B4-BE49-F238E27FC236}">
-                <a16:creationId xmlns:a16="http://schemas.microsoft.com/office/drawing/2014/main" id="{B1DCF1B7-3C65-4F65-8D5A-04D390EA05F0}"/>
+                <a16:creationId xmlns:a16="http://schemas.microsoft.com/office/drawing/2014/main" id="{BB819184-A6B0-488F-AEDF-0ED6F11A4E67}"/>
               </a:ext>
             </a:extLst>
           </p:cNvPr>
@@ -14644,8 +15385,8 @@
         </p:blipFill>
         <p:spPr>
           <a:xfrm>
-            <a:off x="1662037" y="3765092"/>
-            <a:ext cx="4334480" cy="2010056"/>
+            <a:off x="492948" y="3669863"/>
+            <a:ext cx="4829849" cy="1514686"/>
           </a:xfrm>
           <a:prstGeom prst="rect">
             <a:avLst/>
@@ -14657,125 +15398,45 @@
           </a:ln>
         </p:spPr>
       </p:pic>
-      <p:sp>
-        <p:nvSpPr>
-          <p:cNvPr id="6" name="ZoneTexte 5">
-            <a:extLst>
-              <a:ext uri="{FF2B5EF4-FFF2-40B4-BE49-F238E27FC236}">
-                <a16:creationId xmlns:a16="http://schemas.microsoft.com/office/drawing/2014/main" id="{F400EDD5-1811-45AB-A7A4-CD2131FC5A4A}"/>
-              </a:ext>
-            </a:extLst>
-          </p:cNvPr>
-          <p:cNvSpPr txBox="1"/>
-          <p:nvPr/>
-        </p:nvSpPr>
-        <p:spPr>
-          <a:xfrm>
-            <a:off x="6820354" y="5279136"/>
-            <a:ext cx="3992328" cy="646331"/>
+      <p:pic>
+        <p:nvPicPr>
+          <p:cNvPr id="7" name="Image 6">
+            <a:extLst>
+              <a:ext uri="{FF2B5EF4-FFF2-40B4-BE49-F238E27FC236}">
+                <a16:creationId xmlns:a16="http://schemas.microsoft.com/office/drawing/2014/main" id="{2053F936-5D5B-4A77-9545-44BCC572C7C4}"/>
+              </a:ext>
+            </a:extLst>
+          </p:cNvPr>
+          <p:cNvPicPr>
+            <a:picLocks noChangeAspect="1"/>
+          </p:cNvPicPr>
+          <p:nvPr/>
+        </p:nvPicPr>
+        <p:blipFill>
+          <a:blip r:embed="rId3"/>
+          <a:stretch>
+            <a:fillRect/>
+          </a:stretch>
+        </p:blipFill>
+        <p:spPr>
+          <a:xfrm>
+            <a:off x="5870448" y="3055005"/>
+            <a:ext cx="5909723" cy="2744401"/>
           </a:xfrm>
           <a:prstGeom prst="rect">
             <a:avLst/>
           </a:prstGeom>
-          <a:noFill/>
-        </p:spPr>
-        <p:txBody>
-          <a:bodyPr wrap="square" rtlCol="0">
-            <a:spAutoFit/>
-          </a:bodyPr>
-          <a:lstStyle/>
-          <a:p>
-            <a:r>
-              <a:rPr lang="fr-CA" dirty="0">
-                <a:solidFill>
-                  <a:srgbClr val="B177BF"/>
-                </a:solidFill>
-              </a:rPr>
-              <a:t>La fonction </a:t>
-            </a:r>
-            <a:r>
-              <a:rPr lang="fr-CA" b="1" dirty="0">
-                <a:solidFill>
-                  <a:srgbClr val="73B3D1"/>
-                </a:solidFill>
-              </a:rPr>
-              <a:t>console.log() </a:t>
-            </a:r>
-            <a:r>
-              <a:rPr lang="fr-CA" dirty="0">
-                <a:solidFill>
-                  <a:srgbClr val="B177BF"/>
-                </a:solidFill>
-              </a:rPr>
-              <a:t>a fait apparaître ce message dans la </a:t>
-            </a:r>
-            <a:r>
-              <a:rPr lang="fr-CA" b="1" dirty="0">
-                <a:solidFill>
-                  <a:srgbClr val="B177BF"/>
-                </a:solidFill>
-              </a:rPr>
-              <a:t>console</a:t>
-            </a:r>
-            <a:r>
-              <a:rPr lang="fr-CA" dirty="0">
-                <a:solidFill>
-                  <a:srgbClr val="B177BF"/>
-                </a:solidFill>
-              </a:rPr>
-              <a:t>.</a:t>
-            </a:r>
-          </a:p>
-        </p:txBody>
-      </p:sp>
-      <p:cxnSp>
-        <p:nvCxnSpPr>
-          <p:cNvPr id="8" name="Connecteur droit avec flèche 7">
-            <a:extLst>
-              <a:ext uri="{FF2B5EF4-FFF2-40B4-BE49-F238E27FC236}">
-                <a16:creationId xmlns:a16="http://schemas.microsoft.com/office/drawing/2014/main" id="{8500F6F1-BED4-4923-8547-95B8D996F68D}"/>
-              </a:ext>
-            </a:extLst>
-          </p:cNvPr>
-          <p:cNvCxnSpPr>
-            <a:cxnSpLocks/>
-          </p:cNvCxnSpPr>
-          <p:nvPr/>
-        </p:nvCxnSpPr>
-        <p:spPr>
-          <a:xfrm flipH="1">
-            <a:off x="3511296" y="5602301"/>
-            <a:ext cx="3212592" cy="0"/>
-          </a:xfrm>
-          <a:prstGeom prst="straightConnector1">
-            <a:avLst/>
-          </a:prstGeom>
-          <a:ln w="38100">
+          <a:ln w="28575">
             <a:solidFill>
-              <a:srgbClr val="73B3D1"/>
+              <a:srgbClr val="B177BF"/>
             </a:solidFill>
-            <a:tailEnd type="triangle"/>
           </a:ln>
         </p:spPr>
-        <p:style>
-          <a:lnRef idx="1">
-            <a:schemeClr val="accent1"/>
-          </a:lnRef>
-          <a:fillRef idx="0">
-            <a:schemeClr val="accent1"/>
-          </a:fillRef>
-          <a:effectRef idx="0">
-            <a:schemeClr val="accent1"/>
-          </a:effectRef>
-          <a:fontRef idx="minor">
-            <a:schemeClr val="tx1"/>
-          </a:fontRef>
-        </p:style>
-      </p:cxnSp>
+      </p:pic>
     </p:spTree>
     <p:extLst>
       <p:ext uri="{BB962C8B-B14F-4D97-AF65-F5344CB8AC3E}">
-        <p14:creationId xmlns:p14="http://schemas.microsoft.com/office/powerpoint/2010/main" val="3276059062"/>
+        <p14:creationId xmlns:p14="http://schemas.microsoft.com/office/powerpoint/2010/main" val="1645308402"/>
       </p:ext>
     </p:extLst>
   </p:cSld>
@@ -14807,7 +15468,7 @@
           <p:cNvPr id="2" name="Espace réservé du contenu 1">
             <a:extLst>
               <a:ext uri="{FF2B5EF4-FFF2-40B4-BE49-F238E27FC236}">
-                <a16:creationId xmlns:a16="http://schemas.microsoft.com/office/drawing/2014/main" id="{4C559EB1-725E-44A8-9538-42ED69D2B241}"/>
+                <a16:creationId xmlns:a16="http://schemas.microsoft.com/office/drawing/2014/main" id="{B1ABC95F-058F-447B-94FC-365F82734F32}"/>
               </a:ext>
             </a:extLst>
           </p:cNvPr>
@@ -14820,226 +15481,65 @@
         </p:nvSpPr>
         <p:spPr/>
         <p:txBody>
-          <a:bodyPr>
-            <a:normAutofit fontScale="92500" lnSpcReduction="20000"/>
-          </a:bodyPr>
+          <a:bodyPr/>
           <a:lstStyle/>
           <a:p>
             <a:r>
+              <a:rPr lang="fr-CA" dirty="0"/>
+              <a:t> console.log()</a:t>
+            </a:r>
+          </a:p>
+          <a:p>
+            <a:pPr lvl="1"/>
+            <a:r>
+              <a:rPr lang="fr-CA" dirty="0"/>
+              <a:t> La fonction </a:t>
+            </a:r>
+            <a:r>
+              <a:rPr lang="fr-CA" b="1" dirty="0">
+                <a:solidFill>
+                  <a:srgbClr val="73B3D1"/>
+                </a:solidFill>
+              </a:rPr>
+              <a:t>console.log() </a:t>
+            </a:r>
+            <a:r>
+              <a:rPr lang="fr-CA" dirty="0"/>
+              <a:t>permet simplement d’afficher du texte dans la console du navigateur.</a:t>
+            </a:r>
+          </a:p>
+          <a:p>
+            <a:pPr lvl="2"/>
+            <a:r>
+              <a:rPr lang="fr-CA" dirty="0"/>
+              <a:t> Il suffit d’inclure une </a:t>
+            </a:r>
+            <a:r>
+              <a:rPr lang="fr-CA" b="1" dirty="0">
+                <a:solidFill>
+                  <a:srgbClr val="73B3D1"/>
+                </a:solidFill>
+              </a:rPr>
+              <a:t>chaîne de caractères</a:t>
+            </a:r>
+            <a:r>
+              <a:rPr lang="fr-CA" dirty="0"/>
+              <a:t> ou une variable de notre choix à l’intérieur des </a:t>
+            </a:r>
+            <a:r>
               <a:rPr lang="fr-CA" b="1" dirty="0"/>
-              <a:t> </a:t>
-            </a:r>
-            <a:r>
-              <a:rPr lang="fr-CA" b="1" dirty="0">
-                <a:solidFill>
-                  <a:srgbClr val="73B3D1"/>
-                </a:solidFill>
-              </a:rPr>
-              <a:t>Commentaires</a:t>
-            </a:r>
-            <a:r>
-              <a:rPr lang="fr-CA" dirty="0"/>
-              <a:t> en JavaScript</a:t>
-            </a:r>
-          </a:p>
-          <a:p>
-            <a:pPr lvl="1"/>
-            <a:endParaRPr lang="fr-CA" dirty="0"/>
-          </a:p>
-          <a:p>
-            <a:pPr lvl="1"/>
-            <a:r>
-              <a:rPr lang="fr-CA" dirty="0"/>
-              <a:t> Commentaires </a:t>
-            </a:r>
-            <a:r>
-              <a:rPr lang="fr-CA" b="1" dirty="0">
-                <a:solidFill>
-                  <a:srgbClr val="73B3D1"/>
-                </a:solidFill>
-              </a:rPr>
-              <a:t>mono-ligne</a:t>
-            </a:r>
-            <a:r>
-              <a:rPr lang="fr-CA" dirty="0"/>
-              <a:t> (Avec </a:t>
-            </a:r>
-            <a:r>
-              <a:rPr lang="fr-CA" b="1" dirty="0">
-                <a:solidFill>
-                  <a:schemeClr val="tx1"/>
-                </a:solidFill>
-                <a:latin typeface="Courier New" panose="02070309020205020404" pitchFamily="49" charset="0"/>
-                <a:cs typeface="Courier New" panose="02070309020205020404" pitchFamily="49" charset="0"/>
-              </a:rPr>
-              <a:t>//...</a:t>
-            </a:r>
-            <a:r>
-              <a:rPr lang="fr-CA" dirty="0"/>
-              <a:t>)</a:t>
+              <a:t>parenthèses</a:t>
+            </a:r>
+            <a:r>
+              <a:rPr lang="fr-CA" dirty="0"/>
+              <a:t>.</a:t>
             </a:r>
           </a:p>
           <a:p>
             <a:pPr lvl="2"/>
             <a:r>
               <a:rPr lang="fr-CA" dirty="0"/>
-              <a:t> Tout ce qui est à droite des </a:t>
-            </a:r>
-            <a:r>
-              <a:rPr lang="fr-CA" dirty="0">
-                <a:solidFill>
-                  <a:schemeClr val="tx1"/>
-                </a:solidFill>
-              </a:rPr>
-              <a:t>//</a:t>
-            </a:r>
-            <a:r>
-              <a:rPr lang="fr-CA" dirty="0"/>
-              <a:t> est un commentaire.</a:t>
-            </a:r>
-          </a:p>
-          <a:p>
-            <a:pPr marL="914400" lvl="2" indent="0">
-              <a:buNone/>
-            </a:pPr>
-            <a:endParaRPr lang="fr-CA" dirty="0"/>
-          </a:p>
-          <a:p>
-            <a:pPr marL="914400" lvl="2" indent="0">
-              <a:buNone/>
-            </a:pPr>
-            <a:endParaRPr lang="fr-CA" dirty="0"/>
-          </a:p>
-          <a:p>
-            <a:pPr marL="914400" lvl="2" indent="0">
-              <a:buNone/>
-            </a:pPr>
-            <a:endParaRPr lang="fr-CA" dirty="0"/>
-          </a:p>
-          <a:p>
-            <a:pPr marL="914400" lvl="2" indent="0">
-              <a:buNone/>
-            </a:pPr>
-            <a:endParaRPr lang="fr-CA" dirty="0"/>
-          </a:p>
-          <a:p>
-            <a:pPr lvl="1"/>
-            <a:r>
-              <a:rPr lang="fr-CA" dirty="0"/>
-              <a:t> Commentaires </a:t>
-            </a:r>
-            <a:r>
-              <a:rPr lang="fr-CA" b="1" dirty="0">
-                <a:solidFill>
-                  <a:srgbClr val="73B3D1"/>
-                </a:solidFill>
-              </a:rPr>
-              <a:t>multiligne</a:t>
-            </a:r>
-            <a:r>
-              <a:rPr lang="fr-CA" dirty="0"/>
-              <a:t> (Avec </a:t>
-            </a:r>
-            <a:r>
-              <a:rPr lang="fr-CA" b="1" dirty="0">
-                <a:solidFill>
-                  <a:schemeClr val="tx1"/>
-                </a:solidFill>
-                <a:latin typeface="Courier New" panose="02070309020205020404" pitchFamily="49" charset="0"/>
-                <a:cs typeface="Courier New" panose="02070309020205020404" pitchFamily="49" charset="0"/>
-              </a:rPr>
-              <a:t>/* ... */</a:t>
-            </a:r>
-            <a:r>
-              <a:rPr lang="fr-CA" dirty="0"/>
-              <a:t>)</a:t>
-            </a:r>
-          </a:p>
-          <a:p>
-            <a:pPr lvl="2"/>
-            <a:r>
-              <a:rPr lang="fr-CA" dirty="0"/>
-              <a:t> Le commentaire débute à </a:t>
-            </a:r>
-            <a:r>
-              <a:rPr lang="fr-CA" b="1" dirty="0">
-                <a:solidFill>
-                  <a:schemeClr val="tx1"/>
-                </a:solidFill>
-              </a:rPr>
-              <a:t>/*</a:t>
-            </a:r>
-            <a:r>
-              <a:rPr lang="fr-CA" dirty="0"/>
-              <a:t> et se termine à </a:t>
-            </a:r>
-            <a:r>
-              <a:rPr lang="fr-CA" b="1" dirty="0">
-                <a:solidFill>
-                  <a:schemeClr val="tx1"/>
-                </a:solidFill>
-              </a:rPr>
-              <a:t>*/</a:t>
-            </a:r>
-          </a:p>
-          <a:p>
-            <a:pPr marL="914400" lvl="2" indent="0">
-              <a:buNone/>
-            </a:pPr>
-            <a:endParaRPr lang="fr-CA" b="1" dirty="0">
-              <a:solidFill>
-                <a:schemeClr val="tx1"/>
-              </a:solidFill>
-            </a:endParaRPr>
-          </a:p>
-          <a:p>
-            <a:pPr lvl="2"/>
-            <a:endParaRPr lang="fr-CA" b="1" dirty="0">
-              <a:solidFill>
-                <a:schemeClr val="tx1"/>
-              </a:solidFill>
-            </a:endParaRPr>
-          </a:p>
-          <a:p>
-            <a:pPr lvl="2"/>
-            <a:endParaRPr lang="fr-CA" b="1" dirty="0">
-              <a:solidFill>
-                <a:schemeClr val="tx1"/>
-              </a:solidFill>
-            </a:endParaRPr>
-          </a:p>
-          <a:p>
-            <a:pPr lvl="2"/>
-            <a:endParaRPr lang="fr-CA" b="1" dirty="0">
-              <a:solidFill>
-                <a:schemeClr val="tx1"/>
-              </a:solidFill>
-            </a:endParaRPr>
-          </a:p>
-          <a:p>
-            <a:pPr lvl="1">
-              <a:lnSpc>
-                <a:spcPct val="120000"/>
-              </a:lnSpc>
-            </a:pPr>
-            <a:r>
-              <a:rPr lang="fr-CA" dirty="0"/>
-              <a:t> Les commentaires permettent de faire des annotations dans le code. </a:t>
-            </a:r>
-            <a:r>
-              <a:rPr lang="fr-CA" b="1" u="sng" dirty="0"/>
-              <a:t>Ils sont ignorés lorsque l’application est exécutée</a:t>
-            </a:r>
-            <a:r>
-              <a:rPr lang="fr-CA" dirty="0"/>
-              <a:t>.</a:t>
-            </a:r>
-          </a:p>
-          <a:p>
-            <a:pPr lvl="2"/>
-            <a:r>
-              <a:rPr lang="fr-CA" dirty="0"/>
-              <a:t> Ça sert à laisser des notes / descriptions dans le code pour se retrouver !</a:t>
+              <a:t> Exemple :</a:t>
             </a:r>
           </a:p>
         </p:txBody>
@@ -15049,7 +15549,7 @@
           <p:cNvPr id="3" name="Titre 2">
             <a:extLst>
               <a:ext uri="{FF2B5EF4-FFF2-40B4-BE49-F238E27FC236}">
-                <a16:creationId xmlns:a16="http://schemas.microsoft.com/office/drawing/2014/main" id="{D99C4BC5-AE1E-4643-9F3D-C487502B3438}"/>
+                <a16:creationId xmlns:a16="http://schemas.microsoft.com/office/drawing/2014/main" id="{CC2330FD-77E7-4DDF-A4EC-785E3A56CBBE}"/>
               </a:ext>
             </a:extLst>
           </p:cNvPr>
@@ -15067,17 +15567,17 @@
           <a:p>
             <a:r>
               <a:rPr lang="fr-CA" dirty="0"/>
-              <a:t>Commentaires en JavaScript</a:t>
+              <a:t>console.log() et alert()</a:t>
             </a:r>
           </a:p>
         </p:txBody>
       </p:sp>
       <p:pic>
         <p:nvPicPr>
-          <p:cNvPr id="6" name="Image 5">
-            <a:extLst>
-              <a:ext uri="{FF2B5EF4-FFF2-40B4-BE49-F238E27FC236}">
-                <a16:creationId xmlns:a16="http://schemas.microsoft.com/office/drawing/2014/main" id="{56ACBD49-02A8-4505-865F-A9894772E003}"/>
+          <p:cNvPr id="5" name="Image 4">
+            <a:extLst>
+              <a:ext uri="{FF2B5EF4-FFF2-40B4-BE49-F238E27FC236}">
+                <a16:creationId xmlns:a16="http://schemas.microsoft.com/office/drawing/2014/main" id="{B1DCF1B7-3C65-4F65-8D5A-04D390EA05F0}"/>
               </a:ext>
             </a:extLst>
           </p:cNvPr>
@@ -15094,58 +15594,138 @@
         </p:blipFill>
         <p:spPr>
           <a:xfrm>
-            <a:off x="7377586" y="1320840"/>
-            <a:ext cx="4544549" cy="1204476"/>
+            <a:off x="1662037" y="3765092"/>
+            <a:ext cx="4334480" cy="2010056"/>
           </a:xfrm>
           <a:prstGeom prst="rect">
             <a:avLst/>
           </a:prstGeom>
-          <a:ln w="38100">
+          <a:ln w="28575">
             <a:solidFill>
               <a:srgbClr val="B177BF"/>
             </a:solidFill>
           </a:ln>
         </p:spPr>
       </p:pic>
-      <p:pic>
-        <p:nvPicPr>
-          <p:cNvPr id="8" name="Image 7">
-            <a:extLst>
-              <a:ext uri="{FF2B5EF4-FFF2-40B4-BE49-F238E27FC236}">
-                <a16:creationId xmlns:a16="http://schemas.microsoft.com/office/drawing/2014/main" id="{9180336D-6ABD-4CF1-BF25-7D14841FF5B3}"/>
-              </a:ext>
-            </a:extLst>
-          </p:cNvPr>
-          <p:cNvPicPr>
-            <a:picLocks noChangeAspect="1"/>
-          </p:cNvPicPr>
-          <p:nvPr/>
-        </p:nvPicPr>
-        <p:blipFill>
-          <a:blip r:embed="rId3"/>
-          <a:stretch>
-            <a:fillRect/>
-          </a:stretch>
-        </p:blipFill>
-        <p:spPr>
-          <a:xfrm>
-            <a:off x="7377586" y="2892333"/>
-            <a:ext cx="4525006" cy="1705213"/>
+      <p:sp>
+        <p:nvSpPr>
+          <p:cNvPr id="6" name="ZoneTexte 5">
+            <a:extLst>
+              <a:ext uri="{FF2B5EF4-FFF2-40B4-BE49-F238E27FC236}">
+                <a16:creationId xmlns:a16="http://schemas.microsoft.com/office/drawing/2014/main" id="{F400EDD5-1811-45AB-A7A4-CD2131FC5A4A}"/>
+              </a:ext>
+            </a:extLst>
+          </p:cNvPr>
+          <p:cNvSpPr txBox="1"/>
+          <p:nvPr/>
+        </p:nvSpPr>
+        <p:spPr>
+          <a:xfrm>
+            <a:off x="6820354" y="5279136"/>
+            <a:ext cx="3992328" cy="646331"/>
           </a:xfrm>
           <a:prstGeom prst="rect">
+            <a:avLst/>
+          </a:prstGeom>
+          <a:noFill/>
+        </p:spPr>
+        <p:txBody>
+          <a:bodyPr wrap="square" rtlCol="0">
+            <a:spAutoFit/>
+          </a:bodyPr>
+          <a:lstStyle/>
+          <a:p>
+            <a:r>
+              <a:rPr lang="fr-CA" dirty="0">
+                <a:solidFill>
+                  <a:srgbClr val="B177BF"/>
+                </a:solidFill>
+              </a:rPr>
+              <a:t>La fonction </a:t>
+            </a:r>
+            <a:r>
+              <a:rPr lang="fr-CA" b="1" dirty="0">
+                <a:solidFill>
+                  <a:srgbClr val="73B3D1"/>
+                </a:solidFill>
+              </a:rPr>
+              <a:t>console.log() </a:t>
+            </a:r>
+            <a:r>
+              <a:rPr lang="fr-CA" dirty="0">
+                <a:solidFill>
+                  <a:srgbClr val="B177BF"/>
+                </a:solidFill>
+              </a:rPr>
+              <a:t>a fait apparaître ce message dans la </a:t>
+            </a:r>
+            <a:r>
+              <a:rPr lang="fr-CA" b="1" dirty="0">
+                <a:solidFill>
+                  <a:srgbClr val="B177BF"/>
+                </a:solidFill>
+              </a:rPr>
+              <a:t>console</a:t>
+            </a:r>
+            <a:r>
+              <a:rPr lang="fr-CA" dirty="0">
+                <a:solidFill>
+                  <a:srgbClr val="B177BF"/>
+                </a:solidFill>
+              </a:rPr>
+              <a:t>.</a:t>
+            </a:r>
+          </a:p>
+        </p:txBody>
+      </p:sp>
+      <p:cxnSp>
+        <p:nvCxnSpPr>
+          <p:cNvPr id="8" name="Connecteur droit avec flèche 7">
+            <a:extLst>
+              <a:ext uri="{FF2B5EF4-FFF2-40B4-BE49-F238E27FC236}">
+                <a16:creationId xmlns:a16="http://schemas.microsoft.com/office/drawing/2014/main" id="{8500F6F1-BED4-4923-8547-95B8D996F68D}"/>
+              </a:ext>
+            </a:extLst>
+          </p:cNvPr>
+          <p:cNvCxnSpPr>
+            <a:cxnSpLocks/>
+          </p:cNvCxnSpPr>
+          <p:nvPr/>
+        </p:nvCxnSpPr>
+        <p:spPr>
+          <a:xfrm flipH="1">
+            <a:off x="3511296" y="5602301"/>
+            <a:ext cx="3212592" cy="0"/>
+          </a:xfrm>
+          <a:prstGeom prst="straightConnector1">
             <a:avLst/>
           </a:prstGeom>
           <a:ln w="38100">
             <a:solidFill>
-              <a:srgbClr val="B177BF"/>
+              <a:srgbClr val="73B3D1"/>
             </a:solidFill>
+            <a:tailEnd type="triangle"/>
           </a:ln>
         </p:spPr>
-      </p:pic>
+        <p:style>
+          <a:lnRef idx="1">
+            <a:schemeClr val="accent1"/>
+          </a:lnRef>
+          <a:fillRef idx="0">
+            <a:schemeClr val="accent1"/>
+          </a:fillRef>
+          <a:effectRef idx="0">
+            <a:schemeClr val="accent1"/>
+          </a:effectRef>
+          <a:fontRef idx="minor">
+            <a:schemeClr val="tx1"/>
+          </a:fontRef>
+        </p:style>
+      </p:cxnSp>
     </p:spTree>
     <p:extLst>
       <p:ext uri="{BB962C8B-B14F-4D97-AF65-F5344CB8AC3E}">
-        <p14:creationId xmlns:p14="http://schemas.microsoft.com/office/powerpoint/2010/main" val="4289168683"/>
+        <p14:creationId xmlns:p14="http://schemas.microsoft.com/office/powerpoint/2010/main" val="3276059062"/>
       </p:ext>
     </p:extLst>
   </p:cSld>
@@ -15177,7 +15757,7 @@
           <p:cNvPr id="2" name="Espace réservé du contenu 1">
             <a:extLst>
               <a:ext uri="{FF2B5EF4-FFF2-40B4-BE49-F238E27FC236}">
-                <a16:creationId xmlns:a16="http://schemas.microsoft.com/office/drawing/2014/main" id="{8766BE5C-20A6-4A56-BF0E-600D23B44A52}"/>
+                <a16:creationId xmlns:a16="http://schemas.microsoft.com/office/drawing/2014/main" id="{4C559EB1-725E-44A8-9538-42ED69D2B241}"/>
               </a:ext>
             </a:extLst>
           </p:cNvPr>
@@ -15188,36 +15768,72 @@
             <p:ph idx="1"/>
           </p:nvPr>
         </p:nvSpPr>
-        <p:spPr>
-          <a:xfrm>
-            <a:off x="838200" y="1150572"/>
-            <a:ext cx="6989064" cy="5026393"/>
-          </a:xfrm>
-        </p:spPr>
+        <p:spPr/>
         <p:txBody>
-          <a:bodyPr/>
+          <a:bodyPr>
+            <a:normAutofit fontScale="92500" lnSpcReduction="20000"/>
+          </a:bodyPr>
           <a:lstStyle/>
           <a:p>
             <a:r>
-              <a:rPr lang="fr-CA" dirty="0"/>
-              <a:t> Créer une fonction</a:t>
+              <a:rPr lang="fr-CA" b="1" dirty="0"/>
+              <a:t> </a:t>
+            </a:r>
+            <a:r>
+              <a:rPr lang="fr-CA" b="1" dirty="0">
+                <a:solidFill>
+                  <a:srgbClr val="73B3D1"/>
+                </a:solidFill>
+              </a:rPr>
+              <a:t>Commentaires</a:t>
+            </a:r>
+            <a:r>
+              <a:rPr lang="fr-CA" dirty="0"/>
+              <a:t> en JavaScript</a:t>
             </a:r>
           </a:p>
           <a:p>
             <a:pPr lvl="1"/>
-            <a:r>
-              <a:rPr lang="fr-CA" dirty="0"/>
-              <a:t> Exemple : J’aimerais coder une fonction qui fait les choses suivantes :</a:t>
-            </a:r>
-          </a:p>
-          <a:p>
-            <a:pPr marL="1371600" lvl="2" indent="-457200">
-              <a:buFont typeface="+mj-lt"/>
-              <a:buAutoNum type="arabicParenR"/>
-            </a:pPr>
-            <a:r>
-              <a:rPr lang="fr-CA" dirty="0"/>
-              <a:t> Remplace le texte « </a:t>
+            <a:endParaRPr lang="fr-CA" dirty="0"/>
+          </a:p>
+          <a:p>
+            <a:pPr lvl="1"/>
+            <a:r>
+              <a:rPr lang="fr-CA" dirty="0"/>
+              <a:t> Commentaires </a:t>
+            </a:r>
+            <a:r>
+              <a:rPr lang="fr-CA" b="1" dirty="0">
+                <a:solidFill>
+                  <a:srgbClr val="73B3D1"/>
+                </a:solidFill>
+              </a:rPr>
+              <a:t>mono-ligne</a:t>
+            </a:r>
+            <a:r>
+              <a:rPr lang="fr-CA" dirty="0"/>
+              <a:t> (Avec </a:t>
+            </a:r>
+            <a:r>
+              <a:rPr lang="fr-CA" b="1" dirty="0">
+                <a:solidFill>
+                  <a:schemeClr val="tx1"/>
+                </a:solidFill>
+                <a:latin typeface="Courier New" panose="02070309020205020404" pitchFamily="49" charset="0"/>
+                <a:cs typeface="Courier New" panose="02070309020205020404" pitchFamily="49" charset="0"/>
+              </a:rPr>
+              <a:t>//...</a:t>
+            </a:r>
+            <a:r>
+              <a:rPr lang="fr-CA" dirty="0"/>
+              <a:t>)</a:t>
+            </a:r>
+          </a:p>
+          <a:p>
+            <a:pPr lvl="2"/>
+            <a:r>
+              <a:rPr lang="fr-CA" dirty="0"/>
+              <a:t> Tout ce qui est à droite des </a:t>
             </a:r>
             <a:r>
               <a:rPr lang="fr-CA" dirty="0">
@@ -15225,97 +15841,155 @@
                   <a:schemeClr val="tx1"/>
                 </a:solidFill>
               </a:rPr>
-              <a:t>est le meilleur chat. </a:t>
-            </a:r>
-            <a:r>
-              <a:rPr lang="fr-CA" dirty="0"/>
-              <a:t>» par « </a:t>
-            </a:r>
-            <a:r>
-              <a:rPr lang="fr-CA" dirty="0">
-                <a:solidFill>
-                  <a:schemeClr val="tx1"/>
-                </a:solidFill>
-              </a:rPr>
-              <a:t>veut manger sa salade en paix. </a:t>
-            </a:r>
-            <a:r>
-              <a:rPr lang="fr-CA" dirty="0"/>
-              <a:t>» dans la page.</a:t>
-            </a:r>
-          </a:p>
-          <a:p>
-            <a:pPr marL="1371600" lvl="2" indent="-457200">
-              <a:buFont typeface="+mj-lt"/>
-              <a:buAutoNum type="arabicParenR"/>
-            </a:pPr>
-            <a:r>
-              <a:rPr lang="fr-CA" dirty="0"/>
-              <a:t> Fait un </a:t>
-            </a:r>
-            <a:r>
-              <a:rPr lang="fr-CA" b="1" dirty="0"/>
-              <a:t>pop-up</a:t>
-            </a:r>
-            <a:r>
-              <a:rPr lang="fr-CA" dirty="0"/>
-              <a:t> avec le message « </a:t>
-            </a:r>
-            <a:r>
-              <a:rPr lang="fr-CA" dirty="0">
-                <a:solidFill>
-                  <a:schemeClr val="tx1"/>
-                </a:solidFill>
-              </a:rPr>
-              <a:t>Texte changé ! </a:t>
-            </a:r>
-            <a:r>
-              <a:rPr lang="fr-CA" dirty="0"/>
-              <a:t>».</a:t>
-            </a:r>
-          </a:p>
-          <a:p>
-            <a:pPr marL="1371600" lvl="2" indent="-457200">
-              <a:buFont typeface="+mj-lt"/>
-              <a:buAutoNum type="arabicParenR"/>
-            </a:pPr>
-            <a:r>
-              <a:rPr lang="fr-CA" dirty="0"/>
-              <a:t> Affiche le message « </a:t>
-            </a:r>
-            <a:r>
-              <a:rPr lang="fr-CA" dirty="0">
-                <a:solidFill>
-                  <a:schemeClr val="tx1"/>
-                </a:solidFill>
-              </a:rPr>
-              <a:t>Fonction terminée. </a:t>
-            </a:r>
-            <a:r>
-              <a:rPr lang="fr-CA" dirty="0"/>
-              <a:t>» dans la </a:t>
-            </a:r>
-            <a:r>
-              <a:rPr lang="fr-CA" b="1" dirty="0"/>
-              <a:t>console</a:t>
-            </a:r>
-            <a:r>
-              <a:rPr lang="fr-CA" dirty="0"/>
-              <a:t>.</a:t>
-            </a:r>
-          </a:p>
-          <a:p>
-            <a:pPr marL="1371600" lvl="2" indent="-457200">
-              <a:buFont typeface="+mj-lt"/>
-              <a:buAutoNum type="arabicParenR"/>
+              <a:t>//</a:t>
+            </a:r>
+            <a:r>
+              <a:rPr lang="fr-CA" dirty="0"/>
+              <a:t> est un commentaire.</a:t>
+            </a:r>
+          </a:p>
+          <a:p>
+            <a:pPr marL="914400" lvl="2" indent="0">
+              <a:buNone/>
             </a:pPr>
             <a:endParaRPr lang="fr-CA" dirty="0"/>
           </a:p>
           <a:p>
+            <a:pPr marL="914400" lvl="2" indent="0">
+              <a:buNone/>
+            </a:pPr>
+            <a:endParaRPr lang="fr-CA" dirty="0"/>
+          </a:p>
+          <a:p>
+            <a:pPr marL="914400" lvl="2" indent="0">
+              <a:buNone/>
+            </a:pPr>
+            <a:endParaRPr lang="fr-CA" dirty="0"/>
+          </a:p>
+          <a:p>
+            <a:pPr marL="914400" lvl="2" indent="0">
+              <a:buNone/>
+            </a:pPr>
+            <a:endParaRPr lang="fr-CA" dirty="0"/>
+          </a:p>
+          <a:p>
             <a:pPr lvl="1"/>
             <a:r>
               <a:rPr lang="fr-CA" dirty="0"/>
-              <a:t> Nous allons construire notre fonction étape par étape dans les prochaines diapositives.</a:t>
+              <a:t> Commentaires </a:t>
+            </a:r>
+            <a:r>
+              <a:rPr lang="fr-CA" b="1" dirty="0">
+                <a:solidFill>
+                  <a:srgbClr val="73B3D1"/>
+                </a:solidFill>
+              </a:rPr>
+              <a:t>multiligne</a:t>
+            </a:r>
+            <a:r>
+              <a:rPr lang="fr-CA" dirty="0"/>
+              <a:t> (Avec </a:t>
+            </a:r>
+            <a:r>
+              <a:rPr lang="fr-CA" b="1" dirty="0">
+                <a:solidFill>
+                  <a:schemeClr val="tx1"/>
+                </a:solidFill>
+                <a:latin typeface="Courier New" panose="02070309020205020404" pitchFamily="49" charset="0"/>
+                <a:cs typeface="Courier New" panose="02070309020205020404" pitchFamily="49" charset="0"/>
+              </a:rPr>
+              <a:t>/* ... */</a:t>
+            </a:r>
+            <a:r>
+              <a:rPr lang="fr-CA" dirty="0"/>
+              <a:t>)</a:t>
+            </a:r>
+          </a:p>
+          <a:p>
+            <a:pPr lvl="2"/>
+            <a:r>
+              <a:rPr lang="fr-CA" dirty="0"/>
+              <a:t> Le commentaire débute à </a:t>
+            </a:r>
+            <a:r>
+              <a:rPr lang="fr-CA" b="1" dirty="0">
+                <a:solidFill>
+                  <a:schemeClr val="tx1"/>
+                </a:solidFill>
+              </a:rPr>
+              <a:t>/*</a:t>
+            </a:r>
+            <a:r>
+              <a:rPr lang="fr-CA" dirty="0"/>
+              <a:t> et se termine à </a:t>
+            </a:r>
+            <a:r>
+              <a:rPr lang="fr-CA" b="1" dirty="0">
+                <a:solidFill>
+                  <a:schemeClr val="tx1"/>
+                </a:solidFill>
+              </a:rPr>
+              <a:t>*/</a:t>
+            </a:r>
+          </a:p>
+          <a:p>
+            <a:pPr marL="914400" lvl="2" indent="0">
+              <a:buNone/>
+            </a:pPr>
+            <a:endParaRPr lang="fr-CA" b="1" dirty="0">
+              <a:solidFill>
+                <a:schemeClr val="tx1"/>
+              </a:solidFill>
+            </a:endParaRPr>
+          </a:p>
+          <a:p>
+            <a:pPr lvl="2"/>
+            <a:endParaRPr lang="fr-CA" b="1" dirty="0">
+              <a:solidFill>
+                <a:schemeClr val="tx1"/>
+              </a:solidFill>
+            </a:endParaRPr>
+          </a:p>
+          <a:p>
+            <a:pPr lvl="2"/>
+            <a:endParaRPr lang="fr-CA" b="1" dirty="0">
+              <a:solidFill>
+                <a:schemeClr val="tx1"/>
+              </a:solidFill>
+            </a:endParaRPr>
+          </a:p>
+          <a:p>
+            <a:pPr lvl="2"/>
+            <a:endParaRPr lang="fr-CA" b="1" dirty="0">
+              <a:solidFill>
+                <a:schemeClr val="tx1"/>
+              </a:solidFill>
+            </a:endParaRPr>
+          </a:p>
+          <a:p>
+            <a:pPr lvl="1">
+              <a:lnSpc>
+                <a:spcPct val="120000"/>
+              </a:lnSpc>
+            </a:pPr>
+            <a:r>
+              <a:rPr lang="fr-CA" dirty="0"/>
+              <a:t> Les commentaires permettent de faire des annotations dans le code. </a:t>
+            </a:r>
+            <a:r>
+              <a:rPr lang="fr-CA" b="1" u="sng" dirty="0"/>
+              <a:t>Ils sont ignorés lorsque l’application est exécutée</a:t>
+            </a:r>
+            <a:r>
+              <a:rPr lang="fr-CA" dirty="0"/>
+              <a:t>.</a:t>
+            </a:r>
+          </a:p>
+          <a:p>
+            <a:pPr lvl="2"/>
+            <a:r>
+              <a:rPr lang="fr-CA" dirty="0"/>
+              <a:t> Ça sert à laisser des notes / descriptions dans le code pour se retrouver !</a:t>
             </a:r>
           </a:p>
         </p:txBody>
@@ -15325,7 +15999,7 @@
           <p:cNvPr id="3" name="Titre 2">
             <a:extLst>
               <a:ext uri="{FF2B5EF4-FFF2-40B4-BE49-F238E27FC236}">
-                <a16:creationId xmlns:a16="http://schemas.microsoft.com/office/drawing/2014/main" id="{42668B4F-8D6C-49A7-A85E-3A815E202D69}"/>
+                <a16:creationId xmlns:a16="http://schemas.microsoft.com/office/drawing/2014/main" id="{D99C4BC5-AE1E-4643-9F3D-C487502B3438}"/>
               </a:ext>
             </a:extLst>
           </p:cNvPr>
@@ -15343,17 +16017,17 @@
           <a:p>
             <a:r>
               <a:rPr lang="fr-CA" dirty="0"/>
-              <a:t>Intro aux fonctions</a:t>
+              <a:t>Commentaires en JavaScript</a:t>
             </a:r>
           </a:p>
         </p:txBody>
       </p:sp>
       <p:pic>
         <p:nvPicPr>
-          <p:cNvPr id="5" name="Image 4">
-            <a:extLst>
-              <a:ext uri="{FF2B5EF4-FFF2-40B4-BE49-F238E27FC236}">
-                <a16:creationId xmlns:a16="http://schemas.microsoft.com/office/drawing/2014/main" id="{F262F67C-928A-4129-BFB0-E6202A031ECC}"/>
+          <p:cNvPr id="6" name="Image 5">
+            <a:extLst>
+              <a:ext uri="{FF2B5EF4-FFF2-40B4-BE49-F238E27FC236}">
+                <a16:creationId xmlns:a16="http://schemas.microsoft.com/office/drawing/2014/main" id="{56ACBD49-02A8-4505-865F-A9894772E003}"/>
               </a:ext>
             </a:extLst>
           </p:cNvPr>
@@ -15370,65 +16044,58 @@
         </p:blipFill>
         <p:spPr>
           <a:xfrm>
-            <a:off x="8058264" y="1021149"/>
-            <a:ext cx="3829584" cy="1743318"/>
+            <a:off x="7377586" y="1320840"/>
+            <a:ext cx="4544549" cy="1204476"/>
           </a:xfrm>
           <a:prstGeom prst="rect">
             <a:avLst/>
           </a:prstGeom>
-          <a:ln w="28575">
+          <a:ln w="38100">
             <a:solidFill>
-              <a:srgbClr val="9073D1"/>
+              <a:srgbClr val="B177BF"/>
             </a:solidFill>
           </a:ln>
         </p:spPr>
       </p:pic>
-      <p:cxnSp>
-        <p:nvCxnSpPr>
-          <p:cNvPr id="7" name="Connecteur droit avec flèche 6">
-            <a:extLst>
-              <a:ext uri="{FF2B5EF4-FFF2-40B4-BE49-F238E27FC236}">
-                <a16:creationId xmlns:a16="http://schemas.microsoft.com/office/drawing/2014/main" id="{8B0DE27D-D6A5-4ADA-B51B-74B8FBE38D2A}"/>
-              </a:ext>
-            </a:extLst>
-          </p:cNvPr>
-          <p:cNvCxnSpPr/>
-          <p:nvPr/>
-        </p:nvCxnSpPr>
-        <p:spPr>
-          <a:xfrm flipH="1">
-            <a:off x="9406128" y="1414272"/>
-            <a:ext cx="493776" cy="243840"/>
-          </a:xfrm>
-          <a:prstGeom prst="straightConnector1">
+      <p:pic>
+        <p:nvPicPr>
+          <p:cNvPr id="8" name="Image 7">
+            <a:extLst>
+              <a:ext uri="{FF2B5EF4-FFF2-40B4-BE49-F238E27FC236}">
+                <a16:creationId xmlns:a16="http://schemas.microsoft.com/office/drawing/2014/main" id="{9180336D-6ABD-4CF1-BF25-7D14841FF5B3}"/>
+              </a:ext>
+            </a:extLst>
+          </p:cNvPr>
+          <p:cNvPicPr>
+            <a:picLocks noChangeAspect="1"/>
+          </p:cNvPicPr>
+          <p:nvPr/>
+        </p:nvPicPr>
+        <p:blipFill>
+          <a:blip r:embed="rId3"/>
+          <a:stretch>
+            <a:fillRect/>
+          </a:stretch>
+        </p:blipFill>
+        <p:spPr>
+          <a:xfrm>
+            <a:off x="7377586" y="2892333"/>
+            <a:ext cx="4525006" cy="1705213"/>
+          </a:xfrm>
+          <a:prstGeom prst="rect">
             <a:avLst/>
           </a:prstGeom>
           <a:ln w="38100">
             <a:solidFill>
-              <a:srgbClr val="73B3D1"/>
+              <a:srgbClr val="B177BF"/>
             </a:solidFill>
-            <a:tailEnd type="triangle"/>
           </a:ln>
         </p:spPr>
-        <p:style>
-          <a:lnRef idx="1">
-            <a:schemeClr val="accent1"/>
-          </a:lnRef>
-          <a:fillRef idx="0">
-            <a:schemeClr val="accent1"/>
-          </a:fillRef>
-          <a:effectRef idx="0">
-            <a:schemeClr val="accent1"/>
-          </a:effectRef>
-          <a:fontRef idx="minor">
-            <a:schemeClr val="tx1"/>
-          </a:fontRef>
-        </p:style>
-      </p:cxnSp>
+      </p:pic>
     </p:spTree>
     <p:extLst>
       <p:ext uri="{BB962C8B-B14F-4D97-AF65-F5344CB8AC3E}">
-        <p14:creationId xmlns:p14="http://schemas.microsoft.com/office/powerpoint/2010/main" val="3441020453"/>
+        <p14:creationId xmlns:p14="http://schemas.microsoft.com/office/powerpoint/2010/main" val="4289168683"/>
       </p:ext>
     </p:extLst>
   </p:cSld>
@@ -15471,7 +16138,12 @@
             <p:ph idx="1"/>
           </p:nvPr>
         </p:nvSpPr>
-        <p:spPr/>
+        <p:spPr>
+          <a:xfrm>
+            <a:off x="838200" y="1150572"/>
+            <a:ext cx="6989064" cy="5026393"/>
+          </a:xfrm>
+        </p:spPr>
         <p:txBody>
           <a:bodyPr/>
           <a:lstStyle/>
@@ -15485,46 +16157,115 @@
             <a:pPr lvl="1"/>
             <a:r>
               <a:rPr lang="fr-CA" dirty="0"/>
-              <a:t> </a:t>
+              <a:t> Exemple : J’aimerais coder une fonction qui fait les choses suivantes :</a:t>
+            </a:r>
+          </a:p>
+          <a:p>
+            <a:pPr marL="1371600" lvl="2" indent="-457200">
+              <a:buFont typeface="+mj-lt"/>
+              <a:buAutoNum type="arabicParenR"/>
+            </a:pPr>
+            <a:r>
+              <a:rPr lang="fr-CA" dirty="0"/>
+              <a:t> Remplace le texte « </a:t>
             </a:r>
             <a:r>
               <a:rPr lang="fr-CA" dirty="0">
                 <a:solidFill>
-                  <a:srgbClr val="FA4098"/>
-                </a:solidFill>
-              </a:rPr>
-              <a:t>Étape 1</a:t>
-            </a:r>
-            <a:r>
-              <a:rPr lang="fr-CA" dirty="0"/>
-              <a:t> : Trouver le fichier </a:t>
+                  <a:schemeClr val="tx1"/>
+                </a:solidFill>
+              </a:rPr>
+              <a:t>est le meilleur chat. </a:t>
+            </a:r>
+            <a:r>
+              <a:rPr lang="fr-CA" dirty="0"/>
+              <a:t>» par « </a:t>
             </a:r>
             <a:r>
               <a:rPr lang="fr-CA" dirty="0">
                 <a:solidFill>
-                  <a:srgbClr val="73B3D1"/>
-                </a:solidFill>
-              </a:rPr>
-              <a:t>scripts.js </a:t>
-            </a:r>
-            <a:r>
-              <a:rPr lang="fr-CA" dirty="0"/>
-              <a:t>dans notre projet Web. (Ou le créer s’il n’existe pas)</a:t>
-            </a:r>
-          </a:p>
-          <a:p>
-            <a:pPr lvl="2"/>
-            <a:r>
-              <a:rPr lang="fr-CA" dirty="0"/>
-              <a:t> Ce fichier doit être situé dans le dossier « </a:t>
+                  <a:schemeClr val="tx1"/>
+                </a:solidFill>
+              </a:rPr>
+              <a:t>veut manger sa salade en paix. </a:t>
+            </a:r>
+            <a:r>
+              <a:rPr lang="fr-CA" dirty="0"/>
+              <a:t>» dans la page.</a:t>
+            </a:r>
+          </a:p>
+          <a:p>
+            <a:pPr marL="1371600" lvl="2" indent="-457200">
+              <a:buFont typeface="+mj-lt"/>
+              <a:buAutoNum type="arabicParenR"/>
+            </a:pPr>
+            <a:r>
+              <a:rPr lang="fr-CA" dirty="0"/>
+              <a:t> Fait un </a:t>
             </a:r>
             <a:r>
               <a:rPr lang="fr-CA" b="1" dirty="0"/>
-              <a:t>js</a:t>
-            </a:r>
-            <a:r>
-              <a:rPr lang="fr-CA" dirty="0"/>
-              <a:t> » de notre projet Web.</a:t>
+              <a:t>pop-up</a:t>
+            </a:r>
+            <a:r>
+              <a:rPr lang="fr-CA" dirty="0"/>
+              <a:t> avec le message « </a:t>
+            </a:r>
+            <a:r>
+              <a:rPr lang="fr-CA" dirty="0">
+                <a:solidFill>
+                  <a:schemeClr val="tx1"/>
+                </a:solidFill>
+              </a:rPr>
+              <a:t>Texte changé ! </a:t>
+            </a:r>
+            <a:r>
+              <a:rPr lang="fr-CA" dirty="0"/>
+              <a:t>».</a:t>
+            </a:r>
+          </a:p>
+          <a:p>
+            <a:pPr marL="1371600" lvl="2" indent="-457200">
+              <a:buFont typeface="+mj-lt"/>
+              <a:buAutoNum type="arabicParenR"/>
+            </a:pPr>
+            <a:r>
+              <a:rPr lang="fr-CA" dirty="0"/>
+              <a:t> Affiche le message « </a:t>
+            </a:r>
+            <a:r>
+              <a:rPr lang="fr-CA" dirty="0">
+                <a:solidFill>
+                  <a:schemeClr val="tx1"/>
+                </a:solidFill>
+              </a:rPr>
+              <a:t>Fonction terminée. </a:t>
+            </a:r>
+            <a:r>
+              <a:rPr lang="fr-CA" dirty="0"/>
+              <a:t>» dans la </a:t>
+            </a:r>
+            <a:r>
+              <a:rPr lang="fr-CA" b="1" dirty="0"/>
+              <a:t>console</a:t>
+            </a:r>
+            <a:r>
+              <a:rPr lang="fr-CA" dirty="0"/>
+              <a:t>.</a:t>
+            </a:r>
+          </a:p>
+          <a:p>
+            <a:pPr marL="1371600" lvl="2" indent="-457200">
+              <a:buFont typeface="+mj-lt"/>
+              <a:buAutoNum type="arabicParenR"/>
+            </a:pPr>
+            <a:endParaRPr lang="fr-CA" dirty="0"/>
+          </a:p>
+          <a:p>
+            <a:pPr lvl="1"/>
+            <a:r>
+              <a:rPr lang="fr-CA" dirty="0"/>
+              <a:t> Nous allons construire notre fonction étape par étape dans les prochaines diapositives.</a:t>
             </a:r>
           </a:p>
         </p:txBody>
@@ -15562,7 +16303,7 @@
           <p:cNvPr id="5" name="Image 4">
             <a:extLst>
               <a:ext uri="{FF2B5EF4-FFF2-40B4-BE49-F238E27FC236}">
-                <a16:creationId xmlns:a16="http://schemas.microsoft.com/office/drawing/2014/main" id="{5235F952-3397-4BD7-A94A-A0711F9F80A3}"/>
+                <a16:creationId xmlns:a16="http://schemas.microsoft.com/office/drawing/2014/main" id="{F262F67C-928A-4129-BFB0-E6202A031ECC}"/>
               </a:ext>
             </a:extLst>
           </p:cNvPr>
@@ -15579,8 +16320,8 @@
         </p:blipFill>
         <p:spPr>
           <a:xfrm>
-            <a:off x="2118004" y="3168900"/>
-            <a:ext cx="2372056" cy="2191056"/>
+            <a:off x="8058264" y="1021149"/>
+            <a:ext cx="3829584" cy="1743318"/>
           </a:xfrm>
           <a:prstGeom prst="rect">
             <a:avLst/>
@@ -15597,24 +16338,22 @@
           <p:cNvPr id="7" name="Connecteur droit avec flèche 6">
             <a:extLst>
               <a:ext uri="{FF2B5EF4-FFF2-40B4-BE49-F238E27FC236}">
-                <a16:creationId xmlns:a16="http://schemas.microsoft.com/office/drawing/2014/main" id="{E95BEC70-8565-4884-AA36-B915049D3B8A}"/>
-              </a:ext>
-            </a:extLst>
-          </p:cNvPr>
-          <p:cNvCxnSpPr>
-            <a:cxnSpLocks/>
-          </p:cNvCxnSpPr>
+                <a16:creationId xmlns:a16="http://schemas.microsoft.com/office/drawing/2014/main" id="{8B0DE27D-D6A5-4ADA-B51B-74B8FBE38D2A}"/>
+              </a:ext>
+            </a:extLst>
+          </p:cNvPr>
+          <p:cNvCxnSpPr/>
           <p:nvPr/>
         </p:nvCxnSpPr>
         <p:spPr>
           <a:xfrm flipH="1">
-            <a:off x="3724656" y="4264428"/>
-            <a:ext cx="338684" cy="533124"/>
+            <a:off x="9406128" y="1414272"/>
+            <a:ext cx="493776" cy="243840"/>
           </a:xfrm>
           <a:prstGeom prst="straightConnector1">
             <a:avLst/>
           </a:prstGeom>
-          <a:ln w="57150">
+          <a:ln w="38100">
             <a:solidFill>
               <a:srgbClr val="73B3D1"/>
             </a:solidFill>
@@ -15636,128 +16375,10 @@
           </a:fontRef>
         </p:style>
       </p:cxnSp>
-      <p:pic>
-        <p:nvPicPr>
-          <p:cNvPr id="10" name="Image 9">
-            <a:extLst>
-              <a:ext uri="{FF2B5EF4-FFF2-40B4-BE49-F238E27FC236}">
-                <a16:creationId xmlns:a16="http://schemas.microsoft.com/office/drawing/2014/main" id="{C86EF7CD-B903-437E-9740-0313AF2F37C3}"/>
-              </a:ext>
-            </a:extLst>
-          </p:cNvPr>
-          <p:cNvPicPr>
-            <a:picLocks noChangeAspect="1"/>
-          </p:cNvPicPr>
-          <p:nvPr/>
-        </p:nvPicPr>
-        <p:blipFill>
-          <a:blip r:embed="rId3"/>
-          <a:stretch>
-            <a:fillRect/>
-          </a:stretch>
-        </p:blipFill>
-        <p:spPr>
-          <a:xfrm>
-            <a:off x="5174224" y="3011715"/>
-            <a:ext cx="4696480" cy="2505425"/>
-          </a:xfrm>
-          <a:prstGeom prst="rect">
-            <a:avLst/>
-          </a:prstGeom>
-          <a:ln w="28575">
-            <a:solidFill>
-              <a:srgbClr val="9073D1"/>
-            </a:solidFill>
-          </a:ln>
-        </p:spPr>
-      </p:pic>
-      <p:cxnSp>
-        <p:nvCxnSpPr>
-          <p:cNvPr id="11" name="Connecteur droit avec flèche 10">
-            <a:extLst>
-              <a:ext uri="{FF2B5EF4-FFF2-40B4-BE49-F238E27FC236}">
-                <a16:creationId xmlns:a16="http://schemas.microsoft.com/office/drawing/2014/main" id="{2006A23C-DAC0-491E-92C0-780C0903F942}"/>
-              </a:ext>
-            </a:extLst>
-          </p:cNvPr>
-          <p:cNvCxnSpPr>
-            <a:cxnSpLocks/>
-          </p:cNvCxnSpPr>
-          <p:nvPr/>
-        </p:nvCxnSpPr>
-        <p:spPr>
-          <a:xfrm flipH="1" flipV="1">
-            <a:off x="6425184" y="4169664"/>
-            <a:ext cx="694944" cy="554736"/>
-          </a:xfrm>
-          <a:prstGeom prst="straightConnector1">
-            <a:avLst/>
-          </a:prstGeom>
-          <a:ln w="57150">
-            <a:solidFill>
-              <a:srgbClr val="73B3D1"/>
-            </a:solidFill>
-            <a:tailEnd type="triangle"/>
-          </a:ln>
-        </p:spPr>
-        <p:style>
-          <a:lnRef idx="1">
-            <a:schemeClr val="accent1"/>
-          </a:lnRef>
-          <a:fillRef idx="0">
-            <a:schemeClr val="accent1"/>
-          </a:fillRef>
-          <a:effectRef idx="0">
-            <a:schemeClr val="accent1"/>
-          </a:effectRef>
-          <a:fontRef idx="minor">
-            <a:schemeClr val="tx1"/>
-          </a:fontRef>
-        </p:style>
-      </p:cxnSp>
-      <p:sp>
-        <p:nvSpPr>
-          <p:cNvPr id="14" name="ZoneTexte 13">
-            <a:extLst>
-              <a:ext uri="{FF2B5EF4-FFF2-40B4-BE49-F238E27FC236}">
-                <a16:creationId xmlns:a16="http://schemas.microsoft.com/office/drawing/2014/main" id="{59176367-4792-456A-9C47-FAE573DF3DE3}"/>
-              </a:ext>
-            </a:extLst>
-          </p:cNvPr>
-          <p:cNvSpPr txBox="1"/>
-          <p:nvPr/>
-        </p:nvSpPr>
-        <p:spPr>
-          <a:xfrm>
-            <a:off x="6688592" y="4775175"/>
-            <a:ext cx="3182112" cy="369332"/>
-          </a:xfrm>
-          <a:prstGeom prst="rect">
-            <a:avLst/>
-          </a:prstGeom>
-          <a:noFill/>
-        </p:spPr>
-        <p:txBody>
-          <a:bodyPr wrap="square" rtlCol="0">
-            <a:spAutoFit/>
-          </a:bodyPr>
-          <a:lstStyle/>
-          <a:p>
-            <a:r>
-              <a:rPr lang="fr-CA" dirty="0">
-                <a:solidFill>
-                  <a:srgbClr val="9073D1"/>
-                </a:solidFill>
-              </a:rPr>
-              <a:t>La fonction sera déclarée ici !</a:t>
-            </a:r>
-          </a:p>
-        </p:txBody>
-      </p:sp>
     </p:spTree>
     <p:extLst>
       <p:ext uri="{BB962C8B-B14F-4D97-AF65-F5344CB8AC3E}">
-        <p14:creationId xmlns:p14="http://schemas.microsoft.com/office/powerpoint/2010/main" val="1018995648"/>
+        <p14:creationId xmlns:p14="http://schemas.microsoft.com/office/powerpoint/2010/main" val="3441020453"/>
       </p:ext>
     </p:extLst>
   </p:cSld>
@@ -16199,30 +16820,38 @@
                   <a:srgbClr val="FA4098"/>
                 </a:solidFill>
               </a:rPr>
-              <a:t>Étape 2</a:t>
-            </a:r>
-            <a:r>
-              <a:rPr lang="fr-CA" dirty="0"/>
-              <a:t> : Nommer la fonction et préparer sa structure</a:t>
+              <a:t>Étape 1</a:t>
+            </a:r>
+            <a:r>
+              <a:rPr lang="fr-CA" dirty="0"/>
+              <a:t> : Trouver le fichier </a:t>
+            </a:r>
+            <a:r>
+              <a:rPr lang="fr-CA" dirty="0">
+                <a:solidFill>
+                  <a:srgbClr val="73B3D1"/>
+                </a:solidFill>
+              </a:rPr>
+              <a:t>scripts.js </a:t>
+            </a:r>
+            <a:r>
+              <a:rPr lang="fr-CA" dirty="0"/>
+              <a:t>dans notre projet Web. (Ou le créer s’il n’existe pas)</a:t>
             </a:r>
           </a:p>
           <a:p>
             <a:pPr lvl="2"/>
             <a:r>
               <a:rPr lang="fr-CA" dirty="0"/>
-              <a:t> Ici, la fonction a été nommée </a:t>
-            </a:r>
-            <a:r>
-              <a:rPr lang="fr-CA" dirty="0">
-                <a:solidFill>
-                  <a:srgbClr val="FA4098"/>
-                </a:solidFill>
-              </a:rPr>
-              <a:t>texteSalade</a:t>
-            </a:r>
-            <a:r>
-              <a:rPr lang="fr-CA" dirty="0"/>
-              <a:t>. Pour l’instant, la fonction ne fait absolument rien. Il nous reste à ajouter des instructions à l’intérieur. </a:t>
+              <a:t> Ce fichier doit être situé dans le dossier « </a:t>
+            </a:r>
+            <a:r>
+              <a:rPr lang="fr-CA" b="1" dirty="0"/>
+              <a:t>js</a:t>
+            </a:r>
+            <a:r>
+              <a:rPr lang="fr-CA" dirty="0"/>
+              <a:t> » de notre projet Web.</a:t>
             </a:r>
           </a:p>
         </p:txBody>
@@ -16260,7 +16889,7 @@
           <p:cNvPr id="5" name="Image 4">
             <a:extLst>
               <a:ext uri="{FF2B5EF4-FFF2-40B4-BE49-F238E27FC236}">
-                <a16:creationId xmlns:a16="http://schemas.microsoft.com/office/drawing/2014/main" id="{B712FBEB-31C9-4C71-9A1A-4D19822624C8}"/>
+                <a16:creationId xmlns:a16="http://schemas.microsoft.com/office/drawing/2014/main" id="{5235F952-3397-4BD7-A94A-A0711F9F80A3}"/>
               </a:ext>
             </a:extLst>
           </p:cNvPr>
@@ -16277,8 +16906,8 @@
         </p:blipFill>
         <p:spPr>
           <a:xfrm>
-            <a:off x="2594181" y="2787592"/>
-            <a:ext cx="7171611" cy="2141470"/>
+            <a:off x="2118004" y="3168900"/>
+            <a:ext cx="2372056" cy="2191056"/>
           </a:xfrm>
           <a:prstGeom prst="rect">
             <a:avLst/>
@@ -16290,10 +16919,172 @@
           </a:ln>
         </p:spPr>
       </p:pic>
+      <p:cxnSp>
+        <p:nvCxnSpPr>
+          <p:cNvPr id="7" name="Connecteur droit avec flèche 6">
+            <a:extLst>
+              <a:ext uri="{FF2B5EF4-FFF2-40B4-BE49-F238E27FC236}">
+                <a16:creationId xmlns:a16="http://schemas.microsoft.com/office/drawing/2014/main" id="{E95BEC70-8565-4884-AA36-B915049D3B8A}"/>
+              </a:ext>
+            </a:extLst>
+          </p:cNvPr>
+          <p:cNvCxnSpPr>
+            <a:cxnSpLocks/>
+          </p:cNvCxnSpPr>
+          <p:nvPr/>
+        </p:nvCxnSpPr>
+        <p:spPr>
+          <a:xfrm flipH="1">
+            <a:off x="3724656" y="4264428"/>
+            <a:ext cx="338684" cy="533124"/>
+          </a:xfrm>
+          <a:prstGeom prst="straightConnector1">
+            <a:avLst/>
+          </a:prstGeom>
+          <a:ln w="57150">
+            <a:solidFill>
+              <a:srgbClr val="73B3D1"/>
+            </a:solidFill>
+            <a:tailEnd type="triangle"/>
+          </a:ln>
+        </p:spPr>
+        <p:style>
+          <a:lnRef idx="1">
+            <a:schemeClr val="accent1"/>
+          </a:lnRef>
+          <a:fillRef idx="0">
+            <a:schemeClr val="accent1"/>
+          </a:fillRef>
+          <a:effectRef idx="0">
+            <a:schemeClr val="accent1"/>
+          </a:effectRef>
+          <a:fontRef idx="minor">
+            <a:schemeClr val="tx1"/>
+          </a:fontRef>
+        </p:style>
+      </p:cxnSp>
+      <p:pic>
+        <p:nvPicPr>
+          <p:cNvPr id="10" name="Image 9">
+            <a:extLst>
+              <a:ext uri="{FF2B5EF4-FFF2-40B4-BE49-F238E27FC236}">
+                <a16:creationId xmlns:a16="http://schemas.microsoft.com/office/drawing/2014/main" id="{C86EF7CD-B903-437E-9740-0313AF2F37C3}"/>
+              </a:ext>
+            </a:extLst>
+          </p:cNvPr>
+          <p:cNvPicPr>
+            <a:picLocks noChangeAspect="1"/>
+          </p:cNvPicPr>
+          <p:nvPr/>
+        </p:nvPicPr>
+        <p:blipFill>
+          <a:blip r:embed="rId3"/>
+          <a:stretch>
+            <a:fillRect/>
+          </a:stretch>
+        </p:blipFill>
+        <p:spPr>
+          <a:xfrm>
+            <a:off x="5174224" y="3011715"/>
+            <a:ext cx="4696480" cy="2505425"/>
+          </a:xfrm>
+          <a:prstGeom prst="rect">
+            <a:avLst/>
+          </a:prstGeom>
+          <a:ln w="28575">
+            <a:solidFill>
+              <a:srgbClr val="9073D1"/>
+            </a:solidFill>
+          </a:ln>
+        </p:spPr>
+      </p:pic>
+      <p:cxnSp>
+        <p:nvCxnSpPr>
+          <p:cNvPr id="11" name="Connecteur droit avec flèche 10">
+            <a:extLst>
+              <a:ext uri="{FF2B5EF4-FFF2-40B4-BE49-F238E27FC236}">
+                <a16:creationId xmlns:a16="http://schemas.microsoft.com/office/drawing/2014/main" id="{2006A23C-DAC0-491E-92C0-780C0903F942}"/>
+              </a:ext>
+            </a:extLst>
+          </p:cNvPr>
+          <p:cNvCxnSpPr>
+            <a:cxnSpLocks/>
+          </p:cNvCxnSpPr>
+          <p:nvPr/>
+        </p:nvCxnSpPr>
+        <p:spPr>
+          <a:xfrm flipH="1" flipV="1">
+            <a:off x="6425184" y="4169664"/>
+            <a:ext cx="694944" cy="554736"/>
+          </a:xfrm>
+          <a:prstGeom prst="straightConnector1">
+            <a:avLst/>
+          </a:prstGeom>
+          <a:ln w="57150">
+            <a:solidFill>
+              <a:srgbClr val="73B3D1"/>
+            </a:solidFill>
+            <a:tailEnd type="triangle"/>
+          </a:ln>
+        </p:spPr>
+        <p:style>
+          <a:lnRef idx="1">
+            <a:schemeClr val="accent1"/>
+          </a:lnRef>
+          <a:fillRef idx="0">
+            <a:schemeClr val="accent1"/>
+          </a:fillRef>
+          <a:effectRef idx="0">
+            <a:schemeClr val="accent1"/>
+          </a:effectRef>
+          <a:fontRef idx="minor">
+            <a:schemeClr val="tx1"/>
+          </a:fontRef>
+        </p:style>
+      </p:cxnSp>
+      <p:sp>
+        <p:nvSpPr>
+          <p:cNvPr id="14" name="ZoneTexte 13">
+            <a:extLst>
+              <a:ext uri="{FF2B5EF4-FFF2-40B4-BE49-F238E27FC236}">
+                <a16:creationId xmlns:a16="http://schemas.microsoft.com/office/drawing/2014/main" id="{59176367-4792-456A-9C47-FAE573DF3DE3}"/>
+              </a:ext>
+            </a:extLst>
+          </p:cNvPr>
+          <p:cNvSpPr txBox="1"/>
+          <p:nvPr/>
+        </p:nvSpPr>
+        <p:spPr>
+          <a:xfrm>
+            <a:off x="6688592" y="4775175"/>
+            <a:ext cx="3182112" cy="369332"/>
+          </a:xfrm>
+          <a:prstGeom prst="rect">
+            <a:avLst/>
+          </a:prstGeom>
+          <a:noFill/>
+        </p:spPr>
+        <p:txBody>
+          <a:bodyPr wrap="square" rtlCol="0">
+            <a:spAutoFit/>
+          </a:bodyPr>
+          <a:lstStyle/>
+          <a:p>
+            <a:r>
+              <a:rPr lang="fr-CA" dirty="0">
+                <a:solidFill>
+                  <a:srgbClr val="9073D1"/>
+                </a:solidFill>
+              </a:rPr>
+              <a:t>La fonction sera déclarée ici !</a:t>
+            </a:r>
+          </a:p>
+        </p:txBody>
+      </p:sp>
     </p:spTree>
     <p:extLst>
       <p:ext uri="{BB962C8B-B14F-4D97-AF65-F5344CB8AC3E}">
-        <p14:creationId xmlns:p14="http://schemas.microsoft.com/office/powerpoint/2010/main" val="1104047408"/>
+        <p14:creationId xmlns:p14="http://schemas.microsoft.com/office/powerpoint/2010/main" val="1018995648"/>
       </p:ext>
     </p:extLst>
   </p:cSld>
@@ -16358,117 +17149,31 @@
                   <a:srgbClr val="FA4098"/>
                 </a:solidFill>
               </a:rPr>
-              <a:t>Étape 3</a:t>
-            </a:r>
-            <a:r>
-              <a:rPr lang="fr-CA" dirty="0"/>
-              <a:t> : Rédiger le code de la fonction</a:t>
+              <a:t>Étape 2</a:t>
+            </a:r>
+            <a:r>
+              <a:rPr lang="fr-CA" dirty="0"/>
+              <a:t> : Nommer la fonction et préparer sa structure</a:t>
             </a:r>
           </a:p>
           <a:p>
             <a:pPr lvl="2"/>
             <a:r>
               <a:rPr lang="fr-CA" dirty="0"/>
-              <a:t> Nous souhaitions que la fonction fasse trois choses :</a:t>
-            </a:r>
-          </a:p>
-          <a:p>
-            <a:pPr marL="1828800" lvl="3" indent="-457200">
-              <a:buFont typeface="+mj-lt"/>
-              <a:buAutoNum type="arabicParenR"/>
-            </a:pPr>
-            <a:r>
-              <a:rPr lang="fr-CA" dirty="0"/>
-              <a:t> Remplacer le texte « </a:t>
+              <a:t> Ici, la fonction a été nommée </a:t>
             </a:r>
             <a:r>
               <a:rPr lang="fr-CA" dirty="0">
                 <a:solidFill>
-                  <a:schemeClr val="tx1"/>
-                </a:solidFill>
-              </a:rPr>
-              <a:t>est le meilleur chat. </a:t>
-            </a:r>
-            <a:r>
-              <a:rPr lang="fr-CA" dirty="0"/>
-              <a:t>» par « </a:t>
-            </a:r>
-            <a:r>
-              <a:rPr lang="fr-CA" dirty="0">
-                <a:solidFill>
-                  <a:schemeClr val="tx1"/>
-                </a:solidFill>
-              </a:rPr>
-              <a:t>veut manger sa salade en paix. </a:t>
-            </a:r>
-            <a:r>
-              <a:rPr lang="fr-CA" dirty="0"/>
-              <a:t>» dans la page.</a:t>
-            </a:r>
-          </a:p>
-          <a:p>
-            <a:pPr marL="1828800" lvl="3" indent="-457200">
-              <a:buFont typeface="+mj-lt"/>
-              <a:buAutoNum type="arabicParenR"/>
-            </a:pPr>
-            <a:r>
-              <a:rPr lang="fr-CA" dirty="0"/>
-              <a:t> Faire un </a:t>
-            </a:r>
-            <a:r>
-              <a:rPr lang="fr-CA" b="1" dirty="0"/>
-              <a:t>pop-up</a:t>
-            </a:r>
-            <a:r>
-              <a:rPr lang="fr-CA" dirty="0"/>
-              <a:t> avec le message « </a:t>
-            </a:r>
-            <a:r>
-              <a:rPr lang="fr-CA" dirty="0">
-                <a:solidFill>
-                  <a:schemeClr val="tx1"/>
-                </a:solidFill>
-              </a:rPr>
-              <a:t>Texte changé ! </a:t>
-            </a:r>
-            <a:r>
-              <a:rPr lang="fr-CA" dirty="0"/>
-              <a:t>».</a:t>
-            </a:r>
-          </a:p>
-          <a:p>
-            <a:pPr marL="1828800" lvl="3" indent="-457200">
-              <a:buFont typeface="+mj-lt"/>
-              <a:buAutoNum type="arabicParenR"/>
-            </a:pPr>
-            <a:r>
-              <a:rPr lang="fr-CA" dirty="0"/>
-              <a:t> Afficher le message « </a:t>
-            </a:r>
-            <a:r>
-              <a:rPr lang="fr-CA" dirty="0">
-                <a:solidFill>
-                  <a:schemeClr val="tx1"/>
-                </a:solidFill>
-              </a:rPr>
-              <a:t>Fonction terminée. </a:t>
-            </a:r>
-            <a:r>
-              <a:rPr lang="fr-CA" dirty="0"/>
-              <a:t>» dans la </a:t>
-            </a:r>
-            <a:r>
-              <a:rPr lang="fr-CA" b="1" dirty="0"/>
-              <a:t>console</a:t>
-            </a:r>
-            <a:r>
-              <a:rPr lang="fr-CA" dirty="0"/>
-              <a:t>.</a:t>
-            </a:r>
-          </a:p>
-          <a:p>
-            <a:pPr lvl="2"/>
-            <a:endParaRPr lang="fr-CA" dirty="0"/>
+                  <a:srgbClr val="FA4098"/>
+                </a:solidFill>
+              </a:rPr>
+              <a:t>texteSalade</a:t>
+            </a:r>
+            <a:r>
+              <a:rPr lang="fr-CA" dirty="0"/>
+              <a:t>. Pour l’instant, la fonction ne fait absolument rien. Il nous reste à ajouter des instructions à l’intérieur. </a:t>
+            </a:r>
           </a:p>
         </p:txBody>
       </p:sp>
@@ -16505,7 +17210,7 @@
           <p:cNvPr id="5" name="Image 4">
             <a:extLst>
               <a:ext uri="{FF2B5EF4-FFF2-40B4-BE49-F238E27FC236}">
-                <a16:creationId xmlns:a16="http://schemas.microsoft.com/office/drawing/2014/main" id="{49AA59B5-D9AA-4647-B482-A4A8F8432D38}"/>
+                <a16:creationId xmlns:a16="http://schemas.microsoft.com/office/drawing/2014/main" id="{B712FBEB-31C9-4C71-9A1A-4D19822624C8}"/>
               </a:ext>
             </a:extLst>
           </p:cNvPr>
@@ -16522,8 +17227,8 @@
         </p:blipFill>
         <p:spPr>
           <a:xfrm>
-            <a:off x="1439782" y="3917251"/>
-            <a:ext cx="3743741" cy="239217"/>
+            <a:off x="2594181" y="2787592"/>
+            <a:ext cx="7171611" cy="2141470"/>
           </a:xfrm>
           <a:prstGeom prst="rect">
             <a:avLst/>
@@ -16535,144 +17240,10 @@
           </a:ln>
         </p:spPr>
       </p:pic>
-      <p:pic>
-        <p:nvPicPr>
-          <p:cNvPr id="7" name="Image 6">
-            <a:extLst>
-              <a:ext uri="{FF2B5EF4-FFF2-40B4-BE49-F238E27FC236}">
-                <a16:creationId xmlns:a16="http://schemas.microsoft.com/office/drawing/2014/main" id="{26F4327A-964C-4F9C-B3C0-B349ED6EC8B0}"/>
-              </a:ext>
-            </a:extLst>
-          </p:cNvPr>
-          <p:cNvPicPr>
-            <a:picLocks noChangeAspect="1"/>
-          </p:cNvPicPr>
-          <p:nvPr/>
-        </p:nvPicPr>
-        <p:blipFill>
-          <a:blip r:embed="rId3"/>
-          <a:stretch>
-            <a:fillRect/>
-          </a:stretch>
-        </p:blipFill>
-        <p:spPr>
-          <a:xfrm>
-            <a:off x="1615351" y="4790967"/>
-            <a:ext cx="8957697" cy="1806105"/>
-          </a:xfrm>
-          <a:prstGeom prst="rect">
-            <a:avLst/>
-          </a:prstGeom>
-          <a:ln w="28575">
-            <a:solidFill>
-              <a:srgbClr val="9073D1"/>
-            </a:solidFill>
-          </a:ln>
-        </p:spPr>
-      </p:pic>
-      <p:sp>
-        <p:nvSpPr>
-          <p:cNvPr id="8" name="ZoneTexte 7">
-            <a:extLst>
-              <a:ext uri="{FF2B5EF4-FFF2-40B4-BE49-F238E27FC236}">
-                <a16:creationId xmlns:a16="http://schemas.microsoft.com/office/drawing/2014/main" id="{D91EA3D4-D2C7-4E00-9302-44546BD352F7}"/>
-              </a:ext>
-            </a:extLst>
-          </p:cNvPr>
-          <p:cNvSpPr txBox="1"/>
-          <p:nvPr/>
-        </p:nvSpPr>
-        <p:spPr>
-          <a:xfrm>
-            <a:off x="5785104" y="3721942"/>
-            <a:ext cx="5974080" cy="584775"/>
-          </a:xfrm>
-          <a:prstGeom prst="rect">
-            <a:avLst/>
-          </a:prstGeom>
-          <a:noFill/>
-        </p:spPr>
-        <p:txBody>
-          <a:bodyPr wrap="square" rtlCol="0">
-            <a:spAutoFit/>
-          </a:bodyPr>
-          <a:lstStyle/>
-          <a:p>
-            <a:r>
-              <a:rPr lang="fr-CA" sz="1600" dirty="0">
-                <a:solidFill>
-                  <a:srgbClr val="9073D1"/>
-                </a:solidFill>
-              </a:rPr>
-              <a:t>On jette un coup d’œil au code HTML pour trouver l’</a:t>
-            </a:r>
-            <a:r>
-              <a:rPr lang="fr-CA" sz="1600" dirty="0">
-                <a:solidFill>
-                  <a:srgbClr val="FA4098"/>
-                </a:solidFill>
-              </a:rPr>
-              <a:t>id</a:t>
-            </a:r>
-            <a:r>
-              <a:rPr lang="fr-CA" sz="1600" dirty="0">
-                <a:solidFill>
-                  <a:srgbClr val="9073D1"/>
-                </a:solidFill>
-              </a:rPr>
-              <a:t> de l’élément dont on souhaite changer le texte.</a:t>
-            </a:r>
-          </a:p>
-        </p:txBody>
-      </p:sp>
-      <p:cxnSp>
-        <p:nvCxnSpPr>
-          <p:cNvPr id="10" name="Connecteur droit avec flèche 9">
-            <a:extLst>
-              <a:ext uri="{FF2B5EF4-FFF2-40B4-BE49-F238E27FC236}">
-                <a16:creationId xmlns:a16="http://schemas.microsoft.com/office/drawing/2014/main" id="{C8C795A8-8A49-4942-9543-135DF8A9D881}"/>
-              </a:ext>
-            </a:extLst>
-          </p:cNvPr>
-          <p:cNvCxnSpPr>
-            <a:stCxn id="8" idx="1"/>
-          </p:cNvCxnSpPr>
-          <p:nvPr/>
-        </p:nvCxnSpPr>
-        <p:spPr>
-          <a:xfrm flipH="1" flipV="1">
-            <a:off x="5303520" y="4014329"/>
-            <a:ext cx="481584" cy="1"/>
-          </a:xfrm>
-          <a:prstGeom prst="straightConnector1">
-            <a:avLst/>
-          </a:prstGeom>
-          <a:ln w="38100">
-            <a:solidFill>
-              <a:srgbClr val="FA4098"/>
-            </a:solidFill>
-            <a:tailEnd type="triangle"/>
-          </a:ln>
-        </p:spPr>
-        <p:style>
-          <a:lnRef idx="1">
-            <a:schemeClr val="accent1"/>
-          </a:lnRef>
-          <a:fillRef idx="0">
-            <a:schemeClr val="accent1"/>
-          </a:fillRef>
-          <a:effectRef idx="0">
-            <a:schemeClr val="accent1"/>
-          </a:effectRef>
-          <a:fontRef idx="minor">
-            <a:schemeClr val="tx1"/>
-          </a:fontRef>
-        </p:style>
-      </p:cxnSp>
     </p:spTree>
     <p:extLst>
       <p:ext uri="{BB962C8B-B14F-4D97-AF65-F5344CB8AC3E}">
-        <p14:creationId xmlns:p14="http://schemas.microsoft.com/office/powerpoint/2010/main" val="3867078214"/>
+        <p14:creationId xmlns:p14="http://schemas.microsoft.com/office/powerpoint/2010/main" val="1104047408"/>
       </p:ext>
     </p:extLst>
   </p:cSld>
@@ -16737,6 +17308,385 @@
                   <a:srgbClr val="FA4098"/>
                 </a:solidFill>
               </a:rPr>
+              <a:t>Étape 3</a:t>
+            </a:r>
+            <a:r>
+              <a:rPr lang="fr-CA" dirty="0"/>
+              <a:t> : Rédiger le code de la fonction</a:t>
+            </a:r>
+          </a:p>
+          <a:p>
+            <a:pPr lvl="2"/>
+            <a:r>
+              <a:rPr lang="fr-CA" dirty="0"/>
+              <a:t> Nous souhaitions que la fonction fasse trois choses :</a:t>
+            </a:r>
+          </a:p>
+          <a:p>
+            <a:pPr marL="1828800" lvl="3" indent="-457200">
+              <a:buFont typeface="+mj-lt"/>
+              <a:buAutoNum type="arabicParenR"/>
+            </a:pPr>
+            <a:r>
+              <a:rPr lang="fr-CA" dirty="0"/>
+              <a:t> Remplacer le texte « </a:t>
+            </a:r>
+            <a:r>
+              <a:rPr lang="fr-CA" dirty="0">
+                <a:solidFill>
+                  <a:schemeClr val="tx1"/>
+                </a:solidFill>
+              </a:rPr>
+              <a:t>est le meilleur chat. </a:t>
+            </a:r>
+            <a:r>
+              <a:rPr lang="fr-CA" dirty="0"/>
+              <a:t>» par « </a:t>
+            </a:r>
+            <a:r>
+              <a:rPr lang="fr-CA" dirty="0">
+                <a:solidFill>
+                  <a:schemeClr val="tx1"/>
+                </a:solidFill>
+              </a:rPr>
+              <a:t>veut manger sa salade en paix. </a:t>
+            </a:r>
+            <a:r>
+              <a:rPr lang="fr-CA" dirty="0"/>
+              <a:t>» dans la page.</a:t>
+            </a:r>
+          </a:p>
+          <a:p>
+            <a:pPr marL="1828800" lvl="3" indent="-457200">
+              <a:buFont typeface="+mj-lt"/>
+              <a:buAutoNum type="arabicParenR"/>
+            </a:pPr>
+            <a:r>
+              <a:rPr lang="fr-CA" dirty="0"/>
+              <a:t> Faire un </a:t>
+            </a:r>
+            <a:r>
+              <a:rPr lang="fr-CA" b="1" dirty="0"/>
+              <a:t>pop-up</a:t>
+            </a:r>
+            <a:r>
+              <a:rPr lang="fr-CA" dirty="0"/>
+              <a:t> avec le message « </a:t>
+            </a:r>
+            <a:r>
+              <a:rPr lang="fr-CA" dirty="0">
+                <a:solidFill>
+                  <a:schemeClr val="tx1"/>
+                </a:solidFill>
+              </a:rPr>
+              <a:t>Texte changé ! </a:t>
+            </a:r>
+            <a:r>
+              <a:rPr lang="fr-CA" dirty="0"/>
+              <a:t>».</a:t>
+            </a:r>
+          </a:p>
+          <a:p>
+            <a:pPr marL="1828800" lvl="3" indent="-457200">
+              <a:buFont typeface="+mj-lt"/>
+              <a:buAutoNum type="arabicParenR"/>
+            </a:pPr>
+            <a:r>
+              <a:rPr lang="fr-CA" dirty="0"/>
+              <a:t> Afficher le message « </a:t>
+            </a:r>
+            <a:r>
+              <a:rPr lang="fr-CA" dirty="0">
+                <a:solidFill>
+                  <a:schemeClr val="tx1"/>
+                </a:solidFill>
+              </a:rPr>
+              <a:t>Fonction terminée. </a:t>
+            </a:r>
+            <a:r>
+              <a:rPr lang="fr-CA" dirty="0"/>
+              <a:t>» dans la </a:t>
+            </a:r>
+            <a:r>
+              <a:rPr lang="fr-CA" b="1" dirty="0"/>
+              <a:t>console</a:t>
+            </a:r>
+            <a:r>
+              <a:rPr lang="fr-CA" dirty="0"/>
+              <a:t>.</a:t>
+            </a:r>
+          </a:p>
+          <a:p>
+            <a:pPr lvl="2"/>
+            <a:endParaRPr lang="fr-CA" dirty="0"/>
+          </a:p>
+        </p:txBody>
+      </p:sp>
+      <p:sp>
+        <p:nvSpPr>
+          <p:cNvPr id="3" name="Titre 2">
+            <a:extLst>
+              <a:ext uri="{FF2B5EF4-FFF2-40B4-BE49-F238E27FC236}">
+                <a16:creationId xmlns:a16="http://schemas.microsoft.com/office/drawing/2014/main" id="{42668B4F-8D6C-49A7-A85E-3A815E202D69}"/>
+              </a:ext>
+            </a:extLst>
+          </p:cNvPr>
+          <p:cNvSpPr>
+            <a:spLocks noGrp="1"/>
+          </p:cNvSpPr>
+          <p:nvPr>
+            <p:ph type="title"/>
+          </p:nvPr>
+        </p:nvSpPr>
+        <p:spPr/>
+        <p:txBody>
+          <a:bodyPr/>
+          <a:lstStyle/>
+          <a:p>
+            <a:r>
+              <a:rPr lang="fr-CA" dirty="0"/>
+              <a:t>Intro aux fonctions</a:t>
+            </a:r>
+          </a:p>
+        </p:txBody>
+      </p:sp>
+      <p:pic>
+        <p:nvPicPr>
+          <p:cNvPr id="5" name="Image 4">
+            <a:extLst>
+              <a:ext uri="{FF2B5EF4-FFF2-40B4-BE49-F238E27FC236}">
+                <a16:creationId xmlns:a16="http://schemas.microsoft.com/office/drawing/2014/main" id="{49AA59B5-D9AA-4647-B482-A4A8F8432D38}"/>
+              </a:ext>
+            </a:extLst>
+          </p:cNvPr>
+          <p:cNvPicPr>
+            <a:picLocks noChangeAspect="1"/>
+          </p:cNvPicPr>
+          <p:nvPr/>
+        </p:nvPicPr>
+        <p:blipFill>
+          <a:blip r:embed="rId2"/>
+          <a:stretch>
+            <a:fillRect/>
+          </a:stretch>
+        </p:blipFill>
+        <p:spPr>
+          <a:xfrm>
+            <a:off x="1439782" y="3917251"/>
+            <a:ext cx="3743741" cy="239217"/>
+          </a:xfrm>
+          <a:prstGeom prst="rect">
+            <a:avLst/>
+          </a:prstGeom>
+          <a:ln w="28575">
+            <a:solidFill>
+              <a:srgbClr val="9073D1"/>
+            </a:solidFill>
+          </a:ln>
+        </p:spPr>
+      </p:pic>
+      <p:pic>
+        <p:nvPicPr>
+          <p:cNvPr id="7" name="Image 6">
+            <a:extLst>
+              <a:ext uri="{FF2B5EF4-FFF2-40B4-BE49-F238E27FC236}">
+                <a16:creationId xmlns:a16="http://schemas.microsoft.com/office/drawing/2014/main" id="{26F4327A-964C-4F9C-B3C0-B349ED6EC8B0}"/>
+              </a:ext>
+            </a:extLst>
+          </p:cNvPr>
+          <p:cNvPicPr>
+            <a:picLocks noChangeAspect="1"/>
+          </p:cNvPicPr>
+          <p:nvPr/>
+        </p:nvPicPr>
+        <p:blipFill>
+          <a:blip r:embed="rId3"/>
+          <a:stretch>
+            <a:fillRect/>
+          </a:stretch>
+        </p:blipFill>
+        <p:spPr>
+          <a:xfrm>
+            <a:off x="1615351" y="4790967"/>
+            <a:ext cx="8957697" cy="1806105"/>
+          </a:xfrm>
+          <a:prstGeom prst="rect">
+            <a:avLst/>
+          </a:prstGeom>
+          <a:ln w="28575">
+            <a:solidFill>
+              <a:srgbClr val="9073D1"/>
+            </a:solidFill>
+          </a:ln>
+        </p:spPr>
+      </p:pic>
+      <p:sp>
+        <p:nvSpPr>
+          <p:cNvPr id="8" name="ZoneTexte 7">
+            <a:extLst>
+              <a:ext uri="{FF2B5EF4-FFF2-40B4-BE49-F238E27FC236}">
+                <a16:creationId xmlns:a16="http://schemas.microsoft.com/office/drawing/2014/main" id="{D91EA3D4-D2C7-4E00-9302-44546BD352F7}"/>
+              </a:ext>
+            </a:extLst>
+          </p:cNvPr>
+          <p:cNvSpPr txBox="1"/>
+          <p:nvPr/>
+        </p:nvSpPr>
+        <p:spPr>
+          <a:xfrm>
+            <a:off x="5785104" y="3721942"/>
+            <a:ext cx="5974080" cy="584775"/>
+          </a:xfrm>
+          <a:prstGeom prst="rect">
+            <a:avLst/>
+          </a:prstGeom>
+          <a:noFill/>
+        </p:spPr>
+        <p:txBody>
+          <a:bodyPr wrap="square" rtlCol="0">
+            <a:spAutoFit/>
+          </a:bodyPr>
+          <a:lstStyle/>
+          <a:p>
+            <a:r>
+              <a:rPr lang="fr-CA" sz="1600" dirty="0">
+                <a:solidFill>
+                  <a:srgbClr val="9073D1"/>
+                </a:solidFill>
+              </a:rPr>
+              <a:t>On jette un coup d’œil au code HTML pour trouver l’</a:t>
+            </a:r>
+            <a:r>
+              <a:rPr lang="fr-CA" sz="1600" dirty="0">
+                <a:solidFill>
+                  <a:srgbClr val="FA4098"/>
+                </a:solidFill>
+              </a:rPr>
+              <a:t>id</a:t>
+            </a:r>
+            <a:r>
+              <a:rPr lang="fr-CA" sz="1600" dirty="0">
+                <a:solidFill>
+                  <a:srgbClr val="9073D1"/>
+                </a:solidFill>
+              </a:rPr>
+              <a:t> de l’élément dont on souhaite changer le texte.</a:t>
+            </a:r>
+          </a:p>
+        </p:txBody>
+      </p:sp>
+      <p:cxnSp>
+        <p:nvCxnSpPr>
+          <p:cNvPr id="10" name="Connecteur droit avec flèche 9">
+            <a:extLst>
+              <a:ext uri="{FF2B5EF4-FFF2-40B4-BE49-F238E27FC236}">
+                <a16:creationId xmlns:a16="http://schemas.microsoft.com/office/drawing/2014/main" id="{C8C795A8-8A49-4942-9543-135DF8A9D881}"/>
+              </a:ext>
+            </a:extLst>
+          </p:cNvPr>
+          <p:cNvCxnSpPr>
+            <a:stCxn id="8" idx="1"/>
+          </p:cNvCxnSpPr>
+          <p:nvPr/>
+        </p:nvCxnSpPr>
+        <p:spPr>
+          <a:xfrm flipH="1" flipV="1">
+            <a:off x="5303520" y="4014329"/>
+            <a:ext cx="481584" cy="1"/>
+          </a:xfrm>
+          <a:prstGeom prst="straightConnector1">
+            <a:avLst/>
+          </a:prstGeom>
+          <a:ln w="38100">
+            <a:solidFill>
+              <a:srgbClr val="FA4098"/>
+            </a:solidFill>
+            <a:tailEnd type="triangle"/>
+          </a:ln>
+        </p:spPr>
+        <p:style>
+          <a:lnRef idx="1">
+            <a:schemeClr val="accent1"/>
+          </a:lnRef>
+          <a:fillRef idx="0">
+            <a:schemeClr val="accent1"/>
+          </a:fillRef>
+          <a:effectRef idx="0">
+            <a:schemeClr val="accent1"/>
+          </a:effectRef>
+          <a:fontRef idx="minor">
+            <a:schemeClr val="tx1"/>
+          </a:fontRef>
+        </p:style>
+      </p:cxnSp>
+    </p:spTree>
+    <p:extLst>
+      <p:ext uri="{BB962C8B-B14F-4D97-AF65-F5344CB8AC3E}">
+        <p14:creationId xmlns:p14="http://schemas.microsoft.com/office/powerpoint/2010/main" val="3867078214"/>
+      </p:ext>
+    </p:extLst>
+  </p:cSld>
+  <p:clrMapOvr>
+    <a:masterClrMapping/>
+  </p:clrMapOvr>
+</p:sld>
+</file>
+
+<file path=ppt/slides/slide43.xml><?xml version="1.0" encoding="utf-8"?>
+<p:sld xmlns:a="http://schemas.openxmlformats.org/drawingml/2006/main" xmlns:r="http://schemas.openxmlformats.org/officeDocument/2006/relationships" xmlns:p="http://schemas.openxmlformats.org/presentationml/2006/main">
+  <p:cSld>
+    <p:spTree>
+      <p:nvGrpSpPr>
+        <p:cNvPr id="1" name=""/>
+        <p:cNvGrpSpPr/>
+        <p:nvPr/>
+      </p:nvGrpSpPr>
+      <p:grpSpPr>
+        <a:xfrm>
+          <a:off x="0" y="0"/>
+          <a:ext cx="0" cy="0"/>
+          <a:chOff x="0" y="0"/>
+          <a:chExt cx="0" cy="0"/>
+        </a:xfrm>
+      </p:grpSpPr>
+      <p:sp>
+        <p:nvSpPr>
+          <p:cNvPr id="2" name="Espace réservé du contenu 1">
+            <a:extLst>
+              <a:ext uri="{FF2B5EF4-FFF2-40B4-BE49-F238E27FC236}">
+                <a16:creationId xmlns:a16="http://schemas.microsoft.com/office/drawing/2014/main" id="{8766BE5C-20A6-4A56-BF0E-600D23B44A52}"/>
+              </a:ext>
+            </a:extLst>
+          </p:cNvPr>
+          <p:cNvSpPr>
+            <a:spLocks noGrp="1"/>
+          </p:cNvSpPr>
+          <p:nvPr>
+            <p:ph idx="1"/>
+          </p:nvPr>
+        </p:nvSpPr>
+        <p:spPr/>
+        <p:txBody>
+          <a:bodyPr/>
+          <a:lstStyle/>
+          <a:p>
+            <a:r>
+              <a:rPr lang="fr-CA" dirty="0"/>
+              <a:t> Créer une fonction</a:t>
+            </a:r>
+          </a:p>
+          <a:p>
+            <a:pPr lvl="1"/>
+            <a:r>
+              <a:rPr lang="fr-CA" dirty="0"/>
+              <a:t> </a:t>
+            </a:r>
+            <a:r>
+              <a:rPr lang="fr-CA" dirty="0">
+                <a:solidFill>
+                  <a:srgbClr val="FA4098"/>
+                </a:solidFill>
+              </a:rPr>
               <a:t>Étape 4</a:t>
             </a:r>
             <a:r>
@@ -16900,7 +17850,7 @@
 </p:sld>
 </file>
 
-<file path=ppt/slides/slide43.xml><?xml version="1.0" encoding="utf-8"?>
+<file path=ppt/slides/slide44.xml><?xml version="1.0" encoding="utf-8"?>
 <p:sld xmlns:a="http://schemas.openxmlformats.org/drawingml/2006/main" xmlns:r="http://schemas.openxmlformats.org/officeDocument/2006/relationships" xmlns:p="http://schemas.openxmlformats.org/presentationml/2006/main">
   <p:cSld>
     <p:spTree>
@@ -19989,13 +20939,13 @@
 </file>
 
 <file path=customXml/itemProps1.xml><?xml version="1.0" encoding="utf-8"?>
-<ds:datastoreItem xmlns:ds="http://schemas.openxmlformats.org/officeDocument/2006/customXml" ds:itemID="{BA4BF89D-879B-4221-B822-0C6034D53CCC}"/>
+<ds:datastoreItem xmlns:ds="http://schemas.openxmlformats.org/officeDocument/2006/customXml" ds:itemID="{4B203B3C-EA2D-4A26-A9CA-1660D6D9423C}"/>
 </file>
 
 <file path=customXml/itemProps2.xml><?xml version="1.0" encoding="utf-8"?>
-<ds:datastoreItem xmlns:ds="http://schemas.openxmlformats.org/officeDocument/2006/customXml" ds:itemID="{F9A1436D-42DB-4C28-A6C4-CA4CC7AE0CF0}"/>
+<ds:datastoreItem xmlns:ds="http://schemas.openxmlformats.org/officeDocument/2006/customXml" ds:itemID="{AD5261FE-0663-40A9-9E31-2EC0725B20BA}"/>
 </file>
 
 <file path=customXml/itemProps3.xml><?xml version="1.0" encoding="utf-8"?>
-<ds:datastoreItem xmlns:ds="http://schemas.openxmlformats.org/officeDocument/2006/customXml" ds:itemID="{FB7C2A85-38D3-4C3D-BCD4-BFDA610EEA0C}"/>
+<ds:datastoreItem xmlns:ds="http://schemas.openxmlformats.org/officeDocument/2006/customXml" ds:itemID="{8B1CC439-0CDD-4066-A763-A939C0D70C25}"/>
 </file>
--- a/semaine_02/420905_semaine2.pptx
+++ b/semaine_02/420905_semaine2.pptx
@@ -2,53 +2,53 @@
 <file path=ppt/presentation.xml><?xml version="1.0" encoding="utf-8"?>
 <p:presentation xmlns:a="http://schemas.openxmlformats.org/drawingml/2006/main" xmlns:r="http://schemas.openxmlformats.org/officeDocument/2006/relationships" xmlns:p="http://schemas.openxmlformats.org/presentationml/2006/main" saveSubsetFonts="1">
   <p:sldMasterIdLst>
-    <p:sldMasterId id="2147483648" r:id="rId1"/>
+    <p:sldMasterId id="2147483648" r:id="rId4"/>
   </p:sldMasterIdLst>
   <p:sldIdLst>
-    <p:sldId id="256" r:id="rId2"/>
-    <p:sldId id="259" r:id="rId3"/>
-    <p:sldId id="314" r:id="rId4"/>
-    <p:sldId id="278" r:id="rId5"/>
-    <p:sldId id="312" r:id="rId6"/>
-    <p:sldId id="315" r:id="rId7"/>
-    <p:sldId id="316" r:id="rId8"/>
-    <p:sldId id="317" r:id="rId9"/>
-    <p:sldId id="318" r:id="rId10"/>
-    <p:sldId id="319" r:id="rId11"/>
-    <p:sldId id="333" r:id="rId12"/>
-    <p:sldId id="265" r:id="rId13"/>
-    <p:sldId id="268" r:id="rId14"/>
-    <p:sldId id="311" r:id="rId15"/>
-    <p:sldId id="277" r:id="rId16"/>
-    <p:sldId id="269" r:id="rId17"/>
-    <p:sldId id="270" r:id="rId18"/>
-    <p:sldId id="334" r:id="rId19"/>
-    <p:sldId id="335" r:id="rId20"/>
-    <p:sldId id="336" r:id="rId21"/>
-    <p:sldId id="275" r:id="rId22"/>
-    <p:sldId id="320" r:id="rId23"/>
-    <p:sldId id="321" r:id="rId24"/>
-    <p:sldId id="322" r:id="rId25"/>
-    <p:sldId id="281" r:id="rId26"/>
-    <p:sldId id="282" r:id="rId27"/>
-    <p:sldId id="283" r:id="rId28"/>
-    <p:sldId id="337" r:id="rId29"/>
-    <p:sldId id="284" r:id="rId30"/>
-    <p:sldId id="285" r:id="rId31"/>
-    <p:sldId id="323" r:id="rId32"/>
-    <p:sldId id="291" r:id="rId33"/>
-    <p:sldId id="290" r:id="rId34"/>
-    <p:sldId id="292" r:id="rId35"/>
-    <p:sldId id="325" r:id="rId36"/>
-    <p:sldId id="324" r:id="rId37"/>
-    <p:sldId id="326" r:id="rId38"/>
-    <p:sldId id="302" r:id="rId39"/>
-    <p:sldId id="327" r:id="rId40"/>
-    <p:sldId id="328" r:id="rId41"/>
-    <p:sldId id="329" r:id="rId42"/>
-    <p:sldId id="330" r:id="rId43"/>
-    <p:sldId id="331" r:id="rId44"/>
-    <p:sldId id="332" r:id="rId45"/>
+    <p:sldId id="256" r:id="rId5"/>
+    <p:sldId id="259" r:id="rId6"/>
+    <p:sldId id="314" r:id="rId7"/>
+    <p:sldId id="278" r:id="rId8"/>
+    <p:sldId id="312" r:id="rId9"/>
+    <p:sldId id="315" r:id="rId10"/>
+    <p:sldId id="316" r:id="rId11"/>
+    <p:sldId id="317" r:id="rId12"/>
+    <p:sldId id="318" r:id="rId13"/>
+    <p:sldId id="319" r:id="rId14"/>
+    <p:sldId id="333" r:id="rId15"/>
+    <p:sldId id="265" r:id="rId16"/>
+    <p:sldId id="268" r:id="rId17"/>
+    <p:sldId id="311" r:id="rId18"/>
+    <p:sldId id="277" r:id="rId19"/>
+    <p:sldId id="269" r:id="rId20"/>
+    <p:sldId id="270" r:id="rId21"/>
+    <p:sldId id="334" r:id="rId22"/>
+    <p:sldId id="335" r:id="rId23"/>
+    <p:sldId id="336" r:id="rId24"/>
+    <p:sldId id="275" r:id="rId25"/>
+    <p:sldId id="320" r:id="rId26"/>
+    <p:sldId id="321" r:id="rId27"/>
+    <p:sldId id="322" r:id="rId28"/>
+    <p:sldId id="281" r:id="rId29"/>
+    <p:sldId id="282" r:id="rId30"/>
+    <p:sldId id="283" r:id="rId31"/>
+    <p:sldId id="337" r:id="rId32"/>
+    <p:sldId id="284" r:id="rId33"/>
+    <p:sldId id="285" r:id="rId34"/>
+    <p:sldId id="323" r:id="rId35"/>
+    <p:sldId id="291" r:id="rId36"/>
+    <p:sldId id="290" r:id="rId37"/>
+    <p:sldId id="292" r:id="rId38"/>
+    <p:sldId id="325" r:id="rId39"/>
+    <p:sldId id="324" r:id="rId40"/>
+    <p:sldId id="326" r:id="rId41"/>
+    <p:sldId id="302" r:id="rId42"/>
+    <p:sldId id="327" r:id="rId43"/>
+    <p:sldId id="328" r:id="rId44"/>
+    <p:sldId id="329" r:id="rId45"/>
+    <p:sldId id="330" r:id="rId46"/>
+    <p:sldId id="331" r:id="rId47"/>
+    <p:sldId id="332" r:id="rId48"/>
   </p:sldIdLst>
   <p:sldSz cx="12192000" cy="6858000"/>
   <p:notesSz cx="6858000" cy="9144000"/>
@@ -1946,7 +1946,7 @@
           <a:p>
             <a:fld id="{C2CBE6A3-4AEF-4734-8AB8-E4DE745DFB5E}" type="slidenum">
               <a:rPr lang="fr-CA" smtClean="0"/>
-              <a:t>‹N°›</a:t>
+              <a:t>‹n°›</a:t>
             </a:fld>
             <a:endParaRPr lang="fr-CA" dirty="0"/>
           </a:p>
@@ -7509,31 +7509,31 @@
                   <a:srgbClr val="73B3D1"/>
                 </a:solidFill>
               </a:rPr>
-              <a:t>Visual </a:t>
-            </a:r>
-            <a:r>
-              <a:rPr lang="fr-CA" b="1">
+              <a:t>Visual Studio Code </a:t>
+            </a:r>
+            <a:r>
+              <a:rPr lang="fr-CA" dirty="0">
+                <a:solidFill>
+                  <a:srgbClr val="797CDE"/>
+                </a:solidFill>
+              </a:rPr>
+              <a:t>et</a:t>
+            </a:r>
+            <a:r>
+              <a:rPr lang="fr-CA" b="1" dirty="0">
                 <a:solidFill>
                   <a:srgbClr val="73B3D1"/>
                 </a:solidFill>
               </a:rPr>
-              <a:t>Studio code </a:t>
-            </a:r>
-            <a:r>
-              <a:rPr lang="fr-CA">
-                <a:solidFill>
-                  <a:srgbClr val="797CDE"/>
-                </a:solidFill>
-              </a:rPr>
-              <a:t>et</a:t>
-            </a:r>
-            <a:r>
-              <a:rPr lang="fr-CA" b="1">
+              <a:t> </a:t>
+            </a:r>
+            <a:r>
+              <a:rPr lang="fr-CA" b="1" dirty="0" err="1">
                 <a:solidFill>
                   <a:srgbClr val="73B3D1"/>
                 </a:solidFill>
               </a:rPr>
-              <a:t> WebStorm</a:t>
+              <a:t>WebStorm</a:t>
             </a:r>
             <a:endParaRPr lang="fr-CA" b="1" dirty="0">
               <a:solidFill>
@@ -7545,42 +7545,14 @@
             <a:pPr lvl="1"/>
             <a:r>
               <a:rPr lang="fr-CA" dirty="0"/>
-              <a:t> </a:t>
-            </a:r>
-            <a:r>
-              <a:rPr lang="fr-CA"/>
-              <a:t>« Éditeurs </a:t>
-            </a:r>
-            <a:r>
-              <a:rPr lang="fr-CA" dirty="0"/>
-              <a:t>de code » pour plein de langages, dont HTML / </a:t>
-            </a:r>
-            <a:r>
-              <a:rPr lang="fr-CA"/>
-              <a:t>CSS</a:t>
-            </a:r>
-            <a:r>
-              <a:rPr lang="fr-CA" dirty="0"/>
-              <a:t> / JavaScript</a:t>
+              <a:t> « Éditeurs de code » pour plein de langages, dont HTML / CSS / JavaScript</a:t>
             </a:r>
           </a:p>
           <a:p>
             <a:pPr lvl="2"/>
             <a:r>
-              <a:rPr lang="fr-CA"/>
-              <a:t> Outils </a:t>
-            </a:r>
-            <a:r>
-              <a:rPr lang="fr-CA" dirty="0"/>
-              <a:t>qui </a:t>
-            </a:r>
-            <a:r>
-              <a:rPr lang="fr-CA"/>
-              <a:t>nous aideront </a:t>
-            </a:r>
-            <a:r>
-              <a:rPr lang="fr-CA" dirty="0"/>
-              <a:t>à créer des projets Web avec </a:t>
+              <a:rPr lang="fr-CA" dirty="0"/>
+              <a:t> Outils qui nous aideront à créer des projets Web avec </a:t>
             </a:r>
             <a:r>
               <a:rPr lang="fr-CA" b="1" dirty="0"/>
@@ -7594,11 +7566,11 @@
           <a:p>
             <a:pPr lvl="1"/>
             <a:r>
-              <a:rPr lang="fr-CA"/>
+              <a:rPr lang="fr-CA" dirty="0"/>
               <a:t> </a:t>
             </a:r>
             <a:r>
-              <a:rPr lang="fr-CA">
+              <a:rPr lang="fr-CA" dirty="0">
                 <a:solidFill>
                   <a:srgbClr val="FA4098"/>
                 </a:solidFill>
@@ -7606,11 +7578,11 @@
               <a:t>Visual Studio Code</a:t>
             </a:r>
             <a:r>
-              <a:rPr lang="fr-CA"/>
+              <a:rPr lang="fr-CA" dirty="0"/>
               <a:t> est gratuit </a:t>
             </a:r>
             <a:r>
-              <a:rPr lang="en-CA"/>
+              <a:rPr lang="en-CA" dirty="0"/>
               <a:t>🤩</a:t>
             </a:r>
             <a:endParaRPr lang="fr-CA" dirty="0"/>
@@ -7643,11 +7615,11 @@
           <a:p>
             <a:pPr lvl="1"/>
             <a:r>
-              <a:rPr lang="en-CA"/>
+              <a:rPr lang="en-CA" dirty="0"/>
               <a:t> </a:t>
             </a:r>
             <a:r>
-              <a:rPr lang="en-CA">
+              <a:rPr lang="en-CA" dirty="0">
                 <a:solidFill>
                   <a:srgbClr val="FA4098"/>
                 </a:solidFill>
@@ -7655,15 +7627,140 @@
               <a:t>WebStorm</a:t>
             </a:r>
             <a:r>
-              <a:rPr lang="en-CA"/>
-              <a:t> est payant 😳, mais il est disponible sur les ordinateurs du cégep</a:t>
-            </a:r>
+              <a:rPr lang="en-CA" dirty="0"/>
+              <a:t> </a:t>
+            </a:r>
+            <a:r>
+              <a:rPr lang="en-CA" dirty="0" err="1"/>
+              <a:t>est</a:t>
+            </a:r>
+            <a:r>
+              <a:rPr lang="en-CA" dirty="0"/>
+              <a:t> </a:t>
+            </a:r>
+            <a:r>
+              <a:rPr lang="en-CA" dirty="0" err="1"/>
+              <a:t>payant</a:t>
+            </a:r>
+            <a:r>
+              <a:rPr lang="en-CA" dirty="0"/>
+              <a:t> 😳, </a:t>
+            </a:r>
+            <a:r>
+              <a:rPr lang="en-CA" dirty="0" err="1"/>
+              <a:t>mais</a:t>
+            </a:r>
+            <a:r>
+              <a:rPr lang="en-CA" dirty="0"/>
+              <a:t> il </a:t>
+            </a:r>
+            <a:r>
+              <a:rPr lang="en-CA" dirty="0" err="1"/>
+              <a:t>est</a:t>
+            </a:r>
+            <a:r>
+              <a:rPr lang="en-CA" dirty="0"/>
+              <a:t> disponible sur les </a:t>
+            </a:r>
+            <a:r>
+              <a:rPr lang="en-CA" dirty="0" err="1"/>
+              <a:t>ordinateurs</a:t>
+            </a:r>
+            <a:r>
+              <a:rPr lang="en-CA" dirty="0"/>
+              <a:t> du </a:t>
+            </a:r>
+            <a:r>
+              <a:rPr lang="en-CA" dirty="0" err="1"/>
+              <a:t>cégep</a:t>
+            </a:r>
+            <a:endParaRPr lang="en-CA" dirty="0"/>
           </a:p>
           <a:p>
             <a:pPr lvl="2"/>
             <a:r>
-              <a:rPr lang="en-CA"/>
-              <a:t> À la maison, il est préférable d’utiliser Visual Studio Code. En classe, nous utiliserons Webstorm et / ou Visual Studio Code.</a:t>
+              <a:rPr lang="en-CA" dirty="0"/>
+              <a:t> </a:t>
+            </a:r>
+            <a:r>
+              <a:rPr lang="en-CA" dirty="0" err="1"/>
+              <a:t>À</a:t>
+            </a:r>
+            <a:r>
+              <a:rPr lang="en-CA" dirty="0"/>
+              <a:t> la </a:t>
+            </a:r>
+            <a:r>
+              <a:rPr lang="en-CA" dirty="0" err="1"/>
+              <a:t>maison</a:t>
+            </a:r>
+            <a:r>
+              <a:rPr lang="en-CA" dirty="0"/>
+              <a:t>, il </a:t>
+            </a:r>
+            <a:r>
+              <a:rPr lang="en-CA" dirty="0" err="1"/>
+              <a:t>est</a:t>
+            </a:r>
+            <a:r>
+              <a:rPr lang="en-CA" dirty="0"/>
+              <a:t> </a:t>
+            </a:r>
+            <a:r>
+              <a:rPr lang="en-CA" dirty="0" err="1"/>
+              <a:t>préférable</a:t>
+            </a:r>
+            <a:r>
+              <a:rPr lang="en-CA" dirty="0"/>
+              <a:t> </a:t>
+            </a:r>
+            <a:r>
+              <a:rPr lang="en-CA" dirty="0" err="1"/>
+              <a:t>d’utiliser</a:t>
+            </a:r>
+            <a:r>
+              <a:rPr lang="en-CA" dirty="0"/>
+              <a:t> Visual Studio Code. </a:t>
+            </a:r>
+            <a:r>
+              <a:rPr lang="en-CA" dirty="0" err="1"/>
+              <a:t>En</a:t>
+            </a:r>
+            <a:r>
+              <a:rPr lang="en-CA" dirty="0"/>
+              <a:t> </a:t>
+            </a:r>
+            <a:r>
+              <a:rPr lang="en-CA" dirty="0" err="1"/>
+              <a:t>classe</a:t>
+            </a:r>
+            <a:r>
+              <a:rPr lang="en-CA" dirty="0"/>
+              <a:t>, nous </a:t>
+            </a:r>
+            <a:r>
+              <a:rPr lang="en-CA" dirty="0" err="1"/>
+              <a:t>utiliserons</a:t>
+            </a:r>
+            <a:r>
+              <a:rPr lang="en-CA" dirty="0"/>
+              <a:t> </a:t>
+            </a:r>
+            <a:r>
+              <a:rPr lang="en-CA" dirty="0" err="1"/>
+              <a:t>Webstorm</a:t>
+            </a:r>
+            <a:r>
+              <a:rPr lang="en-CA" dirty="0"/>
+              <a:t> et/</a:t>
+            </a:r>
+            <a:r>
+              <a:rPr lang="en-CA" dirty="0" err="1"/>
+              <a:t>ou</a:t>
+            </a:r>
+            <a:r>
+              <a:rPr lang="en-CA" dirty="0"/>
+              <a:t> Visual Studio Code.</a:t>
             </a:r>
             <a:endParaRPr lang="fr-CA" dirty="0"/>
           </a:p>
@@ -11497,14 +11594,14 @@
             </a:r>
             <a:r>
               <a:rPr lang="fr-CA" dirty="0"/>
-              <a:t>, grossièrement ?</a:t>
+              <a:t>, grossièrement?</a:t>
             </a:r>
           </a:p>
           <a:p>
             <a:pPr lvl="1"/>
             <a:r>
               <a:rPr lang="fr-CA" dirty="0"/>
-              <a:t> Où déclarer une fonction ?</a:t>
+              <a:t> Où déclarer une fonction?</a:t>
             </a:r>
           </a:p>
           <a:p>
@@ -12120,7 +12217,7 @@
             </a:r>
             <a:r>
               <a:rPr lang="fr-CA" dirty="0"/>
-              <a:t>, grossièrement ? 🤔</a:t>
+              <a:t>, grossièrement? 🤔</a:t>
             </a:r>
           </a:p>
           <a:p>
@@ -12201,7 +12298,7 @@
             <a:pPr lvl="2"/>
             <a:r>
               <a:rPr lang="fr-CA" dirty="0"/>
-              <a:t> Comment c’est possible ? Nous n’avons même pas utilisé </a:t>
+              <a:t> Comment c’est possible? Nous n’avons même pas utilisé </a:t>
             </a:r>
             <a:r>
               <a:rPr lang="fr-CA" dirty="0">
@@ -12564,7 +12661,7 @@
             </a:r>
             <a:r>
               <a:rPr lang="fr-CA" dirty="0"/>
-              <a:t>, grossièrement ? 🤔</a:t>
+              <a:t>, grossièrement? 🤔</a:t>
             </a:r>
           </a:p>
           <a:p>
@@ -12677,14 +12774,10 @@
             </a:r>
             <a:r>
               <a:rPr lang="fr-CA" dirty="0"/>
-              <a:t> » cette fonction va nous permettre </a:t>
-            </a:r>
-            <a:r>
-              <a:rPr lang="fr-CA"/>
-              <a:t>de « </a:t>
-            </a:r>
-            <a:r>
-              <a:rPr lang="fr-CA" b="1" u="sng">
+              <a:t> » cette fonction va nous permettre de « </a:t>
+            </a:r>
+            <a:r>
+              <a:rPr lang="fr-CA" b="1" u="sng" dirty="0">
                 <a:solidFill>
                   <a:srgbClr val="FA4098"/>
                 </a:solidFill>
@@ -12692,12 +12785,8 @@
               <a:t>l’appeler</a:t>
             </a:r>
             <a:r>
-              <a:rPr lang="fr-CA"/>
-              <a:t> » </a:t>
-            </a:r>
-            <a:r>
-              <a:rPr lang="fr-CA" dirty="0"/>
-              <a:t>dans la console comme on l’a vu dans la diapositive précédente.</a:t>
+              <a:rPr lang="fr-CA" dirty="0"/>
+              <a:t> » dans la console comme on l’a vu dans la diapositive précédente.</a:t>
             </a:r>
           </a:p>
         </p:txBody>
@@ -20924,6 +21013,12 @@
 </file>
 
 <file path=customXml/item2.xml><?xml version="1.0" encoding="utf-8"?>
+<p:properties xmlns:p="http://schemas.microsoft.com/office/2006/metadata/properties" xmlns:xsi="http://www.w3.org/2001/XMLSchema-instance" xmlns:pc="http://schemas.microsoft.com/office/infopath/2007/PartnerControls">
+  <documentManagement/>
+</p:properties>
+</file>
+
+<file path=customXml/item3.xml><?xml version="1.0" encoding="utf-8"?>
 <?mso-contentType ?>
 <FormTemplates xmlns="http://schemas.microsoft.com/sharepoint/v3/contenttype/forms">
   <Display>DocumentLibraryForm</Display>
@@ -20932,20 +21027,37 @@
 </FormTemplates>
 </file>
 
-<file path=customXml/item3.xml><?xml version="1.0" encoding="utf-8"?>
-<p:properties xmlns:p="http://schemas.microsoft.com/office/2006/metadata/properties" xmlns:xsi="http://www.w3.org/2001/XMLSchema-instance" xmlns:pc="http://schemas.microsoft.com/office/infopath/2007/PartnerControls">
-  <documentManagement/>
-</p:properties>
-</file>
-
 <file path=customXml/itemProps1.xml><?xml version="1.0" encoding="utf-8"?>
-<ds:datastoreItem xmlns:ds="http://schemas.openxmlformats.org/officeDocument/2006/customXml" ds:itemID="{4B203B3C-EA2D-4A26-A9CA-1660D6D9423C}"/>
+<ds:datastoreItem xmlns:ds="http://schemas.openxmlformats.org/officeDocument/2006/customXml" ds:itemID="{4B203B3C-EA2D-4A26-A9CA-1660D6D9423C}">
+  <ds:schemaRefs>
+    <ds:schemaRef ds:uri="http://schemas.microsoft.com/office/2006/metadata/contentType"/>
+    <ds:schemaRef ds:uri="http://schemas.microsoft.com/office/2006/metadata/properties/metaAttributes"/>
+    <ds:schemaRef ds:uri="http://www.w3.org/2001/XMLSchema"/>
+    <ds:schemaRef ds:uri="http://schemas.microsoft.com/office/2006/metadata/properties"/>
+    <ds:schemaRef ds:uri="83ab252c-4429-4d3c-b354-a26bac7f17c4"/>
+    <ds:schemaRef ds:uri="http://schemas.microsoft.com/office/2006/documentManagement/types"/>
+    <ds:schemaRef ds:uri="http://schemas.microsoft.com/office/infopath/2007/PartnerControls"/>
+    <ds:schemaRef ds:uri="http://schemas.openxmlformats.org/package/2006/metadata/core-properties"/>
+    <ds:schemaRef ds:uri="http://purl.org/dc/elements/1.1/"/>
+    <ds:schemaRef ds:uri="http://purl.org/dc/terms/"/>
+    <ds:schemaRef ds:uri="http://schemas.microsoft.com/internal/obd"/>
+  </ds:schemaRefs>
+</ds:datastoreItem>
 </file>
 
 <file path=customXml/itemProps2.xml><?xml version="1.0" encoding="utf-8"?>
-<ds:datastoreItem xmlns:ds="http://schemas.openxmlformats.org/officeDocument/2006/customXml" ds:itemID="{AD5261FE-0663-40A9-9E31-2EC0725B20BA}"/>
+<ds:datastoreItem xmlns:ds="http://schemas.openxmlformats.org/officeDocument/2006/customXml" ds:itemID="{8B1CC439-0CDD-4066-A763-A939C0D70C25}">
+  <ds:schemaRefs>
+    <ds:schemaRef ds:uri="http://schemas.microsoft.com/office/2006/metadata/properties"/>
+    <ds:schemaRef ds:uri="http://schemas.microsoft.com/office/infopath/2007/PartnerControls"/>
+  </ds:schemaRefs>
+</ds:datastoreItem>
 </file>
 
 <file path=customXml/itemProps3.xml><?xml version="1.0" encoding="utf-8"?>
-<ds:datastoreItem xmlns:ds="http://schemas.openxmlformats.org/officeDocument/2006/customXml" ds:itemID="{8B1CC439-0CDD-4066-A763-A939C0D70C25}"/>
+<ds:datastoreItem xmlns:ds="http://schemas.openxmlformats.org/officeDocument/2006/customXml" ds:itemID="{AD5261FE-0663-40A9-9E31-2EC0725B20BA}">
+  <ds:schemaRefs>
+    <ds:schemaRef ds:uri="http://schemas.microsoft.com/sharepoint/v3/contenttype/forms"/>
+  </ds:schemaRefs>
+</ds:datastoreItem>
 </file>